--- a/bigtree/samples/bigtree_lab_organisms.pptx
+++ b/bigtree/samples/bigtree_lab_organisms.pptx
@@ -3660,7 +3660,7 @@
             <a:noFill/>
           </p:spPr>
           <p:txBody>
-            <a:bodyPr wrap="none" lIns="0" tIns="0" rIns="0" bIns="0" anchor="ctr">
+            <a:bodyPr wrap="square" lIns="0" tIns="0" rIns="0" bIns="0" anchor="ctr">
               <a:noAutofit/>
             </a:bodyPr>
             <a:lstStyle>
@@ -3706,7 +3706,7 @@
             <a:noFill/>
           </p:spPr>
           <p:txBody>
-            <a:bodyPr wrap="none" lIns="0" tIns="0" rIns="0" bIns="0" anchor="ctr">
+            <a:bodyPr wrap="square" lIns="0" tIns="0" rIns="0" bIns="0" anchor="ctr">
               <a:noAutofit/>
             </a:bodyPr>
             <a:lstStyle>
@@ -3752,7 +3752,7 @@
             <a:noFill/>
           </p:spPr>
           <p:txBody>
-            <a:bodyPr wrap="none" lIns="0" tIns="0" rIns="0" bIns="0" anchor="ctr">
+            <a:bodyPr wrap="square" lIns="0" tIns="0" rIns="0" bIns="0" anchor="ctr">
               <a:noAutofit/>
             </a:bodyPr>
             <a:lstStyle>
@@ -3798,7 +3798,7 @@
             <a:noFill/>
           </p:spPr>
           <p:txBody>
-            <a:bodyPr wrap="none" lIns="0" tIns="0" rIns="0" bIns="0" anchor="ctr">
+            <a:bodyPr wrap="square" lIns="0" tIns="0" rIns="0" bIns="0" anchor="ctr">
               <a:noAutofit/>
             </a:bodyPr>
             <a:lstStyle>
@@ -3866,7 +3866,7 @@
             <a:noFill/>
           </p:spPr>
           <p:txBody>
-            <a:bodyPr wrap="none" lIns="0" tIns="0" rIns="0" bIns="0" anchor="ctr">
+            <a:bodyPr wrap="square" lIns="0" tIns="0" rIns="0" bIns="0" anchor="ctr">
               <a:noAutofit/>
             </a:bodyPr>
             <a:lstStyle>
@@ -3912,7 +3912,7 @@
             <a:noFill/>
           </p:spPr>
           <p:txBody>
-            <a:bodyPr wrap="none" lIns="0" tIns="0" rIns="0" bIns="0" anchor="ctr">
+            <a:bodyPr wrap="square" lIns="0" tIns="0" rIns="0" bIns="0" anchor="ctr">
               <a:noAutofit/>
             </a:bodyPr>
             <a:lstStyle>
@@ -3958,7 +3958,7 @@
             <a:noFill/>
           </p:spPr>
           <p:txBody>
-            <a:bodyPr wrap="none" lIns="0" tIns="0" rIns="0" bIns="0" anchor="ctr">
+            <a:bodyPr wrap="square" lIns="0" tIns="0" rIns="0" bIns="0" anchor="ctr">
               <a:noAutofit/>
             </a:bodyPr>
             <a:lstStyle>
@@ -4004,7 +4004,7 @@
             <a:noFill/>
           </p:spPr>
           <p:txBody>
-            <a:bodyPr wrap="none" lIns="0" tIns="0" rIns="0" bIns="0" anchor="ctr">
+            <a:bodyPr wrap="square" lIns="0" tIns="0" rIns="0" bIns="0" anchor="ctr">
               <a:noAutofit/>
             </a:bodyPr>
             <a:lstStyle>
@@ -4072,7 +4072,7 @@
             <a:noFill/>
           </p:spPr>
           <p:txBody>
-            <a:bodyPr wrap="none" lIns="0" tIns="0" rIns="0" bIns="0" anchor="ctr">
+            <a:bodyPr wrap="square" lIns="0" tIns="0" rIns="0" bIns="0" anchor="ctr">
               <a:noAutofit/>
             </a:bodyPr>
             <a:lstStyle>
@@ -4118,7 +4118,7 @@
             <a:noFill/>
           </p:spPr>
           <p:txBody>
-            <a:bodyPr wrap="none" lIns="0" tIns="0" rIns="0" bIns="0" anchor="ctr">
+            <a:bodyPr wrap="square" lIns="0" tIns="0" rIns="0" bIns="0" anchor="ctr">
               <a:noAutofit/>
             </a:bodyPr>
             <a:lstStyle>
@@ -4164,7 +4164,7 @@
             <a:noFill/>
           </p:spPr>
           <p:txBody>
-            <a:bodyPr wrap="none" lIns="0" tIns="0" rIns="0" bIns="0" anchor="ctr">
+            <a:bodyPr wrap="square" lIns="0" tIns="0" rIns="0" bIns="0" anchor="ctr">
               <a:noAutofit/>
             </a:bodyPr>
             <a:lstStyle>
@@ -4364,7 +4364,7 @@
             <a:noFill/>
           </p:spPr>
           <p:txBody>
-            <a:bodyPr wrap="none" lIns="0" tIns="0" rIns="0" bIns="0" anchor="ctr">
+            <a:bodyPr wrap="square" lIns="0" tIns="0" rIns="0" bIns="0" anchor="ctr">
               <a:noAutofit/>
             </a:bodyPr>
             <a:lstStyle>
@@ -4410,7 +4410,7 @@
             <a:noFill/>
           </p:spPr>
           <p:txBody>
-            <a:bodyPr wrap="none" lIns="0" tIns="0" rIns="0" bIns="0" anchor="ctr">
+            <a:bodyPr wrap="square" lIns="0" tIns="0" rIns="0" bIns="0" anchor="ctr">
               <a:noAutofit/>
             </a:bodyPr>
             <a:lstStyle>
@@ -4522,7 +4522,7 @@
             <a:noFill/>
           </p:spPr>
           <p:txBody>
-            <a:bodyPr wrap="none" lIns="0" tIns="0" rIns="0" bIns="0" anchor="ctr">
+            <a:bodyPr wrap="square" lIns="0" tIns="0" rIns="0" bIns="0" anchor="ctr">
               <a:noAutofit/>
             </a:bodyPr>
             <a:lstStyle>
@@ -4616,7 +4616,7 @@
             <a:noFill/>
           </p:spPr>
           <p:txBody>
-            <a:bodyPr wrap="none" lIns="0" tIns="0" rIns="0" bIns="0" anchor="ctr">
+            <a:bodyPr wrap="square" lIns="0" tIns="0" rIns="0" bIns="0" anchor="ctr">
               <a:noAutofit/>
             </a:bodyPr>
             <a:lstStyle>
@@ -4662,7 +4662,7 @@
             <a:noFill/>
           </p:spPr>
           <p:txBody>
-            <a:bodyPr wrap="none" lIns="0" tIns="0" rIns="0" bIns="0" anchor="ctr">
+            <a:bodyPr wrap="square" lIns="0" tIns="0" rIns="0" bIns="0" anchor="ctr">
               <a:noAutofit/>
             </a:bodyPr>
             <a:lstStyle>
@@ -4774,7 +4774,7 @@
             <a:noFill/>
           </p:spPr>
           <p:txBody>
-            <a:bodyPr wrap="none" lIns="0" tIns="0" rIns="0" bIns="0" anchor="ctr">
+            <a:bodyPr wrap="square" lIns="0" tIns="0" rIns="0" bIns="0" anchor="ctr">
               <a:noAutofit/>
             </a:bodyPr>
             <a:lstStyle>
@@ -4868,7 +4868,7 @@
             <a:noFill/>
           </p:spPr>
           <p:txBody>
-            <a:bodyPr wrap="none" lIns="0" tIns="0" rIns="0" bIns="0" anchor="ctr">
+            <a:bodyPr wrap="square" lIns="0" tIns="0" rIns="0" bIns="0" anchor="ctr">
               <a:noAutofit/>
             </a:bodyPr>
             <a:lstStyle>
@@ -4914,7 +4914,7 @@
             <a:noFill/>
           </p:spPr>
           <p:txBody>
-            <a:bodyPr wrap="none" lIns="0" tIns="0" rIns="0" bIns="0" anchor="ctr">
+            <a:bodyPr wrap="square" lIns="0" tIns="0" rIns="0" bIns="0" anchor="ctr">
               <a:noAutofit/>
             </a:bodyPr>
             <a:lstStyle>
@@ -5026,7 +5026,7 @@
             <a:noFill/>
           </p:spPr>
           <p:txBody>
-            <a:bodyPr wrap="none" lIns="0" tIns="0" rIns="0" bIns="0" anchor="ctr">
+            <a:bodyPr wrap="square" lIns="0" tIns="0" rIns="0" bIns="0" anchor="ctr">
               <a:noAutofit/>
             </a:bodyPr>
             <a:lstStyle>
@@ -5118,7 +5118,7 @@
             <a:noFill/>
           </p:spPr>
           <p:txBody>
-            <a:bodyPr wrap="none" lIns="0" tIns="0" rIns="0" bIns="0" anchor="ctr">
+            <a:bodyPr wrap="square" lIns="0" tIns="0" rIns="0" bIns="0" anchor="ctr">
               <a:noAutofit/>
             </a:bodyPr>
             <a:lstStyle>
@@ -5164,7 +5164,7 @@
             <a:noFill/>
           </p:spPr>
           <p:txBody>
-            <a:bodyPr wrap="none" lIns="0" tIns="0" rIns="0" bIns="0" anchor="ctr">
+            <a:bodyPr wrap="square" lIns="0" tIns="0" rIns="0" bIns="0" anchor="ctr">
               <a:noAutofit/>
             </a:bodyPr>
             <a:lstStyle>
@@ -5276,7 +5276,7 @@
             <a:noFill/>
           </p:spPr>
           <p:txBody>
-            <a:bodyPr wrap="none" lIns="0" tIns="0" rIns="0" bIns="0" anchor="ctr">
+            <a:bodyPr wrap="square" lIns="0" tIns="0" rIns="0" bIns="0" anchor="ctr">
               <a:noAutofit/>
             </a:bodyPr>
             <a:lstStyle>
@@ -5498,7 +5498,7 @@
             <a:noFill/>
           </p:spPr>
           <p:txBody>
-            <a:bodyPr wrap="none" lIns="0" tIns="0" rIns="0" bIns="0" anchor="ctr">
+            <a:bodyPr wrap="square" lIns="0" tIns="0" rIns="0" bIns="0" anchor="ctr">
               <a:noAutofit/>
             </a:bodyPr>
             <a:lstStyle>
@@ -5544,7 +5544,7 @@
             <a:noFill/>
           </p:spPr>
           <p:txBody>
-            <a:bodyPr wrap="none" lIns="0" tIns="0" rIns="0" bIns="0" anchor="ctr">
+            <a:bodyPr wrap="square" lIns="0" tIns="0" rIns="0" bIns="0" anchor="ctr">
               <a:noAutofit/>
             </a:bodyPr>
             <a:lstStyle>
@@ -5590,7 +5590,7 @@
             <a:noFill/>
           </p:spPr>
           <p:txBody>
-            <a:bodyPr wrap="none" lIns="0" tIns="0" rIns="0" bIns="0" anchor="ctr">
+            <a:bodyPr wrap="square" lIns="0" tIns="0" rIns="0" bIns="0" anchor="ctr">
               <a:noAutofit/>
             </a:bodyPr>
             <a:lstStyle>
@@ -5636,7 +5636,7 @@
             <a:noFill/>
           </p:spPr>
           <p:txBody>
-            <a:bodyPr wrap="none" lIns="0" tIns="0" rIns="0" bIns="0" anchor="ctr">
+            <a:bodyPr wrap="square" lIns="0" tIns="0" rIns="0" bIns="0" anchor="ctr">
               <a:noAutofit/>
             </a:bodyPr>
             <a:lstStyle>
@@ -5682,7 +5682,7 @@
             <a:noFill/>
           </p:spPr>
           <p:txBody>
-            <a:bodyPr wrap="none" lIns="0" tIns="0" rIns="0" bIns="0" anchor="ctr">
+            <a:bodyPr wrap="square" lIns="0" tIns="0" rIns="0" bIns="0" anchor="ctr">
               <a:noAutofit/>
             </a:bodyPr>
             <a:lstStyle>
@@ -5728,7 +5728,7 @@
             <a:noFill/>
           </p:spPr>
           <p:txBody>
-            <a:bodyPr wrap="none" lIns="0" tIns="0" rIns="0" bIns="0" anchor="ctr">
+            <a:bodyPr wrap="square" lIns="0" tIns="0" rIns="0" bIns="0" anchor="ctr">
               <a:noAutofit/>
             </a:bodyPr>
             <a:lstStyle>
@@ -5774,7 +5774,7 @@
             <a:noFill/>
           </p:spPr>
           <p:txBody>
-            <a:bodyPr wrap="none" lIns="0" tIns="0" rIns="0" bIns="0" anchor="ctr">
+            <a:bodyPr wrap="square" lIns="0" tIns="0" rIns="0" bIns="0" anchor="ctr">
               <a:noAutofit/>
             </a:bodyPr>
             <a:lstStyle>
@@ -5820,7 +5820,7 @@
             <a:noFill/>
           </p:spPr>
           <p:txBody>
-            <a:bodyPr wrap="none" lIns="0" tIns="0" rIns="0" bIns="0" anchor="ctr">
+            <a:bodyPr wrap="square" lIns="0" tIns="0" rIns="0" bIns="0" anchor="ctr">
               <a:noAutofit/>
             </a:bodyPr>
             <a:lstStyle>
@@ -5866,7 +5866,7 @@
             <a:noFill/>
           </p:spPr>
           <p:txBody>
-            <a:bodyPr wrap="none" lIns="0" tIns="0" rIns="0" bIns="0" anchor="ctr">
+            <a:bodyPr wrap="square" lIns="0" tIns="0" rIns="0" bIns="0" anchor="ctr">
               <a:noAutofit/>
             </a:bodyPr>
             <a:lstStyle>
@@ -6040,7 +6040,7 @@
             <a:noFill/>
           </p:spPr>
           <p:txBody>
-            <a:bodyPr wrap="none" lIns="0" tIns="0" rIns="0" bIns="0" anchor="ctr">
+            <a:bodyPr wrap="square" lIns="0" tIns="0" rIns="0" bIns="0" anchor="ctr">
               <a:noAutofit/>
             </a:bodyPr>
             <a:lstStyle>
@@ -6108,7 +6108,7 @@
             <a:noFill/>
           </p:spPr>
           <p:txBody>
-            <a:bodyPr wrap="none" lIns="0" tIns="0" rIns="0" bIns="0" anchor="ctr">
+            <a:bodyPr wrap="square" lIns="0" tIns="0" rIns="0" bIns="0" anchor="ctr">
               <a:noAutofit/>
             </a:bodyPr>
             <a:lstStyle>
@@ -6176,7 +6176,7 @@
             <a:noFill/>
           </p:spPr>
           <p:txBody>
-            <a:bodyPr wrap="none" lIns="0" tIns="0" rIns="0" bIns="0" anchor="ctr">
+            <a:bodyPr wrap="square" lIns="0" tIns="0" rIns="0" bIns="0" anchor="ctr">
               <a:noAutofit/>
             </a:bodyPr>
             <a:lstStyle>
@@ -6266,7 +6266,7 @@
             <a:noFill/>
           </p:spPr>
           <p:txBody>
-            <a:bodyPr wrap="none" lIns="0" tIns="0" rIns="0" bIns="0" anchor="ctr">
+            <a:bodyPr wrap="square" lIns="0" tIns="0" rIns="0" bIns="0" anchor="ctr">
               <a:noAutofit/>
             </a:bodyPr>
             <a:lstStyle>
@@ -6312,7 +6312,7 @@
             <a:noFill/>
           </p:spPr>
           <p:txBody>
-            <a:bodyPr wrap="none" lIns="0" tIns="0" rIns="0" bIns="0" anchor="ctr">
+            <a:bodyPr wrap="square" lIns="0" tIns="0" rIns="0" bIns="0" anchor="ctr">
               <a:noAutofit/>
             </a:bodyPr>
             <a:lstStyle>
@@ -6358,7 +6358,7 @@
             <a:noFill/>
           </p:spPr>
           <p:txBody>
-            <a:bodyPr wrap="none" lIns="0" tIns="0" rIns="0" bIns="0" anchor="ctr">
+            <a:bodyPr wrap="square" lIns="0" tIns="0" rIns="0" bIns="0" anchor="ctr">
               <a:noAutofit/>
             </a:bodyPr>
             <a:lstStyle>
@@ -6497,7 +6497,7 @@
             <a:noFill/>
           </p:spPr>
           <p:txBody>
-            <a:bodyPr wrap="none" lIns="0" tIns="0" rIns="0" bIns="0" anchor="ctr">
+            <a:bodyPr wrap="square" lIns="0" tIns="0" rIns="0" bIns="0" anchor="ctr">
               <a:noAutofit/>
             </a:bodyPr>
             <a:lstStyle>
@@ -6543,7 +6543,7 @@
             <a:noFill/>
           </p:spPr>
           <p:txBody>
-            <a:bodyPr wrap="none" lIns="0" tIns="0" rIns="0" bIns="0" anchor="ctr">
+            <a:bodyPr wrap="square" lIns="0" tIns="0" rIns="0" bIns="0" anchor="ctr">
               <a:noAutofit/>
             </a:bodyPr>
             <a:lstStyle>
@@ -6589,7 +6589,7 @@
             <a:noFill/>
           </p:spPr>
           <p:txBody>
-            <a:bodyPr wrap="none" lIns="0" tIns="0" rIns="0" bIns="0" anchor="ctr">
+            <a:bodyPr wrap="square" lIns="0" tIns="0" rIns="0" bIns="0" anchor="ctr">
               <a:noAutofit/>
             </a:bodyPr>
             <a:lstStyle>
@@ -6728,7 +6728,7 @@
             <a:noFill/>
           </p:spPr>
           <p:txBody>
-            <a:bodyPr wrap="none" lIns="0" tIns="0" rIns="0" bIns="0" anchor="ctr">
+            <a:bodyPr wrap="square" lIns="0" tIns="0" rIns="0" bIns="0" anchor="ctr">
               <a:noAutofit/>
             </a:bodyPr>
             <a:lstStyle>
@@ -6774,7 +6774,7 @@
             <a:noFill/>
           </p:spPr>
           <p:txBody>
-            <a:bodyPr wrap="none" lIns="0" tIns="0" rIns="0" bIns="0" anchor="ctr">
+            <a:bodyPr wrap="square" lIns="0" tIns="0" rIns="0" bIns="0" anchor="ctr">
               <a:noAutofit/>
             </a:bodyPr>
             <a:lstStyle>
@@ -6820,7 +6820,7 @@
             <a:noFill/>
           </p:spPr>
           <p:txBody>
-            <a:bodyPr wrap="none" lIns="0" tIns="0" rIns="0" bIns="0" anchor="ctr">
+            <a:bodyPr wrap="square" lIns="0" tIns="0" rIns="0" bIns="0" anchor="ctr">
               <a:noAutofit/>
             </a:bodyPr>
             <a:lstStyle>
@@ -6959,7 +6959,7 @@
             <a:noFill/>
           </p:spPr>
           <p:txBody>
-            <a:bodyPr wrap="none" lIns="0" tIns="0" rIns="0" bIns="0" anchor="ctr">
+            <a:bodyPr wrap="square" lIns="0" tIns="0" rIns="0" bIns="0" anchor="ctr">
               <a:noAutofit/>
             </a:bodyPr>
             <a:lstStyle>
@@ -7005,7 +7005,7 @@
             <a:noFill/>
           </p:spPr>
           <p:txBody>
-            <a:bodyPr wrap="none" lIns="0" tIns="0" rIns="0" bIns="0" anchor="ctr">
+            <a:bodyPr wrap="square" lIns="0" tIns="0" rIns="0" bIns="0" anchor="ctr">
               <a:noAutofit/>
             </a:bodyPr>
             <a:lstStyle>
@@ -7051,7 +7051,7 @@
             <a:noFill/>
           </p:spPr>
           <p:txBody>
-            <a:bodyPr wrap="none" lIns="0" tIns="0" rIns="0" bIns="0" anchor="ctr">
+            <a:bodyPr wrap="square" lIns="0" tIns="0" rIns="0" bIns="0" anchor="ctr">
               <a:noAutofit/>
             </a:bodyPr>
             <a:lstStyle>
@@ -7190,7 +7190,7 @@
             <a:noFill/>
           </p:spPr>
           <p:txBody>
-            <a:bodyPr wrap="none" lIns="0" tIns="0" rIns="0" bIns="0" anchor="ctr">
+            <a:bodyPr wrap="square" lIns="0" tIns="0" rIns="0" bIns="0" anchor="ctr">
               <a:noAutofit/>
             </a:bodyPr>
             <a:lstStyle>
@@ -7236,7 +7236,7 @@
             <a:noFill/>
           </p:spPr>
           <p:txBody>
-            <a:bodyPr wrap="none" lIns="0" tIns="0" rIns="0" bIns="0" anchor="ctr">
+            <a:bodyPr wrap="square" lIns="0" tIns="0" rIns="0" bIns="0" anchor="ctr">
               <a:noAutofit/>
             </a:bodyPr>
             <a:lstStyle>
@@ -7282,7 +7282,7 @@
             <a:noFill/>
           </p:spPr>
           <p:txBody>
-            <a:bodyPr wrap="none" lIns="0" tIns="0" rIns="0" bIns="0" anchor="ctr">
+            <a:bodyPr wrap="square" lIns="0" tIns="0" rIns="0" bIns="0" anchor="ctr">
               <a:noAutofit/>
             </a:bodyPr>
             <a:lstStyle>
@@ -7484,7 +7484,7 @@
             <a:noFill/>
           </p:spPr>
           <p:txBody>
-            <a:bodyPr wrap="none" lIns="0" tIns="0" rIns="0" bIns="0" anchor="ctr">
+            <a:bodyPr wrap="square" lIns="0" tIns="0" rIns="0" bIns="0" anchor="ctr">
               <a:noAutofit/>
             </a:bodyPr>
             <a:lstStyle>
@@ -7530,7 +7530,7 @@
             <a:noFill/>
           </p:spPr>
           <p:txBody>
-            <a:bodyPr wrap="none" lIns="0" tIns="0" rIns="0" bIns="0" anchor="ctr">
+            <a:bodyPr wrap="square" lIns="0" tIns="0" rIns="0" bIns="0" anchor="ctr">
               <a:noAutofit/>
             </a:bodyPr>
             <a:lstStyle>
@@ -7576,7 +7576,7 @@
             <a:noFill/>
           </p:spPr>
           <p:txBody>
-            <a:bodyPr wrap="none" lIns="0" tIns="0" rIns="0" bIns="0" anchor="ctr">
+            <a:bodyPr wrap="square" lIns="0" tIns="0" rIns="0" bIns="0" anchor="ctr">
               <a:noAutofit/>
             </a:bodyPr>
             <a:lstStyle>
@@ -7666,7 +7666,7 @@
             <a:noFill/>
           </p:spPr>
           <p:txBody>
-            <a:bodyPr wrap="none" lIns="0" tIns="0" rIns="0" bIns="0" anchor="ctr">
+            <a:bodyPr wrap="square" lIns="0" tIns="0" rIns="0" bIns="0" anchor="ctr">
               <a:noAutofit/>
             </a:bodyPr>
             <a:lstStyle>
@@ -7712,7 +7712,7 @@
             <a:noFill/>
           </p:spPr>
           <p:txBody>
-            <a:bodyPr wrap="none" lIns="0" tIns="0" rIns="0" bIns="0" anchor="ctr">
+            <a:bodyPr wrap="square" lIns="0" tIns="0" rIns="0" bIns="0" anchor="ctr">
               <a:noAutofit/>
             </a:bodyPr>
             <a:lstStyle>
@@ -7758,7 +7758,7 @@
             <a:noFill/>
           </p:spPr>
           <p:txBody>
-            <a:bodyPr wrap="none" lIns="0" tIns="0" rIns="0" bIns="0" anchor="ctr">
+            <a:bodyPr wrap="square" lIns="0" tIns="0" rIns="0" bIns="0" anchor="ctr">
               <a:noAutofit/>
             </a:bodyPr>
             <a:lstStyle>
@@ -7848,7 +7848,7 @@
             <a:noFill/>
           </p:spPr>
           <p:txBody>
-            <a:bodyPr wrap="none" lIns="0" tIns="0" rIns="0" bIns="0" anchor="ctr">
+            <a:bodyPr wrap="square" lIns="0" tIns="0" rIns="0" bIns="0" anchor="ctr">
               <a:noAutofit/>
             </a:bodyPr>
             <a:lstStyle>
@@ -7894,7 +7894,7 @@
             <a:noFill/>
           </p:spPr>
           <p:txBody>
-            <a:bodyPr wrap="none" lIns="0" tIns="0" rIns="0" bIns="0" anchor="ctr">
+            <a:bodyPr wrap="square" lIns="0" tIns="0" rIns="0" bIns="0" anchor="ctr">
               <a:noAutofit/>
             </a:bodyPr>
             <a:lstStyle>
@@ -7940,7 +7940,7 @@
             <a:noFill/>
           </p:spPr>
           <p:txBody>
-            <a:bodyPr wrap="none" lIns="0" tIns="0" rIns="0" bIns="0" anchor="ctr">
+            <a:bodyPr wrap="square" lIns="0" tIns="0" rIns="0" bIns="0" anchor="ctr">
               <a:noAutofit/>
             </a:bodyPr>
             <a:lstStyle>
@@ -8030,7 +8030,7 @@
             <a:noFill/>
           </p:spPr>
           <p:txBody>
-            <a:bodyPr wrap="none" lIns="0" tIns="0" rIns="0" bIns="0" anchor="ctr">
+            <a:bodyPr wrap="square" lIns="0" tIns="0" rIns="0" bIns="0" anchor="ctr">
               <a:noAutofit/>
             </a:bodyPr>
             <a:lstStyle>
@@ -8076,7 +8076,7 @@
             <a:noFill/>
           </p:spPr>
           <p:txBody>
-            <a:bodyPr wrap="none" lIns="0" tIns="0" rIns="0" bIns="0" anchor="ctr">
+            <a:bodyPr wrap="square" lIns="0" tIns="0" rIns="0" bIns="0" anchor="ctr">
               <a:noAutofit/>
             </a:bodyPr>
             <a:lstStyle>
@@ -8122,7 +8122,7 @@
             <a:noFill/>
           </p:spPr>
           <p:txBody>
-            <a:bodyPr wrap="none" lIns="0" tIns="0" rIns="0" bIns="0" anchor="ctr">
+            <a:bodyPr wrap="square" lIns="0" tIns="0" rIns="0" bIns="0" anchor="ctr">
               <a:noAutofit/>
             </a:bodyPr>
             <a:lstStyle>
@@ -8212,7 +8212,7 @@
             <a:noFill/>
           </p:spPr>
           <p:txBody>
-            <a:bodyPr wrap="none" lIns="0" tIns="0" rIns="0" bIns="0" anchor="ctr">
+            <a:bodyPr wrap="square" lIns="0" tIns="0" rIns="0" bIns="0" anchor="ctr">
               <a:noAutofit/>
             </a:bodyPr>
             <a:lstStyle>
@@ -8258,7 +8258,7 @@
             <a:noFill/>
           </p:spPr>
           <p:txBody>
-            <a:bodyPr wrap="none" lIns="0" tIns="0" rIns="0" bIns="0" anchor="ctr">
+            <a:bodyPr wrap="square" lIns="0" tIns="0" rIns="0" bIns="0" anchor="ctr">
               <a:noAutofit/>
             </a:bodyPr>
             <a:lstStyle>
@@ -8304,7 +8304,7 @@
             <a:noFill/>
           </p:spPr>
           <p:txBody>
-            <a:bodyPr wrap="none" lIns="0" tIns="0" rIns="0" bIns="0" anchor="ctr">
+            <a:bodyPr wrap="square" lIns="0" tIns="0" rIns="0" bIns="0" anchor="ctr">
               <a:noAutofit/>
             </a:bodyPr>
             <a:lstStyle>
@@ -8394,7 +8394,7 @@
             <a:noFill/>
           </p:spPr>
           <p:txBody>
-            <a:bodyPr wrap="none" lIns="0" tIns="0" rIns="0" bIns="0" anchor="ctr">
+            <a:bodyPr wrap="square" lIns="0" tIns="0" rIns="0" bIns="0" anchor="ctr">
               <a:noAutofit/>
             </a:bodyPr>
             <a:lstStyle>
@@ -8440,7 +8440,7 @@
             <a:noFill/>
           </p:spPr>
           <p:txBody>
-            <a:bodyPr wrap="none" lIns="0" tIns="0" rIns="0" bIns="0" anchor="ctr">
+            <a:bodyPr wrap="square" lIns="0" tIns="0" rIns="0" bIns="0" anchor="ctr">
               <a:noAutofit/>
             </a:bodyPr>
             <a:lstStyle>
@@ -8486,7 +8486,7 @@
             <a:noFill/>
           </p:spPr>
           <p:txBody>
-            <a:bodyPr wrap="none" lIns="0" tIns="0" rIns="0" bIns="0" anchor="ctr">
+            <a:bodyPr wrap="square" lIns="0" tIns="0" rIns="0" bIns="0" anchor="ctr">
               <a:noAutofit/>
             </a:bodyPr>
             <a:lstStyle>
@@ -8687,7 +8687,7 @@
             <a:noFill/>
           </p:spPr>
           <p:txBody>
-            <a:bodyPr wrap="none" lIns="0" tIns="0" rIns="0" bIns="0" anchor="ctr">
+            <a:bodyPr wrap="square" lIns="0" tIns="0" rIns="0" bIns="0" anchor="ctr">
               <a:noAutofit/>
             </a:bodyPr>
             <a:lstStyle>
@@ -8785,7 +8785,7 @@
             <a:noFill/>
           </p:spPr>
           <p:txBody>
-            <a:bodyPr wrap="none" lIns="0" tIns="0" rIns="0" bIns="0" anchor="ctr">
+            <a:bodyPr wrap="square" lIns="0" tIns="0" rIns="0" bIns="0" anchor="ctr">
               <a:noAutofit/>
             </a:bodyPr>
             <a:lstStyle>
@@ -8883,7 +8883,7 @@
             <a:noFill/>
           </p:spPr>
           <p:txBody>
-            <a:bodyPr wrap="none" lIns="0" tIns="0" rIns="0" bIns="0" anchor="ctr">
+            <a:bodyPr wrap="square" lIns="0" tIns="0" rIns="0" bIns="0" anchor="ctr">
               <a:noAutofit/>
             </a:bodyPr>
             <a:lstStyle>
@@ -8981,7 +8981,7 @@
             <a:noFill/>
           </p:spPr>
           <p:txBody>
-            <a:bodyPr wrap="none" lIns="0" tIns="0" rIns="0" bIns="0" anchor="ctr">
+            <a:bodyPr wrap="square" lIns="0" tIns="0" rIns="0" bIns="0" anchor="ctr">
               <a:noAutofit/>
             </a:bodyPr>
             <a:lstStyle>
@@ -9079,7 +9079,7 @@
             <a:noFill/>
           </p:spPr>
           <p:txBody>
-            <a:bodyPr wrap="none" lIns="0" tIns="0" rIns="0" bIns="0" anchor="ctr">
+            <a:bodyPr wrap="square" lIns="0" tIns="0" rIns="0" bIns="0" anchor="ctr">
               <a:noAutofit/>
             </a:bodyPr>
             <a:lstStyle>
@@ -9125,7 +9125,7 @@
             <a:noFill/>
           </p:spPr>
           <p:txBody>
-            <a:bodyPr wrap="none" lIns="0" tIns="0" rIns="0" bIns="0" anchor="ctr">
+            <a:bodyPr wrap="square" lIns="0" tIns="0" rIns="0" bIns="0" anchor="ctr">
               <a:noAutofit/>
             </a:bodyPr>
             <a:lstStyle>
@@ -9299,7 +9299,7 @@
             <a:noFill/>
           </p:spPr>
           <p:txBody>
-            <a:bodyPr wrap="none" lIns="0" tIns="0" rIns="0" bIns="0" anchor="ctr">
+            <a:bodyPr wrap="square" lIns="0" tIns="0" rIns="0" bIns="0" anchor="ctr">
               <a:noAutofit/>
             </a:bodyPr>
             <a:lstStyle>
@@ -9367,7 +9367,7 @@
             <a:noFill/>
           </p:spPr>
           <p:txBody>
-            <a:bodyPr wrap="none" lIns="0" tIns="0" rIns="0" bIns="0" anchor="ctr">
+            <a:bodyPr wrap="square" lIns="0" tIns="0" rIns="0" bIns="0" anchor="ctr">
               <a:noAutofit/>
             </a:bodyPr>
             <a:lstStyle>
@@ -9413,7 +9413,7 @@
             <a:noFill/>
           </p:spPr>
           <p:txBody>
-            <a:bodyPr wrap="none" lIns="0" tIns="0" rIns="0" bIns="0" anchor="ctr">
+            <a:bodyPr wrap="square" lIns="0" tIns="0" rIns="0" bIns="0" anchor="ctr">
               <a:noAutofit/>
             </a:bodyPr>
             <a:lstStyle>
@@ -9459,7 +9459,7 @@
             <a:noFill/>
           </p:spPr>
           <p:txBody>
-            <a:bodyPr wrap="none" lIns="0" tIns="0" rIns="0" bIns="0" anchor="ctr">
+            <a:bodyPr wrap="square" lIns="0" tIns="0" rIns="0" bIns="0" anchor="ctr">
               <a:noAutofit/>
             </a:bodyPr>
             <a:lstStyle>
@@ -9527,7 +9527,7 @@
             <a:noFill/>
           </p:spPr>
           <p:txBody>
-            <a:bodyPr wrap="none" lIns="0" tIns="0" rIns="0" bIns="0" anchor="ctr">
+            <a:bodyPr wrap="square" lIns="0" tIns="0" rIns="0" bIns="0" anchor="ctr">
               <a:noAutofit/>
             </a:bodyPr>
             <a:lstStyle>
@@ -9573,7 +9573,7 @@
             <a:noFill/>
           </p:spPr>
           <p:txBody>
-            <a:bodyPr wrap="none" lIns="0" tIns="0" rIns="0" bIns="0" anchor="ctr">
+            <a:bodyPr wrap="square" lIns="0" tIns="0" rIns="0" bIns="0" anchor="ctr">
               <a:noAutofit/>
             </a:bodyPr>
             <a:lstStyle>
@@ -9619,7 +9619,7 @@
             <a:noFill/>
           </p:spPr>
           <p:txBody>
-            <a:bodyPr wrap="none" lIns="0" tIns="0" rIns="0" bIns="0" anchor="ctr">
+            <a:bodyPr wrap="square" lIns="0" tIns="0" rIns="0" bIns="0" anchor="ctr">
               <a:noAutofit/>
             </a:bodyPr>
             <a:lstStyle>
@@ -9687,7 +9687,7 @@
             <a:noFill/>
           </p:spPr>
           <p:txBody>
-            <a:bodyPr wrap="none" lIns="0" tIns="0" rIns="0" bIns="0" anchor="ctr">
+            <a:bodyPr wrap="square" lIns="0" tIns="0" rIns="0" bIns="0" anchor="ctr">
               <a:noAutofit/>
             </a:bodyPr>
             <a:lstStyle>
@@ -9733,7 +9733,7 @@
             <a:noFill/>
           </p:spPr>
           <p:txBody>
-            <a:bodyPr wrap="none" lIns="0" tIns="0" rIns="0" bIns="0" anchor="ctr">
+            <a:bodyPr wrap="square" lIns="0" tIns="0" rIns="0" bIns="0" anchor="ctr">
               <a:noAutofit/>
             </a:bodyPr>
             <a:lstStyle>
@@ -9779,7 +9779,7 @@
             <a:noFill/>
           </p:spPr>
           <p:txBody>
-            <a:bodyPr wrap="none" lIns="0" tIns="0" rIns="0" bIns="0" anchor="ctr">
+            <a:bodyPr wrap="square" lIns="0" tIns="0" rIns="0" bIns="0" anchor="ctr">
               <a:noAutofit/>
             </a:bodyPr>
             <a:lstStyle>
@@ -9847,7 +9847,7 @@
             <a:noFill/>
           </p:spPr>
           <p:txBody>
-            <a:bodyPr wrap="none" lIns="0" tIns="0" rIns="0" bIns="0" anchor="ctr">
+            <a:bodyPr wrap="square" lIns="0" tIns="0" rIns="0" bIns="0" anchor="ctr">
               <a:noAutofit/>
             </a:bodyPr>
             <a:lstStyle>
@@ -9893,7 +9893,7 @@
             <a:noFill/>
           </p:spPr>
           <p:txBody>
-            <a:bodyPr wrap="none" lIns="0" tIns="0" rIns="0" bIns="0" anchor="ctr">
+            <a:bodyPr wrap="square" lIns="0" tIns="0" rIns="0" bIns="0" anchor="ctr">
               <a:noAutofit/>
             </a:bodyPr>
             <a:lstStyle>
@@ -9939,7 +9939,7 @@
             <a:noFill/>
           </p:spPr>
           <p:txBody>
-            <a:bodyPr wrap="none" lIns="0" tIns="0" rIns="0" bIns="0" anchor="ctr">
+            <a:bodyPr wrap="square" lIns="0" tIns="0" rIns="0" bIns="0" anchor="ctr">
               <a:noAutofit/>
             </a:bodyPr>
             <a:lstStyle>
@@ -10135,7 +10135,7 @@
             <a:noFill/>
           </p:spPr>
           <p:txBody>
-            <a:bodyPr wrap="none" lIns="0" tIns="0" rIns="0" bIns="0" anchor="ctr">
+            <a:bodyPr wrap="square" lIns="0" tIns="0" rIns="0" bIns="0" anchor="ctr">
               <a:noAutofit/>
             </a:bodyPr>
             <a:lstStyle>
@@ -10225,7 +10225,7 @@
             <a:noFill/>
           </p:spPr>
           <p:txBody>
-            <a:bodyPr wrap="none" lIns="0" tIns="0" rIns="0" bIns="0" anchor="ctr">
+            <a:bodyPr wrap="square" lIns="0" tIns="0" rIns="0" bIns="0" anchor="ctr">
               <a:noAutofit/>
             </a:bodyPr>
             <a:lstStyle>
@@ -10315,7 +10315,7 @@
             <a:noFill/>
           </p:spPr>
           <p:txBody>
-            <a:bodyPr wrap="none" lIns="0" tIns="0" rIns="0" bIns="0" anchor="ctr">
+            <a:bodyPr wrap="square" lIns="0" tIns="0" rIns="0" bIns="0" anchor="ctr">
               <a:noAutofit/>
             </a:bodyPr>
             <a:lstStyle>
@@ -10405,7 +10405,7 @@
             <a:noFill/>
           </p:spPr>
           <p:txBody>
-            <a:bodyPr wrap="none" lIns="0" tIns="0" rIns="0" bIns="0" anchor="ctr">
+            <a:bodyPr wrap="square" lIns="0" tIns="0" rIns="0" bIns="0" anchor="ctr">
               <a:noAutofit/>
             </a:bodyPr>
             <a:lstStyle>
@@ -10451,7 +10451,7 @@
             <a:noFill/>
           </p:spPr>
           <p:txBody>
-            <a:bodyPr wrap="none" lIns="0" tIns="0" rIns="0" bIns="0" anchor="ctr">
+            <a:bodyPr wrap="square" lIns="0" tIns="0" rIns="0" bIns="0" anchor="ctr">
               <a:noAutofit/>
             </a:bodyPr>
             <a:lstStyle>
@@ -11013,7 +11013,7 @@
             <a:noFill/>
           </p:spPr>
           <p:txBody>
-            <a:bodyPr wrap="none" lIns="0" tIns="0" rIns="0" bIns="0" anchor="ctr">
+            <a:bodyPr wrap="square" lIns="0" tIns="0" rIns="0" bIns="0" anchor="ctr">
               <a:noAutofit/>
             </a:bodyPr>
             <a:lstStyle>
@@ -11059,7 +11059,7 @@
             <a:noFill/>
           </p:spPr>
           <p:txBody>
-            <a:bodyPr wrap="none" lIns="0" tIns="0" rIns="0" bIns="0" anchor="ctr">
+            <a:bodyPr wrap="square" lIns="0" tIns="0" rIns="0" bIns="0" anchor="ctr">
               <a:noAutofit/>
             </a:bodyPr>
             <a:lstStyle>
@@ -11105,7 +11105,7 @@
             <a:noFill/>
           </p:spPr>
           <p:txBody>
-            <a:bodyPr wrap="none" lIns="0" tIns="0" rIns="0" bIns="0" anchor="ctr">
+            <a:bodyPr wrap="square" lIns="0" tIns="0" rIns="0" bIns="0" anchor="ctr">
               <a:noAutofit/>
             </a:bodyPr>
             <a:lstStyle>
@@ -11151,7 +11151,7 @@
             <a:noFill/>
           </p:spPr>
           <p:txBody>
-            <a:bodyPr wrap="none" lIns="0" tIns="0" rIns="0" bIns="0" anchor="ctr">
+            <a:bodyPr wrap="square" lIns="0" tIns="0" rIns="0" bIns="0" anchor="ctr">
               <a:noAutofit/>
             </a:bodyPr>
             <a:lstStyle>
@@ -11219,7 +11219,7 @@
             <a:noFill/>
           </p:spPr>
           <p:txBody>
-            <a:bodyPr wrap="none" lIns="0" tIns="0" rIns="0" bIns="0" anchor="ctr">
+            <a:bodyPr wrap="square" lIns="0" tIns="0" rIns="0" bIns="0" anchor="ctr">
               <a:noAutofit/>
             </a:bodyPr>
             <a:lstStyle>
@@ -11287,7 +11287,7 @@
             <a:noFill/>
           </p:spPr>
           <p:txBody>
-            <a:bodyPr wrap="none" lIns="0" tIns="0" rIns="0" bIns="0" anchor="ctr">
+            <a:bodyPr wrap="square" lIns="0" tIns="0" rIns="0" bIns="0" anchor="ctr">
               <a:noAutofit/>
             </a:bodyPr>
             <a:lstStyle>
@@ -11355,7 +11355,7 @@
             <a:noFill/>
           </p:spPr>
           <p:txBody>
-            <a:bodyPr wrap="none" lIns="0" tIns="0" rIns="0" bIns="0" anchor="ctr">
+            <a:bodyPr wrap="square" lIns="0" tIns="0" rIns="0" bIns="0" anchor="ctr">
               <a:noAutofit/>
             </a:bodyPr>
             <a:lstStyle>
@@ -11423,7 +11423,7 @@
             <a:noFill/>
           </p:spPr>
           <p:txBody>
-            <a:bodyPr wrap="none" lIns="0" tIns="0" rIns="0" bIns="0" anchor="ctr">
+            <a:bodyPr wrap="square" lIns="0" tIns="0" rIns="0" bIns="0" anchor="ctr">
               <a:noAutofit/>
             </a:bodyPr>
             <a:lstStyle>
@@ -11597,7 +11597,7 @@
             <a:noFill/>
           </p:spPr>
           <p:txBody>
-            <a:bodyPr wrap="none" lIns="0" tIns="0" rIns="0" bIns="0" anchor="ctr">
+            <a:bodyPr wrap="square" lIns="0" tIns="0" rIns="0" bIns="0" anchor="ctr">
               <a:noAutofit/>
             </a:bodyPr>
             <a:lstStyle>
@@ -11714,7 +11714,7 @@
             <a:noFill/>
           </p:spPr>
           <p:txBody>
-            <a:bodyPr wrap="none" lIns="0" tIns="0" rIns="0" bIns="0" anchor="ctr">
+            <a:bodyPr wrap="square" lIns="0" tIns="0" rIns="0" bIns="0" anchor="ctr">
               <a:noAutofit/>
             </a:bodyPr>
             <a:lstStyle>
@@ -11760,7 +11760,7 @@
             <a:noFill/>
           </p:spPr>
           <p:txBody>
-            <a:bodyPr wrap="none" lIns="0" tIns="0" rIns="0" bIns="0" anchor="ctr">
+            <a:bodyPr wrap="square" lIns="0" tIns="0" rIns="0" bIns="0" anchor="ctr">
               <a:noAutofit/>
             </a:bodyPr>
             <a:lstStyle>
@@ -11877,7 +11877,7 @@
             <a:noFill/>
           </p:spPr>
           <p:txBody>
-            <a:bodyPr wrap="none" lIns="0" tIns="0" rIns="0" bIns="0" anchor="ctr">
+            <a:bodyPr wrap="square" lIns="0" tIns="0" rIns="0" bIns="0" anchor="ctr">
               <a:noAutofit/>
             </a:bodyPr>
             <a:lstStyle>
@@ -11923,7 +11923,7 @@
             <a:noFill/>
           </p:spPr>
           <p:txBody>
-            <a:bodyPr wrap="none" lIns="0" tIns="0" rIns="0" bIns="0" anchor="ctr">
+            <a:bodyPr wrap="square" lIns="0" tIns="0" rIns="0" bIns="0" anchor="ctr">
               <a:noAutofit/>
             </a:bodyPr>
             <a:lstStyle>
@@ -12040,7 +12040,7 @@
             <a:noFill/>
           </p:spPr>
           <p:txBody>
-            <a:bodyPr wrap="none" lIns="0" tIns="0" rIns="0" bIns="0" anchor="ctr">
+            <a:bodyPr wrap="square" lIns="0" tIns="0" rIns="0" bIns="0" anchor="ctr">
               <a:noAutofit/>
             </a:bodyPr>
             <a:lstStyle>
@@ -12086,7 +12086,7 @@
             <a:noFill/>
           </p:spPr>
           <p:txBody>
-            <a:bodyPr wrap="none" lIns="0" tIns="0" rIns="0" bIns="0" anchor="ctr">
+            <a:bodyPr wrap="square" lIns="0" tIns="0" rIns="0" bIns="0" anchor="ctr">
               <a:noAutofit/>
             </a:bodyPr>
             <a:lstStyle>
@@ -12585,7 +12585,7 @@
             <a:noFill/>
           </p:spPr>
           <p:txBody>
-            <a:bodyPr wrap="none" lIns="0" tIns="0" rIns="0" bIns="0" anchor="ctr">
+            <a:bodyPr wrap="square" lIns="0" tIns="0" rIns="0" bIns="0" anchor="ctr">
               <a:noAutofit/>
             </a:bodyPr>
             <a:lstStyle>
@@ -12719,7 +12719,7 @@
             <a:noFill/>
           </p:spPr>
           <p:txBody>
-            <a:bodyPr wrap="none" lIns="0" tIns="0" rIns="0" bIns="0" anchor="ctr">
+            <a:bodyPr wrap="square" lIns="0" tIns="0" rIns="0" bIns="0" anchor="ctr">
               <a:noAutofit/>
             </a:bodyPr>
             <a:lstStyle>
@@ -12809,7 +12809,7 @@
             <a:noFill/>
           </p:spPr>
           <p:txBody>
-            <a:bodyPr wrap="none" lIns="0" tIns="0" rIns="0" bIns="0" anchor="ctr">
+            <a:bodyPr wrap="square" lIns="0" tIns="0" rIns="0" bIns="0" anchor="ctr">
               <a:noAutofit/>
             </a:bodyPr>
             <a:lstStyle>
@@ -12899,7 +12899,7 @@
             <a:noFill/>
           </p:spPr>
           <p:txBody>
-            <a:bodyPr wrap="none" lIns="0" tIns="0" rIns="0" bIns="0" anchor="ctr">
+            <a:bodyPr wrap="square" lIns="0" tIns="0" rIns="0" bIns="0" anchor="ctr">
               <a:noAutofit/>
             </a:bodyPr>
             <a:lstStyle>
@@ -12989,7 +12989,7 @@
             <a:noFill/>
           </p:spPr>
           <p:txBody>
-            <a:bodyPr wrap="none" lIns="0" tIns="0" rIns="0" bIns="0" anchor="ctr">
+            <a:bodyPr wrap="square" lIns="0" tIns="0" rIns="0" bIns="0" anchor="ctr">
               <a:noAutofit/>
             </a:bodyPr>
             <a:lstStyle>
@@ -13079,7 +13079,7 @@
             <a:noFill/>
           </p:spPr>
           <p:txBody>
-            <a:bodyPr wrap="none" lIns="0" tIns="0" rIns="0" bIns="0" anchor="ctr">
+            <a:bodyPr wrap="square" lIns="0" tIns="0" rIns="0" bIns="0" anchor="ctr">
               <a:noAutofit/>
             </a:bodyPr>
             <a:lstStyle>
@@ -13169,7 +13169,7 @@
             <a:noFill/>
           </p:spPr>
           <p:txBody>
-            <a:bodyPr wrap="none" lIns="0" tIns="0" rIns="0" bIns="0" anchor="ctr">
+            <a:bodyPr wrap="square" lIns="0" tIns="0" rIns="0" bIns="0" anchor="ctr">
               <a:noAutofit/>
             </a:bodyPr>
             <a:lstStyle>
@@ -13215,7 +13215,7 @@
             <a:noFill/>
           </p:spPr>
           <p:txBody>
-            <a:bodyPr wrap="none" lIns="0" tIns="0" rIns="0" bIns="0" anchor="ctr">
+            <a:bodyPr wrap="square" lIns="0" tIns="0" rIns="0" bIns="0" anchor="ctr">
               <a:noAutofit/>
             </a:bodyPr>
             <a:lstStyle>
@@ -13411,7 +13411,7 @@
             <a:noFill/>
           </p:spPr>
           <p:txBody>
-            <a:bodyPr wrap="none" lIns="0" tIns="0" rIns="0" bIns="0" anchor="ctr">
+            <a:bodyPr wrap="square" lIns="0" tIns="0" rIns="0" bIns="0" anchor="ctr">
               <a:noAutofit/>
             </a:bodyPr>
             <a:lstStyle>
@@ -13457,7 +13457,7 @@
             <a:noFill/>
           </p:spPr>
           <p:txBody>
-            <a:bodyPr wrap="none" lIns="0" tIns="0" rIns="0" bIns="0" anchor="ctr">
+            <a:bodyPr wrap="square" lIns="0" tIns="0" rIns="0" bIns="0" anchor="ctr">
               <a:noAutofit/>
             </a:bodyPr>
             <a:lstStyle>
@@ -13503,7 +13503,7 @@
             <a:noFill/>
           </p:spPr>
           <p:txBody>
-            <a:bodyPr wrap="none" lIns="0" tIns="0" rIns="0" bIns="0" anchor="ctr">
+            <a:bodyPr wrap="square" lIns="0" tIns="0" rIns="0" bIns="0" anchor="ctr">
               <a:noAutofit/>
             </a:bodyPr>
             <a:lstStyle>
@@ -13595,7 +13595,7 @@
             <a:noFill/>
           </p:spPr>
           <p:txBody>
-            <a:bodyPr wrap="none" lIns="0" tIns="0" rIns="0" bIns="0" anchor="ctr">
+            <a:bodyPr wrap="square" lIns="0" tIns="0" rIns="0" bIns="0" anchor="ctr">
               <a:noAutofit/>
             </a:bodyPr>
             <a:lstStyle>
@@ -13641,7 +13641,7 @@
             <a:noFill/>
           </p:spPr>
           <p:txBody>
-            <a:bodyPr wrap="none" lIns="0" tIns="0" rIns="0" bIns="0" anchor="ctr">
+            <a:bodyPr wrap="square" lIns="0" tIns="0" rIns="0" bIns="0" anchor="ctr">
               <a:noAutofit/>
             </a:bodyPr>
             <a:lstStyle>
@@ -13687,7 +13687,7 @@
             <a:noFill/>
           </p:spPr>
           <p:txBody>
-            <a:bodyPr wrap="none" lIns="0" tIns="0" rIns="0" bIns="0" anchor="ctr">
+            <a:bodyPr wrap="square" lIns="0" tIns="0" rIns="0" bIns="0" anchor="ctr">
               <a:noAutofit/>
             </a:bodyPr>
             <a:lstStyle>
@@ -13779,7 +13779,7 @@
             <a:noFill/>
           </p:spPr>
           <p:txBody>
-            <a:bodyPr wrap="none" lIns="0" tIns="0" rIns="0" bIns="0" anchor="ctr">
+            <a:bodyPr wrap="square" lIns="0" tIns="0" rIns="0" bIns="0" anchor="ctr">
               <a:noAutofit/>
             </a:bodyPr>
             <a:lstStyle>
@@ -13825,7 +13825,7 @@
             <a:noFill/>
           </p:spPr>
           <p:txBody>
-            <a:bodyPr wrap="none" lIns="0" tIns="0" rIns="0" bIns="0" anchor="ctr">
+            <a:bodyPr wrap="square" lIns="0" tIns="0" rIns="0" bIns="0" anchor="ctr">
               <a:noAutofit/>
             </a:bodyPr>
             <a:lstStyle>
@@ -13871,7 +13871,7 @@
             <a:noFill/>
           </p:spPr>
           <p:txBody>
-            <a:bodyPr wrap="none" lIns="0" tIns="0" rIns="0" bIns="0" anchor="ctr">
+            <a:bodyPr wrap="square" lIns="0" tIns="0" rIns="0" bIns="0" anchor="ctr">
               <a:noAutofit/>
             </a:bodyPr>
             <a:lstStyle>
@@ -14133,7 +14133,7 @@
             <a:noFill/>
           </p:spPr>
           <p:txBody>
-            <a:bodyPr wrap="none" lIns="0" tIns="0" rIns="0" bIns="0" anchor="ctr">
+            <a:bodyPr wrap="square" lIns="0" tIns="0" rIns="0" bIns="0" anchor="ctr">
               <a:noAutofit/>
             </a:bodyPr>
             <a:lstStyle>
@@ -14179,7 +14179,7 @@
             <a:noFill/>
           </p:spPr>
           <p:txBody>
-            <a:bodyPr wrap="none" lIns="0" tIns="0" rIns="0" bIns="0" anchor="ctr">
+            <a:bodyPr wrap="square" lIns="0" tIns="0" rIns="0" bIns="0" anchor="ctr">
               <a:noAutofit/>
             </a:bodyPr>
             <a:lstStyle>
@@ -14225,7 +14225,7 @@
             <a:noFill/>
           </p:spPr>
           <p:txBody>
-            <a:bodyPr wrap="none" lIns="0" tIns="0" rIns="0" bIns="0" anchor="ctr">
+            <a:bodyPr wrap="square" lIns="0" tIns="0" rIns="0" bIns="0" anchor="ctr">
               <a:noAutofit/>
             </a:bodyPr>
             <a:lstStyle>
@@ -14271,7 +14271,7 @@
             <a:noFill/>
           </p:spPr>
           <p:txBody>
-            <a:bodyPr wrap="none" lIns="0" tIns="0" rIns="0" bIns="0" anchor="ctr">
+            <a:bodyPr wrap="square" lIns="0" tIns="0" rIns="0" bIns="0" anchor="ctr">
               <a:noAutofit/>
             </a:bodyPr>
             <a:lstStyle>
@@ -14317,7 +14317,7 @@
             <a:noFill/>
           </p:spPr>
           <p:txBody>
-            <a:bodyPr wrap="none" lIns="0" tIns="0" rIns="0" bIns="0" anchor="ctr">
+            <a:bodyPr wrap="square" lIns="0" tIns="0" rIns="0" bIns="0" anchor="ctr">
               <a:noAutofit/>
             </a:bodyPr>
             <a:lstStyle>
@@ -14363,7 +14363,7 @@
             <a:noFill/>
           </p:spPr>
           <p:txBody>
-            <a:bodyPr wrap="none" lIns="0" tIns="0" rIns="0" bIns="0" anchor="ctr">
+            <a:bodyPr wrap="square" lIns="0" tIns="0" rIns="0" bIns="0" anchor="ctr">
               <a:noAutofit/>
             </a:bodyPr>
             <a:lstStyle>
@@ -14409,7 +14409,7 @@
             <a:noFill/>
           </p:spPr>
           <p:txBody>
-            <a:bodyPr wrap="none" lIns="0" tIns="0" rIns="0" bIns="0" anchor="ctr">
+            <a:bodyPr wrap="square" lIns="0" tIns="0" rIns="0" bIns="0" anchor="ctr">
               <a:noAutofit/>
             </a:bodyPr>
             <a:lstStyle>
@@ -14455,7 +14455,7 @@
             <a:noFill/>
           </p:spPr>
           <p:txBody>
-            <a:bodyPr wrap="none" lIns="0" tIns="0" rIns="0" bIns="0" anchor="ctr">
+            <a:bodyPr wrap="square" lIns="0" tIns="0" rIns="0" bIns="0" anchor="ctr">
               <a:noAutofit/>
             </a:bodyPr>
             <a:lstStyle>
@@ -14501,7 +14501,7 @@
             <a:noFill/>
           </p:spPr>
           <p:txBody>
-            <a:bodyPr wrap="none" lIns="0" tIns="0" rIns="0" bIns="0" anchor="ctr">
+            <a:bodyPr wrap="square" lIns="0" tIns="0" rIns="0" bIns="0" anchor="ctr">
               <a:noAutofit/>
             </a:bodyPr>
             <a:lstStyle>
@@ -14547,7 +14547,7 @@
             <a:noFill/>
           </p:spPr>
           <p:txBody>
-            <a:bodyPr wrap="none" lIns="0" tIns="0" rIns="0" bIns="0" anchor="ctr">
+            <a:bodyPr wrap="square" lIns="0" tIns="0" rIns="0" bIns="0" anchor="ctr">
               <a:noAutofit/>
             </a:bodyPr>
             <a:lstStyle>
@@ -14593,7 +14593,7 @@
             <a:noFill/>
           </p:spPr>
           <p:txBody>
-            <a:bodyPr wrap="none" lIns="0" tIns="0" rIns="0" bIns="0" anchor="ctr">
+            <a:bodyPr wrap="square" lIns="0" tIns="0" rIns="0" bIns="0" anchor="ctr">
               <a:noAutofit/>
             </a:bodyPr>
             <a:lstStyle>
@@ -14639,7 +14639,7 @@
             <a:noFill/>
           </p:spPr>
           <p:txBody>
-            <a:bodyPr wrap="none" lIns="0" tIns="0" rIns="0" bIns="0" anchor="ctr">
+            <a:bodyPr wrap="square" lIns="0" tIns="0" rIns="0" bIns="0" anchor="ctr">
               <a:noAutofit/>
             </a:bodyPr>
             <a:lstStyle>
@@ -14685,7 +14685,7 @@
             <a:noFill/>
           </p:spPr>
           <p:txBody>
-            <a:bodyPr wrap="none" lIns="0" tIns="0" rIns="0" bIns="0" anchor="ctr">
+            <a:bodyPr wrap="square" lIns="0" tIns="0" rIns="0" bIns="0" anchor="ctr">
               <a:noAutofit/>
             </a:bodyPr>
             <a:lstStyle>
@@ -14731,7 +14731,7 @@
             <a:noFill/>
           </p:spPr>
           <p:txBody>
-            <a:bodyPr wrap="none" lIns="0" tIns="0" rIns="0" bIns="0" anchor="ctr">
+            <a:bodyPr wrap="square" lIns="0" tIns="0" rIns="0" bIns="0" anchor="ctr">
               <a:noAutofit/>
             </a:bodyPr>
             <a:lstStyle>
@@ -14777,7 +14777,7 @@
             <a:noFill/>
           </p:spPr>
           <p:txBody>
-            <a:bodyPr wrap="none" lIns="0" tIns="0" rIns="0" bIns="0" anchor="ctr">
+            <a:bodyPr wrap="square" lIns="0" tIns="0" rIns="0" bIns="0" anchor="ctr">
               <a:noAutofit/>
             </a:bodyPr>
             <a:lstStyle>
@@ -14823,7 +14823,7 @@
             <a:noFill/>
           </p:spPr>
           <p:txBody>
-            <a:bodyPr wrap="none" lIns="0" tIns="0" rIns="0" bIns="0" anchor="ctr">
+            <a:bodyPr wrap="square" lIns="0" tIns="0" rIns="0" bIns="0" anchor="ctr">
               <a:noAutofit/>
             </a:bodyPr>
             <a:lstStyle>
@@ -14869,7 +14869,7 @@
             <a:noFill/>
           </p:spPr>
           <p:txBody>
-            <a:bodyPr wrap="none" lIns="0" tIns="0" rIns="0" bIns="0" anchor="ctr">
+            <a:bodyPr wrap="square" lIns="0" tIns="0" rIns="0" bIns="0" anchor="ctr">
               <a:noAutofit/>
             </a:bodyPr>
             <a:lstStyle>
@@ -14915,7 +14915,7 @@
             <a:noFill/>
           </p:spPr>
           <p:txBody>
-            <a:bodyPr wrap="none" lIns="0" tIns="0" rIns="0" bIns="0" anchor="ctr">
+            <a:bodyPr wrap="square" lIns="0" tIns="0" rIns="0" bIns="0" anchor="ctr">
               <a:noAutofit/>
             </a:bodyPr>
             <a:lstStyle>
@@ -14961,7 +14961,7 @@
             <a:noFill/>
           </p:spPr>
           <p:txBody>
-            <a:bodyPr wrap="none" lIns="0" tIns="0" rIns="0" bIns="0" anchor="ctr">
+            <a:bodyPr wrap="square" lIns="0" tIns="0" rIns="0" bIns="0" anchor="ctr">
               <a:noAutofit/>
             </a:bodyPr>
             <a:lstStyle>
@@ -15007,7 +15007,7 @@
             <a:noFill/>
           </p:spPr>
           <p:txBody>
-            <a:bodyPr wrap="none" lIns="0" tIns="0" rIns="0" bIns="0" anchor="ctr">
+            <a:bodyPr wrap="square" lIns="0" tIns="0" rIns="0" bIns="0" anchor="ctr">
               <a:noAutofit/>
             </a:bodyPr>
             <a:lstStyle>
@@ -15053,7 +15053,7 @@
             <a:noFill/>
           </p:spPr>
           <p:txBody>
-            <a:bodyPr wrap="none" lIns="0" tIns="0" rIns="0" bIns="0" anchor="ctr">
+            <a:bodyPr wrap="square" lIns="0" tIns="0" rIns="0" bIns="0" anchor="ctr">
               <a:noAutofit/>
             </a:bodyPr>
             <a:lstStyle>
@@ -15099,7 +15099,7 @@
             <a:noFill/>
           </p:spPr>
           <p:txBody>
-            <a:bodyPr wrap="none" lIns="0" tIns="0" rIns="0" bIns="0" anchor="ctr">
+            <a:bodyPr wrap="square" lIns="0" tIns="0" rIns="0" bIns="0" anchor="ctr">
               <a:noAutofit/>
             </a:bodyPr>
             <a:lstStyle>
@@ -15145,7 +15145,7 @@
             <a:noFill/>
           </p:spPr>
           <p:txBody>
-            <a:bodyPr wrap="none" lIns="0" tIns="0" rIns="0" bIns="0" anchor="ctr">
+            <a:bodyPr wrap="square" lIns="0" tIns="0" rIns="0" bIns="0" anchor="ctr">
               <a:noAutofit/>
             </a:bodyPr>
             <a:lstStyle>
@@ -15191,7 +15191,7 @@
             <a:noFill/>
           </p:spPr>
           <p:txBody>
-            <a:bodyPr wrap="none" lIns="0" tIns="0" rIns="0" bIns="0" anchor="ctr">
+            <a:bodyPr wrap="square" lIns="0" tIns="0" rIns="0" bIns="0" anchor="ctr">
               <a:noAutofit/>
             </a:bodyPr>
             <a:lstStyle>
@@ -15343,7 +15343,7 @@
             <a:noFill/>
           </p:spPr>
           <p:txBody>
-            <a:bodyPr wrap="none" lIns="0" tIns="0" rIns="0" bIns="0" anchor="ctr">
+            <a:bodyPr wrap="square" lIns="0" tIns="0" rIns="0" bIns="0" anchor="ctr">
               <a:noAutofit/>
             </a:bodyPr>
             <a:lstStyle>
@@ -15477,7 +15477,7 @@
             <a:noFill/>
           </p:spPr>
           <p:txBody>
-            <a:bodyPr wrap="none" lIns="0" tIns="0" rIns="0" bIns="0" anchor="ctr">
+            <a:bodyPr wrap="square" lIns="0" tIns="0" rIns="0" bIns="0" anchor="ctr">
               <a:noAutofit/>
             </a:bodyPr>
             <a:lstStyle>
@@ -15523,7 +15523,7 @@
             <a:noFill/>
           </p:spPr>
           <p:txBody>
-            <a:bodyPr wrap="none" lIns="0" tIns="0" rIns="0" bIns="0" anchor="ctr">
+            <a:bodyPr wrap="square" lIns="0" tIns="0" rIns="0" bIns="0" anchor="ctr">
               <a:noAutofit/>
             </a:bodyPr>
             <a:lstStyle>
@@ -15569,7 +15569,7 @@
             <a:noFill/>
           </p:spPr>
           <p:txBody>
-            <a:bodyPr wrap="none" lIns="0" tIns="0" rIns="0" bIns="0" anchor="ctr">
+            <a:bodyPr wrap="square" lIns="0" tIns="0" rIns="0" bIns="0" anchor="ctr">
               <a:noAutofit/>
             </a:bodyPr>
             <a:lstStyle>
@@ -15615,7 +15615,7 @@
             <a:noFill/>
           </p:spPr>
           <p:txBody>
-            <a:bodyPr wrap="none" lIns="0" tIns="0" rIns="0" bIns="0" anchor="ctr">
+            <a:bodyPr wrap="square" lIns="0" tIns="0" rIns="0" bIns="0" anchor="ctr">
               <a:noAutofit/>
             </a:bodyPr>
             <a:lstStyle>
@@ -16244,7 +16244,7 @@
             <a:noFill/>
           </p:spPr>
           <p:txBody>
-            <a:bodyPr wrap="none" lIns="0" tIns="0" rIns="0" bIns="0" anchor="ctr">
+            <a:bodyPr wrap="square" lIns="0" tIns="0" rIns="0" bIns="0" anchor="ctr">
               <a:noAutofit/>
             </a:bodyPr>
             <a:lstStyle>
@@ -16290,7 +16290,7 @@
             <a:noFill/>
           </p:spPr>
           <p:txBody>
-            <a:bodyPr wrap="none" lIns="0" tIns="0" rIns="0" bIns="0" anchor="ctr">
+            <a:bodyPr wrap="square" lIns="0" tIns="0" rIns="0" bIns="0" anchor="ctr">
               <a:noAutofit/>
             </a:bodyPr>
             <a:lstStyle>
@@ -16336,7 +16336,7 @@
             <a:noFill/>
           </p:spPr>
           <p:txBody>
-            <a:bodyPr wrap="none" lIns="0" tIns="0" rIns="0" bIns="0" anchor="ctr">
+            <a:bodyPr wrap="square" lIns="0" tIns="0" rIns="0" bIns="0" anchor="ctr">
               <a:noAutofit/>
             </a:bodyPr>
             <a:lstStyle>
@@ -16404,7 +16404,7 @@
             <a:noFill/>
           </p:spPr>
           <p:txBody>
-            <a:bodyPr wrap="none" lIns="0" tIns="0" rIns="0" bIns="0" anchor="ctr">
+            <a:bodyPr wrap="square" lIns="0" tIns="0" rIns="0" bIns="0" anchor="ctr">
               <a:noAutofit/>
             </a:bodyPr>
             <a:lstStyle>
@@ -16450,7 +16450,7 @@
             <a:noFill/>
           </p:spPr>
           <p:txBody>
-            <a:bodyPr wrap="none" lIns="0" tIns="0" rIns="0" bIns="0" anchor="ctr">
+            <a:bodyPr wrap="square" lIns="0" tIns="0" rIns="0" bIns="0" anchor="ctr">
               <a:noAutofit/>
             </a:bodyPr>
             <a:lstStyle>
@@ -16496,7 +16496,7 @@
             <a:noFill/>
           </p:spPr>
           <p:txBody>
-            <a:bodyPr wrap="none" lIns="0" tIns="0" rIns="0" bIns="0" anchor="ctr">
+            <a:bodyPr wrap="square" lIns="0" tIns="0" rIns="0" bIns="0" anchor="ctr">
               <a:noAutofit/>
             </a:bodyPr>
             <a:lstStyle>
@@ -16564,7 +16564,7 @@
             <a:noFill/>
           </p:spPr>
           <p:txBody>
-            <a:bodyPr wrap="none" lIns="0" tIns="0" rIns="0" bIns="0" anchor="ctr">
+            <a:bodyPr wrap="square" lIns="0" tIns="0" rIns="0" bIns="0" anchor="ctr">
               <a:noAutofit/>
             </a:bodyPr>
             <a:lstStyle>
@@ -16610,7 +16610,7 @@
             <a:noFill/>
           </p:spPr>
           <p:txBody>
-            <a:bodyPr wrap="none" lIns="0" tIns="0" rIns="0" bIns="0" anchor="ctr">
+            <a:bodyPr wrap="square" lIns="0" tIns="0" rIns="0" bIns="0" anchor="ctr">
               <a:noAutofit/>
             </a:bodyPr>
             <a:lstStyle>
@@ -16656,7 +16656,7 @@
             <a:noFill/>
           </p:spPr>
           <p:txBody>
-            <a:bodyPr wrap="none" lIns="0" tIns="0" rIns="0" bIns="0" anchor="ctr">
+            <a:bodyPr wrap="square" lIns="0" tIns="0" rIns="0" bIns="0" anchor="ctr">
               <a:noAutofit/>
             </a:bodyPr>
             <a:lstStyle>
@@ -16830,7 +16830,7 @@
             <a:noFill/>
           </p:spPr>
           <p:txBody>
-            <a:bodyPr wrap="none" lIns="0" tIns="0" rIns="0" bIns="0" anchor="ctr">
+            <a:bodyPr wrap="square" lIns="0" tIns="0" rIns="0" bIns="0" anchor="ctr">
               <a:noAutofit/>
             </a:bodyPr>
             <a:lstStyle>
@@ -16876,7 +16876,7 @@
             <a:noFill/>
           </p:spPr>
           <p:txBody>
-            <a:bodyPr wrap="none" lIns="0" tIns="0" rIns="0" bIns="0" anchor="ctr">
+            <a:bodyPr wrap="square" lIns="0" tIns="0" rIns="0" bIns="0" anchor="ctr">
               <a:noAutofit/>
             </a:bodyPr>
             <a:lstStyle>
@@ -16944,7 +16944,7 @@
             <a:noFill/>
           </p:spPr>
           <p:txBody>
-            <a:bodyPr wrap="none" lIns="0" tIns="0" rIns="0" bIns="0" anchor="ctr">
+            <a:bodyPr wrap="square" lIns="0" tIns="0" rIns="0" bIns="0" anchor="ctr">
               <a:noAutofit/>
             </a:bodyPr>
             <a:lstStyle>
@@ -17012,7 +17012,7 @@
             <a:noFill/>
           </p:spPr>
           <p:txBody>
-            <a:bodyPr wrap="none" lIns="0" tIns="0" rIns="0" bIns="0" anchor="ctr">
+            <a:bodyPr wrap="square" lIns="0" tIns="0" rIns="0" bIns="0" anchor="ctr">
               <a:noAutofit/>
             </a:bodyPr>
             <a:lstStyle>
@@ -17058,7 +17058,7 @@
             <a:noFill/>
           </p:spPr>
           <p:txBody>
-            <a:bodyPr wrap="none" lIns="0" tIns="0" rIns="0" bIns="0" anchor="ctr">
+            <a:bodyPr wrap="square" lIns="0" tIns="0" rIns="0" bIns="0" anchor="ctr">
               <a:noAutofit/>
             </a:bodyPr>
             <a:lstStyle>
@@ -17126,7 +17126,7 @@
             <a:noFill/>
           </p:spPr>
           <p:txBody>
-            <a:bodyPr wrap="none" lIns="0" tIns="0" rIns="0" bIns="0" anchor="ctr">
+            <a:bodyPr wrap="square" lIns="0" tIns="0" rIns="0" bIns="0" anchor="ctr">
               <a:noAutofit/>
             </a:bodyPr>
             <a:lstStyle>
@@ -17194,7 +17194,7 @@
             <a:noFill/>
           </p:spPr>
           <p:txBody>
-            <a:bodyPr wrap="none" lIns="0" tIns="0" rIns="0" bIns="0" anchor="ctr">
+            <a:bodyPr wrap="square" lIns="0" tIns="0" rIns="0" bIns="0" anchor="ctr">
               <a:noAutofit/>
             </a:bodyPr>
             <a:lstStyle>
@@ -17240,7 +17240,7 @@
             <a:noFill/>
           </p:spPr>
           <p:txBody>
-            <a:bodyPr wrap="none" lIns="0" tIns="0" rIns="0" bIns="0" anchor="ctr">
+            <a:bodyPr wrap="square" lIns="0" tIns="0" rIns="0" bIns="0" anchor="ctr">
               <a:noAutofit/>
             </a:bodyPr>
             <a:lstStyle>
@@ -17308,7 +17308,7 @@
             <a:noFill/>
           </p:spPr>
           <p:txBody>
-            <a:bodyPr wrap="none" lIns="0" tIns="0" rIns="0" bIns="0" anchor="ctr">
+            <a:bodyPr wrap="square" lIns="0" tIns="0" rIns="0" bIns="0" anchor="ctr">
               <a:noAutofit/>
             </a:bodyPr>
             <a:lstStyle>
@@ -17376,7 +17376,7 @@
             <a:noFill/>
           </p:spPr>
           <p:txBody>
-            <a:bodyPr wrap="none" lIns="0" tIns="0" rIns="0" bIns="0" anchor="ctr">
+            <a:bodyPr wrap="square" lIns="0" tIns="0" rIns="0" bIns="0" anchor="ctr">
               <a:noAutofit/>
             </a:bodyPr>
             <a:lstStyle>
@@ -17422,7 +17422,7 @@
             <a:noFill/>
           </p:spPr>
           <p:txBody>
-            <a:bodyPr wrap="none" lIns="0" tIns="0" rIns="0" bIns="0" anchor="ctr">
+            <a:bodyPr wrap="square" lIns="0" tIns="0" rIns="0" bIns="0" anchor="ctr">
               <a:noAutofit/>
             </a:bodyPr>
             <a:lstStyle>
@@ -17490,7 +17490,7 @@
             <a:noFill/>
           </p:spPr>
           <p:txBody>
-            <a:bodyPr wrap="none" lIns="0" tIns="0" rIns="0" bIns="0" anchor="ctr">
+            <a:bodyPr wrap="square" lIns="0" tIns="0" rIns="0" bIns="0" anchor="ctr">
               <a:noAutofit/>
             </a:bodyPr>
             <a:lstStyle>

--- a/bigtree/samples/bigtree_lab_organisms.pptx
+++ b/bigtree/samples/bigtree_lab_organisms.pptx
@@ -647,7 +647,7 @@
           <a:p>
             <a:r>
               <a:rPr lang="ja-JP"/>
-              <a:t>2026-09-20 ｜ Bigtree Lab ｜ だいき君</a:t>
+              <a:t>2026-09-18 ｜ Bigtree Lab ｜ だいき君</a:t>
             </a:r>
           </a:p>
         </p:txBody>
@@ -3533,7 +3533,7 @@
           <a:p>
             <a:r>
               <a:rPr lang="ja-JP"/>
-              <a:t>2026-09-20 ｜ Bigtree Lab ｜ だいき君</a:t>
+              <a:t>2026-09-18 ｜ Bigtree Lab ｜ だいき君</a:t>
             </a:r>
           </a:p>
         </p:txBody>

--- a/bigtree/samples/bigtree_lab_organisms.pptx
+++ b/bigtree/samples/bigtree_lab_organisms.pptx
@@ -240,129 +240,129 @@
             <a:cxnLst/>
             <a:rect l="0" t="0" r="r" b="b"/>
             <a:pathLst>
-              <a:path w="41660" h="54887">
+              <a:path w="347028" h="457200">
                 <a:moveTo>
-                  <a:pt x="1000" y="3887"/>
+                  <a:pt x="8330" y="32378"/>
                 </a:moveTo>
                 <a:lnTo>
-                  <a:pt x="1000" y="13887"/>
-                </a:lnTo>
-                <a:lnTo>
-                  <a:pt x="6000" y="16774"/>
-                </a:lnTo>
-                <a:lnTo>
-                  <a:pt x="6000" y="13887"/>
-                </a:lnTo>
-                <a:lnTo>
-                  <a:pt x="6000" y="8887"/>
-                </a:lnTo>
-                <a:lnTo>
-                  <a:pt x="23321" y="18887"/>
-                </a:lnTo>
-                <a:lnTo>
-                  <a:pt x="14660" y="23887"/>
-                </a:lnTo>
-                <a:lnTo>
-                  <a:pt x="15000" y="23887"/>
-                </a:lnTo>
-                <a:lnTo>
-                  <a:pt x="32320" y="33887"/>
-                </a:lnTo>
-                <a:lnTo>
-                  <a:pt x="23660" y="38887"/>
-                </a:lnTo>
-                <a:lnTo>
-                  <a:pt x="32000" y="38887"/>
-                </a:lnTo>
-                <a:lnTo>
-                  <a:pt x="40660" y="33887"/>
-                </a:lnTo>
-                <a:lnTo>
-                  <a:pt x="23340" y="23887"/>
-                </a:lnTo>
-                <a:lnTo>
-                  <a:pt x="32000" y="18887"/>
-                </a:lnTo>
-                <a:lnTo>
-                  <a:pt x="31981" y="18887"/>
-                </a:lnTo>
-                <a:lnTo>
-                  <a:pt x="14660" y="8887"/>
-                </a:lnTo>
-                <a:lnTo>
-                  <a:pt x="6000" y="3887"/>
-                </a:lnTo>
-                <a:lnTo>
-                  <a:pt x="1000" y="1000"/>
+                  <a:pt x="8330" y="115676"/>
+                </a:lnTo>
+                <a:lnTo>
+                  <a:pt x="49980" y="139724"/>
+                </a:lnTo>
+                <a:lnTo>
+                  <a:pt x="49980" y="115676"/>
+                </a:lnTo>
+                <a:lnTo>
+                  <a:pt x="49980" y="74027"/>
+                </a:lnTo>
+                <a:lnTo>
+                  <a:pt x="194264" y="157325"/>
+                </a:lnTo>
+                <a:lnTo>
+                  <a:pt x="122117" y="198974"/>
+                </a:lnTo>
+                <a:lnTo>
+                  <a:pt x="124950" y="198974"/>
+                </a:lnTo>
+                <a:lnTo>
+                  <a:pt x="269234" y="282273"/>
+                </a:lnTo>
+                <a:lnTo>
+                  <a:pt x="197087" y="323922"/>
+                </a:lnTo>
+                <a:lnTo>
+                  <a:pt x="266560" y="323922"/>
+                </a:lnTo>
+                <a:lnTo>
+                  <a:pt x="338697" y="282273"/>
+                </a:lnTo>
+                <a:lnTo>
+                  <a:pt x="194422" y="198974"/>
+                </a:lnTo>
+                <a:lnTo>
+                  <a:pt x="266560" y="157325"/>
+                </a:lnTo>
+                <a:lnTo>
+                  <a:pt x="266401" y="157325"/>
+                </a:lnTo>
+                <a:lnTo>
+                  <a:pt x="122117" y="74027"/>
+                </a:lnTo>
+                <a:lnTo>
+                  <a:pt x="49980" y="32378"/>
+                </a:lnTo>
+                <a:lnTo>
+                  <a:pt x="8330" y="8329"/>
                 </a:lnTo>
                 <a:close/>
               </a:path>
-              <a:path w="41660" h="54887">
+              <a:path w="347028" h="457200">
                 <a:moveTo>
-                  <a:pt x="11000" y="38887"/>
+                  <a:pt x="91630" y="323922"/>
                 </a:moveTo>
                 <a:lnTo>
-                  <a:pt x="16000" y="38887"/>
-                </a:lnTo>
-                <a:lnTo>
-                  <a:pt x="17340" y="38887"/>
-                </a:lnTo>
-                <a:lnTo>
-                  <a:pt x="26000" y="33887"/>
-                </a:lnTo>
-                <a:lnTo>
-                  <a:pt x="16000" y="33887"/>
-                </a:lnTo>
-                <a:lnTo>
-                  <a:pt x="16000" y="28887"/>
-                </a:lnTo>
-                <a:lnTo>
-                  <a:pt x="11000" y="26000"/>
+                  <a:pt x="133280" y="323922"/>
+                </a:lnTo>
+                <a:lnTo>
+                  <a:pt x="144442" y="323922"/>
+                </a:lnTo>
+                <a:lnTo>
+                  <a:pt x="216580" y="282273"/>
+                </a:lnTo>
+                <a:lnTo>
+                  <a:pt x="133280" y="282273"/>
+                </a:lnTo>
+                <a:lnTo>
+                  <a:pt x="133280" y="240624"/>
+                </a:lnTo>
+                <a:lnTo>
+                  <a:pt x="91630" y="216575"/>
                 </a:lnTo>
                 <a:close/>
               </a:path>
-              <a:path w="41660" h="54887">
+              <a:path w="347028" h="457200">
                 <a:moveTo>
-                  <a:pt x="6000" y="21774"/>
+                  <a:pt x="49980" y="181373"/>
                 </a:moveTo>
                 <a:lnTo>
-                  <a:pt x="1000" y="18887"/>
-                </a:lnTo>
-                <a:lnTo>
-                  <a:pt x="1000" y="43887"/>
-                </a:lnTo>
-                <a:lnTo>
-                  <a:pt x="1000" y="48887"/>
-                </a:lnTo>
-                <a:lnTo>
-                  <a:pt x="1000" y="53887"/>
-                </a:lnTo>
-                <a:lnTo>
-                  <a:pt x="18113" y="53887"/>
-                </a:lnTo>
-                <a:lnTo>
-                  <a:pt x="21000" y="48887"/>
-                </a:lnTo>
-                <a:lnTo>
-                  <a:pt x="6000" y="48887"/>
-                </a:lnTo>
-                <a:lnTo>
-                  <a:pt x="6000" y="43887"/>
+                  <a:pt x="8330" y="157325"/>
+                </a:lnTo>
+                <a:lnTo>
+                  <a:pt x="8330" y="365571"/>
+                </a:lnTo>
+                <a:lnTo>
+                  <a:pt x="8330" y="407220"/>
+                </a:lnTo>
+                <a:lnTo>
+                  <a:pt x="8330" y="448870"/>
+                </a:lnTo>
+                <a:lnTo>
+                  <a:pt x="150881" y="448870"/>
+                </a:lnTo>
+                <a:lnTo>
+                  <a:pt x="174930" y="407220"/>
+                </a:lnTo>
+                <a:lnTo>
+                  <a:pt x="49980" y="407220"/>
+                </a:lnTo>
+                <a:lnTo>
+                  <a:pt x="49980" y="365571"/>
                 </a:lnTo>
                 <a:close/>
               </a:path>
-              <a:path w="41660" h="54887">
+              <a:path w="347028" h="457200">
                 <a:moveTo>
-                  <a:pt x="23113" y="53887"/>
+                  <a:pt x="192531" y="448870"/>
                 </a:moveTo>
                 <a:lnTo>
-                  <a:pt x="26000" y="48887"/>
-                </a:lnTo>
-                <a:lnTo>
-                  <a:pt x="23000" y="48887"/>
-                </a:lnTo>
-                <a:lnTo>
-                  <a:pt x="20113" y="53887"/>
+                  <a:pt x="216580" y="407220"/>
+                </a:lnTo>
+                <a:lnTo>
+                  <a:pt x="191590" y="407220"/>
+                </a:lnTo>
+                <a:lnTo>
+                  <a:pt x="167541" y="448870"/>
                 </a:lnTo>
                 <a:close/>
               </a:path>
@@ -765,129 +765,129 @@
             <a:cxnLst/>
             <a:rect l="0" t="0" r="r" b="b"/>
             <a:pathLst>
-              <a:path w="41660" h="54887">
+              <a:path w="3123184" h="4114800">
                 <a:moveTo>
-                  <a:pt x="1000" y="3887"/>
+                  <a:pt x="74968" y="291402"/>
                 </a:moveTo>
                 <a:lnTo>
-                  <a:pt x="1000" y="13887"/>
-                </a:lnTo>
-                <a:lnTo>
-                  <a:pt x="6000" y="16774"/>
-                </a:lnTo>
-                <a:lnTo>
-                  <a:pt x="6000" y="13887"/>
-                </a:lnTo>
-                <a:lnTo>
-                  <a:pt x="6000" y="8887"/>
-                </a:lnTo>
-                <a:lnTo>
-                  <a:pt x="23321" y="18887"/>
-                </a:lnTo>
-                <a:lnTo>
-                  <a:pt x="14660" y="23887"/>
-                </a:lnTo>
-                <a:lnTo>
-                  <a:pt x="15000" y="23887"/>
-                </a:lnTo>
-                <a:lnTo>
-                  <a:pt x="32320" y="33887"/>
-                </a:lnTo>
-                <a:lnTo>
-                  <a:pt x="23660" y="38887"/>
-                </a:lnTo>
-                <a:lnTo>
-                  <a:pt x="32000" y="38887"/>
-                </a:lnTo>
-                <a:lnTo>
-                  <a:pt x="40660" y="33887"/>
-                </a:lnTo>
-                <a:lnTo>
-                  <a:pt x="23340" y="23887"/>
-                </a:lnTo>
-                <a:lnTo>
-                  <a:pt x="32000" y="18887"/>
-                </a:lnTo>
-                <a:lnTo>
-                  <a:pt x="31981" y="18887"/>
-                </a:lnTo>
-                <a:lnTo>
-                  <a:pt x="14660" y="8887"/>
-                </a:lnTo>
-                <a:lnTo>
-                  <a:pt x="6000" y="3887"/>
-                </a:lnTo>
-                <a:lnTo>
-                  <a:pt x="1000" y="1000"/>
+                  <a:pt x="74968" y="1041088"/>
+                </a:lnTo>
+                <a:lnTo>
+                  <a:pt x="449810" y="1257522"/>
+                </a:lnTo>
+                <a:lnTo>
+                  <a:pt x="449810" y="1041088"/>
+                </a:lnTo>
+                <a:lnTo>
+                  <a:pt x="449810" y="666245"/>
+                </a:lnTo>
+                <a:lnTo>
+                  <a:pt x="1748338" y="1415931"/>
+                </a:lnTo>
+                <a:lnTo>
+                  <a:pt x="1099036" y="1790774"/>
+                </a:lnTo>
+                <a:lnTo>
+                  <a:pt x="1124526" y="1790774"/>
+                </a:lnTo>
+                <a:lnTo>
+                  <a:pt x="2423054" y="2540459"/>
+                </a:lnTo>
+                <a:lnTo>
+                  <a:pt x="1773752" y="2915302"/>
+                </a:lnTo>
+                <a:lnTo>
+                  <a:pt x="2398989" y="2915302"/>
+                </a:lnTo>
+                <a:lnTo>
+                  <a:pt x="3048215" y="2540459"/>
+                </a:lnTo>
+                <a:lnTo>
+                  <a:pt x="1749762" y="1790774"/>
+                </a:lnTo>
+                <a:lnTo>
+                  <a:pt x="2398989" y="1415931"/>
+                </a:lnTo>
+                <a:lnTo>
+                  <a:pt x="2397564" y="1415931"/>
+                </a:lnTo>
+                <a:lnTo>
+                  <a:pt x="1099036" y="666245"/>
+                </a:lnTo>
+                <a:lnTo>
+                  <a:pt x="449810" y="291402"/>
+                </a:lnTo>
+                <a:lnTo>
+                  <a:pt x="74968" y="74968"/>
                 </a:lnTo>
                 <a:close/>
               </a:path>
-              <a:path w="41660" h="54887">
+              <a:path w="3123184" h="4114800">
                 <a:moveTo>
-                  <a:pt x="11000" y="38887"/>
+                  <a:pt x="824652" y="2915302"/>
                 </a:moveTo>
                 <a:lnTo>
-                  <a:pt x="16000" y="38887"/>
-                </a:lnTo>
-                <a:lnTo>
-                  <a:pt x="17340" y="38887"/>
-                </a:lnTo>
-                <a:lnTo>
-                  <a:pt x="26000" y="33887"/>
-                </a:lnTo>
-                <a:lnTo>
-                  <a:pt x="16000" y="33887"/>
-                </a:lnTo>
-                <a:lnTo>
-                  <a:pt x="16000" y="28887"/>
-                </a:lnTo>
-                <a:lnTo>
-                  <a:pt x="11000" y="26000"/>
+                  <a:pt x="1199494" y="2915302"/>
+                </a:lnTo>
+                <a:lnTo>
+                  <a:pt x="1299952" y="2915302"/>
+                </a:lnTo>
+                <a:lnTo>
+                  <a:pt x="1949178" y="2540459"/>
+                </a:lnTo>
+                <a:lnTo>
+                  <a:pt x="1199494" y="2540459"/>
+                </a:lnTo>
+                <a:lnTo>
+                  <a:pt x="1199494" y="2165617"/>
+                </a:lnTo>
+                <a:lnTo>
+                  <a:pt x="824652" y="1949182"/>
                 </a:lnTo>
                 <a:close/>
               </a:path>
-              <a:path w="41660" h="54887">
+              <a:path w="3123184" h="4114800">
                 <a:moveTo>
-                  <a:pt x="6000" y="21774"/>
+                  <a:pt x="449810" y="1632365"/>
                 </a:moveTo>
                 <a:lnTo>
-                  <a:pt x="1000" y="18887"/>
-                </a:lnTo>
-                <a:lnTo>
-                  <a:pt x="1000" y="43887"/>
-                </a:lnTo>
-                <a:lnTo>
-                  <a:pt x="1000" y="48887"/>
-                </a:lnTo>
-                <a:lnTo>
-                  <a:pt x="1000" y="53887"/>
-                </a:lnTo>
-                <a:lnTo>
-                  <a:pt x="18113" y="53887"/>
-                </a:lnTo>
-                <a:lnTo>
-                  <a:pt x="21000" y="48887"/>
-                </a:lnTo>
-                <a:lnTo>
-                  <a:pt x="6000" y="48887"/>
-                </a:lnTo>
-                <a:lnTo>
-                  <a:pt x="6000" y="43887"/>
+                  <a:pt x="74968" y="1415931"/>
+                </a:lnTo>
+                <a:lnTo>
+                  <a:pt x="74968" y="3290145"/>
+                </a:lnTo>
+                <a:lnTo>
+                  <a:pt x="74968" y="3664988"/>
+                </a:lnTo>
+                <a:lnTo>
+                  <a:pt x="74968" y="4039831"/>
+                </a:lnTo>
+                <a:lnTo>
+                  <a:pt x="1357902" y="4039831"/>
+                </a:lnTo>
+                <a:lnTo>
+                  <a:pt x="1574336" y="3664988"/>
+                </a:lnTo>
+                <a:lnTo>
+                  <a:pt x="449810" y="3664988"/>
+                </a:lnTo>
+                <a:lnTo>
+                  <a:pt x="449810" y="3290145"/>
                 </a:lnTo>
                 <a:close/>
               </a:path>
-              <a:path w="41660" h="54887">
+              <a:path w="3123184" h="4114800">
                 <a:moveTo>
-                  <a:pt x="23113" y="53887"/>
+                  <a:pt x="1732744" y="4039831"/>
                 </a:moveTo>
                 <a:lnTo>
-                  <a:pt x="26000" y="48887"/>
-                </a:lnTo>
-                <a:lnTo>
-                  <a:pt x="23000" y="48887"/>
-                </a:lnTo>
-                <a:lnTo>
-                  <a:pt x="20113" y="53887"/>
+                  <a:pt x="1949178" y="3664988"/>
+                </a:lnTo>
+                <a:lnTo>
+                  <a:pt x="1724273" y="3664988"/>
+                </a:lnTo>
+                <a:lnTo>
+                  <a:pt x="1507839" y="4039831"/>
                 </a:lnTo>
                 <a:close/>
               </a:path>
@@ -1188,129 +1188,129 @@
             <a:cxnLst/>
             <a:rect l="0" t="0" r="r" b="b"/>
             <a:pathLst>
-              <a:path w="41660" h="54887">
+              <a:path w="3123184" h="4114800">
                 <a:moveTo>
-                  <a:pt x="1000" y="3887"/>
+                  <a:pt x="74968" y="291402"/>
                 </a:moveTo>
                 <a:lnTo>
-                  <a:pt x="1000" y="13887"/>
-                </a:lnTo>
-                <a:lnTo>
-                  <a:pt x="6000" y="16774"/>
-                </a:lnTo>
-                <a:lnTo>
-                  <a:pt x="6000" y="13887"/>
-                </a:lnTo>
-                <a:lnTo>
-                  <a:pt x="6000" y="8887"/>
-                </a:lnTo>
-                <a:lnTo>
-                  <a:pt x="23321" y="18887"/>
-                </a:lnTo>
-                <a:lnTo>
-                  <a:pt x="14660" y="23887"/>
-                </a:lnTo>
-                <a:lnTo>
-                  <a:pt x="15000" y="23887"/>
-                </a:lnTo>
-                <a:lnTo>
-                  <a:pt x="32320" y="33887"/>
-                </a:lnTo>
-                <a:lnTo>
-                  <a:pt x="23660" y="38887"/>
-                </a:lnTo>
-                <a:lnTo>
-                  <a:pt x="32000" y="38887"/>
-                </a:lnTo>
-                <a:lnTo>
-                  <a:pt x="40660" y="33887"/>
-                </a:lnTo>
-                <a:lnTo>
-                  <a:pt x="23340" y="23887"/>
-                </a:lnTo>
-                <a:lnTo>
-                  <a:pt x="32000" y="18887"/>
-                </a:lnTo>
-                <a:lnTo>
-                  <a:pt x="31981" y="18887"/>
-                </a:lnTo>
-                <a:lnTo>
-                  <a:pt x="14660" y="8887"/>
-                </a:lnTo>
-                <a:lnTo>
-                  <a:pt x="6000" y="3887"/>
-                </a:lnTo>
-                <a:lnTo>
-                  <a:pt x="1000" y="1000"/>
+                  <a:pt x="74968" y="1041088"/>
+                </a:lnTo>
+                <a:lnTo>
+                  <a:pt x="449810" y="1257522"/>
+                </a:lnTo>
+                <a:lnTo>
+                  <a:pt x="449810" y="1041088"/>
+                </a:lnTo>
+                <a:lnTo>
+                  <a:pt x="449810" y="666245"/>
+                </a:lnTo>
+                <a:lnTo>
+                  <a:pt x="1748338" y="1415931"/>
+                </a:lnTo>
+                <a:lnTo>
+                  <a:pt x="1099036" y="1790774"/>
+                </a:lnTo>
+                <a:lnTo>
+                  <a:pt x="1124526" y="1790774"/>
+                </a:lnTo>
+                <a:lnTo>
+                  <a:pt x="2423054" y="2540459"/>
+                </a:lnTo>
+                <a:lnTo>
+                  <a:pt x="1773752" y="2915302"/>
+                </a:lnTo>
+                <a:lnTo>
+                  <a:pt x="2398989" y="2915302"/>
+                </a:lnTo>
+                <a:lnTo>
+                  <a:pt x="3048215" y="2540459"/>
+                </a:lnTo>
+                <a:lnTo>
+                  <a:pt x="1749762" y="1790774"/>
+                </a:lnTo>
+                <a:lnTo>
+                  <a:pt x="2398989" y="1415931"/>
+                </a:lnTo>
+                <a:lnTo>
+                  <a:pt x="2397564" y="1415931"/>
+                </a:lnTo>
+                <a:lnTo>
+                  <a:pt x="1099036" y="666245"/>
+                </a:lnTo>
+                <a:lnTo>
+                  <a:pt x="449810" y="291402"/>
+                </a:lnTo>
+                <a:lnTo>
+                  <a:pt x="74968" y="74968"/>
                 </a:lnTo>
                 <a:close/>
               </a:path>
-              <a:path w="41660" h="54887">
+              <a:path w="3123184" h="4114800">
                 <a:moveTo>
-                  <a:pt x="11000" y="38887"/>
+                  <a:pt x="824652" y="2915302"/>
                 </a:moveTo>
                 <a:lnTo>
-                  <a:pt x="16000" y="38887"/>
-                </a:lnTo>
-                <a:lnTo>
-                  <a:pt x="17340" y="38887"/>
-                </a:lnTo>
-                <a:lnTo>
-                  <a:pt x="26000" y="33887"/>
-                </a:lnTo>
-                <a:lnTo>
-                  <a:pt x="16000" y="33887"/>
-                </a:lnTo>
-                <a:lnTo>
-                  <a:pt x="16000" y="28887"/>
-                </a:lnTo>
-                <a:lnTo>
-                  <a:pt x="11000" y="26000"/>
+                  <a:pt x="1199494" y="2915302"/>
+                </a:lnTo>
+                <a:lnTo>
+                  <a:pt x="1299952" y="2915302"/>
+                </a:lnTo>
+                <a:lnTo>
+                  <a:pt x="1949178" y="2540459"/>
+                </a:lnTo>
+                <a:lnTo>
+                  <a:pt x="1199494" y="2540459"/>
+                </a:lnTo>
+                <a:lnTo>
+                  <a:pt x="1199494" y="2165617"/>
+                </a:lnTo>
+                <a:lnTo>
+                  <a:pt x="824652" y="1949182"/>
                 </a:lnTo>
                 <a:close/>
               </a:path>
-              <a:path w="41660" h="54887">
+              <a:path w="3123184" h="4114800">
                 <a:moveTo>
-                  <a:pt x="6000" y="21774"/>
+                  <a:pt x="449810" y="1632365"/>
                 </a:moveTo>
                 <a:lnTo>
-                  <a:pt x="1000" y="18887"/>
-                </a:lnTo>
-                <a:lnTo>
-                  <a:pt x="1000" y="43887"/>
-                </a:lnTo>
-                <a:lnTo>
-                  <a:pt x="1000" y="48887"/>
-                </a:lnTo>
-                <a:lnTo>
-                  <a:pt x="1000" y="53887"/>
-                </a:lnTo>
-                <a:lnTo>
-                  <a:pt x="18113" y="53887"/>
-                </a:lnTo>
-                <a:lnTo>
-                  <a:pt x="21000" y="48887"/>
-                </a:lnTo>
-                <a:lnTo>
-                  <a:pt x="6000" y="48887"/>
-                </a:lnTo>
-                <a:lnTo>
-                  <a:pt x="6000" y="43887"/>
+                  <a:pt x="74968" y="1415931"/>
+                </a:lnTo>
+                <a:lnTo>
+                  <a:pt x="74968" y="3290145"/>
+                </a:lnTo>
+                <a:lnTo>
+                  <a:pt x="74968" y="3664988"/>
+                </a:lnTo>
+                <a:lnTo>
+                  <a:pt x="74968" y="4039831"/>
+                </a:lnTo>
+                <a:lnTo>
+                  <a:pt x="1357902" y="4039831"/>
+                </a:lnTo>
+                <a:lnTo>
+                  <a:pt x="1574336" y="3664988"/>
+                </a:lnTo>
+                <a:lnTo>
+                  <a:pt x="449810" y="3664988"/>
+                </a:lnTo>
+                <a:lnTo>
+                  <a:pt x="449810" y="3290145"/>
                 </a:lnTo>
                 <a:close/>
               </a:path>
-              <a:path w="41660" h="54887">
+              <a:path w="3123184" h="4114800">
                 <a:moveTo>
-                  <a:pt x="23113" y="53887"/>
+                  <a:pt x="1732744" y="4039831"/>
                 </a:moveTo>
                 <a:lnTo>
-                  <a:pt x="26000" y="48887"/>
-                </a:lnTo>
-                <a:lnTo>
-                  <a:pt x="23000" y="48887"/>
-                </a:lnTo>
-                <a:lnTo>
-                  <a:pt x="20113" y="53887"/>
+                  <a:pt x="1949178" y="3664988"/>
+                </a:lnTo>
+                <a:lnTo>
+                  <a:pt x="1724273" y="3664988"/>
+                </a:lnTo>
+                <a:lnTo>
+                  <a:pt x="1507839" y="4039831"/>
                 </a:lnTo>
                 <a:close/>
               </a:path>
@@ -1611,129 +1611,129 @@
             <a:cxnLst/>
             <a:rect l="0" t="0" r="r" b="b"/>
             <a:pathLst>
-              <a:path w="41660" h="54887">
+              <a:path w="3123184" h="4114800">
                 <a:moveTo>
-                  <a:pt x="1000" y="3887"/>
+                  <a:pt x="74968" y="291402"/>
                 </a:moveTo>
                 <a:lnTo>
-                  <a:pt x="1000" y="13887"/>
-                </a:lnTo>
-                <a:lnTo>
-                  <a:pt x="6000" y="16774"/>
-                </a:lnTo>
-                <a:lnTo>
-                  <a:pt x="6000" y="13887"/>
-                </a:lnTo>
-                <a:lnTo>
-                  <a:pt x="6000" y="8887"/>
-                </a:lnTo>
-                <a:lnTo>
-                  <a:pt x="23321" y="18887"/>
-                </a:lnTo>
-                <a:lnTo>
-                  <a:pt x="14660" y="23887"/>
-                </a:lnTo>
-                <a:lnTo>
-                  <a:pt x="15000" y="23887"/>
-                </a:lnTo>
-                <a:lnTo>
-                  <a:pt x="32320" y="33887"/>
-                </a:lnTo>
-                <a:lnTo>
-                  <a:pt x="23660" y="38887"/>
-                </a:lnTo>
-                <a:lnTo>
-                  <a:pt x="32000" y="38887"/>
-                </a:lnTo>
-                <a:lnTo>
-                  <a:pt x="40660" y="33887"/>
-                </a:lnTo>
-                <a:lnTo>
-                  <a:pt x="23340" y="23887"/>
-                </a:lnTo>
-                <a:lnTo>
-                  <a:pt x="32000" y="18887"/>
-                </a:lnTo>
-                <a:lnTo>
-                  <a:pt x="31981" y="18887"/>
-                </a:lnTo>
-                <a:lnTo>
-                  <a:pt x="14660" y="8887"/>
-                </a:lnTo>
-                <a:lnTo>
-                  <a:pt x="6000" y="3887"/>
-                </a:lnTo>
-                <a:lnTo>
-                  <a:pt x="1000" y="1000"/>
+                  <a:pt x="74968" y="1041088"/>
+                </a:lnTo>
+                <a:lnTo>
+                  <a:pt x="449810" y="1257522"/>
+                </a:lnTo>
+                <a:lnTo>
+                  <a:pt x="449810" y="1041088"/>
+                </a:lnTo>
+                <a:lnTo>
+                  <a:pt x="449810" y="666245"/>
+                </a:lnTo>
+                <a:lnTo>
+                  <a:pt x="1748338" y="1415931"/>
+                </a:lnTo>
+                <a:lnTo>
+                  <a:pt x="1099036" y="1790774"/>
+                </a:lnTo>
+                <a:lnTo>
+                  <a:pt x="1124526" y="1790774"/>
+                </a:lnTo>
+                <a:lnTo>
+                  <a:pt x="2423054" y="2540459"/>
+                </a:lnTo>
+                <a:lnTo>
+                  <a:pt x="1773752" y="2915302"/>
+                </a:lnTo>
+                <a:lnTo>
+                  <a:pt x="2398989" y="2915302"/>
+                </a:lnTo>
+                <a:lnTo>
+                  <a:pt x="3048215" y="2540459"/>
+                </a:lnTo>
+                <a:lnTo>
+                  <a:pt x="1749762" y="1790774"/>
+                </a:lnTo>
+                <a:lnTo>
+                  <a:pt x="2398989" y="1415931"/>
+                </a:lnTo>
+                <a:lnTo>
+                  <a:pt x="2397564" y="1415931"/>
+                </a:lnTo>
+                <a:lnTo>
+                  <a:pt x="1099036" y="666245"/>
+                </a:lnTo>
+                <a:lnTo>
+                  <a:pt x="449810" y="291402"/>
+                </a:lnTo>
+                <a:lnTo>
+                  <a:pt x="74968" y="74968"/>
                 </a:lnTo>
                 <a:close/>
               </a:path>
-              <a:path w="41660" h="54887">
+              <a:path w="3123184" h="4114800">
                 <a:moveTo>
-                  <a:pt x="11000" y="38887"/>
+                  <a:pt x="824652" y="2915302"/>
                 </a:moveTo>
                 <a:lnTo>
-                  <a:pt x="16000" y="38887"/>
-                </a:lnTo>
-                <a:lnTo>
-                  <a:pt x="17340" y="38887"/>
-                </a:lnTo>
-                <a:lnTo>
-                  <a:pt x="26000" y="33887"/>
-                </a:lnTo>
-                <a:lnTo>
-                  <a:pt x="16000" y="33887"/>
-                </a:lnTo>
-                <a:lnTo>
-                  <a:pt x="16000" y="28887"/>
-                </a:lnTo>
-                <a:lnTo>
-                  <a:pt x="11000" y="26000"/>
+                  <a:pt x="1199494" y="2915302"/>
+                </a:lnTo>
+                <a:lnTo>
+                  <a:pt x="1299952" y="2915302"/>
+                </a:lnTo>
+                <a:lnTo>
+                  <a:pt x="1949178" y="2540459"/>
+                </a:lnTo>
+                <a:lnTo>
+                  <a:pt x="1199494" y="2540459"/>
+                </a:lnTo>
+                <a:lnTo>
+                  <a:pt x="1199494" y="2165617"/>
+                </a:lnTo>
+                <a:lnTo>
+                  <a:pt x="824652" y="1949182"/>
                 </a:lnTo>
                 <a:close/>
               </a:path>
-              <a:path w="41660" h="54887">
+              <a:path w="3123184" h="4114800">
                 <a:moveTo>
-                  <a:pt x="6000" y="21774"/>
+                  <a:pt x="449810" y="1632365"/>
                 </a:moveTo>
                 <a:lnTo>
-                  <a:pt x="1000" y="18887"/>
-                </a:lnTo>
-                <a:lnTo>
-                  <a:pt x="1000" y="43887"/>
-                </a:lnTo>
-                <a:lnTo>
-                  <a:pt x="1000" y="48887"/>
-                </a:lnTo>
-                <a:lnTo>
-                  <a:pt x="1000" y="53887"/>
-                </a:lnTo>
-                <a:lnTo>
-                  <a:pt x="18113" y="53887"/>
-                </a:lnTo>
-                <a:lnTo>
-                  <a:pt x="21000" y="48887"/>
-                </a:lnTo>
-                <a:lnTo>
-                  <a:pt x="6000" y="48887"/>
-                </a:lnTo>
-                <a:lnTo>
-                  <a:pt x="6000" y="43887"/>
+                  <a:pt x="74968" y="1415931"/>
+                </a:lnTo>
+                <a:lnTo>
+                  <a:pt x="74968" y="3290145"/>
+                </a:lnTo>
+                <a:lnTo>
+                  <a:pt x="74968" y="3664988"/>
+                </a:lnTo>
+                <a:lnTo>
+                  <a:pt x="74968" y="4039831"/>
+                </a:lnTo>
+                <a:lnTo>
+                  <a:pt x="1357902" y="4039831"/>
+                </a:lnTo>
+                <a:lnTo>
+                  <a:pt x="1574336" y="3664988"/>
+                </a:lnTo>
+                <a:lnTo>
+                  <a:pt x="449810" y="3664988"/>
+                </a:lnTo>
+                <a:lnTo>
+                  <a:pt x="449810" y="3290145"/>
                 </a:lnTo>
                 <a:close/>
               </a:path>
-              <a:path w="41660" h="54887">
+              <a:path w="3123184" h="4114800">
                 <a:moveTo>
-                  <a:pt x="23113" y="53887"/>
+                  <a:pt x="1732744" y="4039831"/>
                 </a:moveTo>
                 <a:lnTo>
-                  <a:pt x="26000" y="48887"/>
-                </a:lnTo>
-                <a:lnTo>
-                  <a:pt x="23000" y="48887"/>
-                </a:lnTo>
-                <a:lnTo>
-                  <a:pt x="20113" y="53887"/>
+                  <a:pt x="1949178" y="3664988"/>
+                </a:lnTo>
+                <a:lnTo>
+                  <a:pt x="1724273" y="3664988"/>
+                </a:lnTo>
+                <a:lnTo>
+                  <a:pt x="1507839" y="4039831"/>
                 </a:lnTo>
                 <a:close/>
               </a:path>
@@ -1954,129 +1954,129 @@
             <a:cxnLst/>
             <a:rect l="0" t="0" r="r" b="b"/>
             <a:pathLst>
-              <a:path w="41660" h="54887">
+              <a:path w="3123184" h="4114800">
                 <a:moveTo>
-                  <a:pt x="1000" y="3887"/>
+                  <a:pt x="74968" y="291402"/>
                 </a:moveTo>
                 <a:lnTo>
-                  <a:pt x="1000" y="13887"/>
-                </a:lnTo>
-                <a:lnTo>
-                  <a:pt x="6000" y="16774"/>
-                </a:lnTo>
-                <a:lnTo>
-                  <a:pt x="6000" y="13887"/>
-                </a:lnTo>
-                <a:lnTo>
-                  <a:pt x="6000" y="8887"/>
-                </a:lnTo>
-                <a:lnTo>
-                  <a:pt x="23321" y="18887"/>
-                </a:lnTo>
-                <a:lnTo>
-                  <a:pt x="14660" y="23887"/>
-                </a:lnTo>
-                <a:lnTo>
-                  <a:pt x="15000" y="23887"/>
-                </a:lnTo>
-                <a:lnTo>
-                  <a:pt x="32320" y="33887"/>
-                </a:lnTo>
-                <a:lnTo>
-                  <a:pt x="23660" y="38887"/>
-                </a:lnTo>
-                <a:lnTo>
-                  <a:pt x="32000" y="38887"/>
-                </a:lnTo>
-                <a:lnTo>
-                  <a:pt x="40660" y="33887"/>
-                </a:lnTo>
-                <a:lnTo>
-                  <a:pt x="23340" y="23887"/>
-                </a:lnTo>
-                <a:lnTo>
-                  <a:pt x="32000" y="18887"/>
-                </a:lnTo>
-                <a:lnTo>
-                  <a:pt x="31981" y="18887"/>
-                </a:lnTo>
-                <a:lnTo>
-                  <a:pt x="14660" y="8887"/>
-                </a:lnTo>
-                <a:lnTo>
-                  <a:pt x="6000" y="3887"/>
-                </a:lnTo>
-                <a:lnTo>
-                  <a:pt x="1000" y="1000"/>
+                  <a:pt x="74968" y="1041088"/>
+                </a:lnTo>
+                <a:lnTo>
+                  <a:pt x="449810" y="1257522"/>
+                </a:lnTo>
+                <a:lnTo>
+                  <a:pt x="449810" y="1041088"/>
+                </a:lnTo>
+                <a:lnTo>
+                  <a:pt x="449810" y="666245"/>
+                </a:lnTo>
+                <a:lnTo>
+                  <a:pt x="1748338" y="1415931"/>
+                </a:lnTo>
+                <a:lnTo>
+                  <a:pt x="1099036" y="1790774"/>
+                </a:lnTo>
+                <a:lnTo>
+                  <a:pt x="1124526" y="1790774"/>
+                </a:lnTo>
+                <a:lnTo>
+                  <a:pt x="2423054" y="2540459"/>
+                </a:lnTo>
+                <a:lnTo>
+                  <a:pt x="1773752" y="2915302"/>
+                </a:lnTo>
+                <a:lnTo>
+                  <a:pt x="2398989" y="2915302"/>
+                </a:lnTo>
+                <a:lnTo>
+                  <a:pt x="3048215" y="2540459"/>
+                </a:lnTo>
+                <a:lnTo>
+                  <a:pt x="1749762" y="1790774"/>
+                </a:lnTo>
+                <a:lnTo>
+                  <a:pt x="2398989" y="1415931"/>
+                </a:lnTo>
+                <a:lnTo>
+                  <a:pt x="2397564" y="1415931"/>
+                </a:lnTo>
+                <a:lnTo>
+                  <a:pt x="1099036" y="666245"/>
+                </a:lnTo>
+                <a:lnTo>
+                  <a:pt x="449810" y="291402"/>
+                </a:lnTo>
+                <a:lnTo>
+                  <a:pt x="74968" y="74968"/>
                 </a:lnTo>
                 <a:close/>
               </a:path>
-              <a:path w="41660" h="54887">
+              <a:path w="3123184" h="4114800">
                 <a:moveTo>
-                  <a:pt x="11000" y="38887"/>
+                  <a:pt x="824652" y="2915302"/>
                 </a:moveTo>
                 <a:lnTo>
-                  <a:pt x="16000" y="38887"/>
-                </a:lnTo>
-                <a:lnTo>
-                  <a:pt x="17340" y="38887"/>
-                </a:lnTo>
-                <a:lnTo>
-                  <a:pt x="26000" y="33887"/>
-                </a:lnTo>
-                <a:lnTo>
-                  <a:pt x="16000" y="33887"/>
-                </a:lnTo>
-                <a:lnTo>
-                  <a:pt x="16000" y="28887"/>
-                </a:lnTo>
-                <a:lnTo>
-                  <a:pt x="11000" y="26000"/>
+                  <a:pt x="1199494" y="2915302"/>
+                </a:lnTo>
+                <a:lnTo>
+                  <a:pt x="1299952" y="2915302"/>
+                </a:lnTo>
+                <a:lnTo>
+                  <a:pt x="1949178" y="2540459"/>
+                </a:lnTo>
+                <a:lnTo>
+                  <a:pt x="1199494" y="2540459"/>
+                </a:lnTo>
+                <a:lnTo>
+                  <a:pt x="1199494" y="2165617"/>
+                </a:lnTo>
+                <a:lnTo>
+                  <a:pt x="824652" y="1949182"/>
                 </a:lnTo>
                 <a:close/>
               </a:path>
-              <a:path w="41660" h="54887">
+              <a:path w="3123184" h="4114800">
                 <a:moveTo>
-                  <a:pt x="6000" y="21774"/>
+                  <a:pt x="449810" y="1632365"/>
                 </a:moveTo>
                 <a:lnTo>
-                  <a:pt x="1000" y="18887"/>
-                </a:lnTo>
-                <a:lnTo>
-                  <a:pt x="1000" y="43887"/>
-                </a:lnTo>
-                <a:lnTo>
-                  <a:pt x="1000" y="48887"/>
-                </a:lnTo>
-                <a:lnTo>
-                  <a:pt x="1000" y="53887"/>
-                </a:lnTo>
-                <a:lnTo>
-                  <a:pt x="18113" y="53887"/>
-                </a:lnTo>
-                <a:lnTo>
-                  <a:pt x="21000" y="48887"/>
-                </a:lnTo>
-                <a:lnTo>
-                  <a:pt x="6000" y="48887"/>
-                </a:lnTo>
-                <a:lnTo>
-                  <a:pt x="6000" y="43887"/>
+                  <a:pt x="74968" y="1415931"/>
+                </a:lnTo>
+                <a:lnTo>
+                  <a:pt x="74968" y="3290145"/>
+                </a:lnTo>
+                <a:lnTo>
+                  <a:pt x="74968" y="3664988"/>
+                </a:lnTo>
+                <a:lnTo>
+                  <a:pt x="74968" y="4039831"/>
+                </a:lnTo>
+                <a:lnTo>
+                  <a:pt x="1357902" y="4039831"/>
+                </a:lnTo>
+                <a:lnTo>
+                  <a:pt x="1574336" y="3664988"/>
+                </a:lnTo>
+                <a:lnTo>
+                  <a:pt x="449810" y="3664988"/>
+                </a:lnTo>
+                <a:lnTo>
+                  <a:pt x="449810" y="3290145"/>
                 </a:lnTo>
                 <a:close/>
               </a:path>
-              <a:path w="41660" h="54887">
+              <a:path w="3123184" h="4114800">
                 <a:moveTo>
-                  <a:pt x="23113" y="53887"/>
+                  <a:pt x="1732744" y="4039831"/>
                 </a:moveTo>
                 <a:lnTo>
-                  <a:pt x="26000" y="48887"/>
-                </a:lnTo>
-                <a:lnTo>
-                  <a:pt x="23000" y="48887"/>
-                </a:lnTo>
-                <a:lnTo>
-                  <a:pt x="20113" y="53887"/>
+                  <a:pt x="1949178" y="3664988"/>
+                </a:lnTo>
+                <a:lnTo>
+                  <a:pt x="1724273" y="3664988"/>
+                </a:lnTo>
+                <a:lnTo>
+                  <a:pt x="1507839" y="4039831"/>
                 </a:lnTo>
                 <a:close/>
               </a:path>
@@ -2447,129 +2447,129 @@
             <a:cxnLst/>
             <a:rect l="0" t="0" r="r" b="b"/>
             <a:pathLst>
-              <a:path w="41660" h="54887">
+              <a:path w="192786" h="254000">
                 <a:moveTo>
-                  <a:pt x="1000" y="3887"/>
+                  <a:pt x="4627" y="17987"/>
                 </a:moveTo>
                 <a:lnTo>
-                  <a:pt x="1000" y="13887"/>
-                </a:lnTo>
-                <a:lnTo>
-                  <a:pt x="6000" y="16774"/>
-                </a:lnTo>
-                <a:lnTo>
-                  <a:pt x="6000" y="13887"/>
-                </a:lnTo>
-                <a:lnTo>
-                  <a:pt x="6000" y="8887"/>
-                </a:lnTo>
-                <a:lnTo>
-                  <a:pt x="23321" y="18887"/>
-                </a:lnTo>
-                <a:lnTo>
-                  <a:pt x="14660" y="23887"/>
-                </a:lnTo>
-                <a:lnTo>
-                  <a:pt x="15000" y="23887"/>
-                </a:lnTo>
-                <a:lnTo>
-                  <a:pt x="32320" y="33887"/>
-                </a:lnTo>
-                <a:lnTo>
-                  <a:pt x="23660" y="38887"/>
-                </a:lnTo>
-                <a:lnTo>
-                  <a:pt x="32000" y="38887"/>
-                </a:lnTo>
-                <a:lnTo>
-                  <a:pt x="40660" y="33887"/>
-                </a:lnTo>
-                <a:lnTo>
-                  <a:pt x="23340" y="23887"/>
-                </a:lnTo>
-                <a:lnTo>
-                  <a:pt x="32000" y="18887"/>
-                </a:lnTo>
-                <a:lnTo>
-                  <a:pt x="31981" y="18887"/>
-                </a:lnTo>
-                <a:lnTo>
-                  <a:pt x="14660" y="8887"/>
-                </a:lnTo>
-                <a:lnTo>
-                  <a:pt x="6000" y="3887"/>
-                </a:lnTo>
-                <a:lnTo>
-                  <a:pt x="1000" y="1000"/>
+                  <a:pt x="4627" y="64264"/>
+                </a:lnTo>
+                <a:lnTo>
+                  <a:pt x="27765" y="77624"/>
+                </a:lnTo>
+                <a:lnTo>
+                  <a:pt x="27765" y="64264"/>
+                </a:lnTo>
+                <a:lnTo>
+                  <a:pt x="27765" y="41126"/>
+                </a:lnTo>
+                <a:lnTo>
+                  <a:pt x="107920" y="87403"/>
+                </a:lnTo>
+                <a:lnTo>
+                  <a:pt x="67840" y="110541"/>
+                </a:lnTo>
+                <a:lnTo>
+                  <a:pt x="69414" y="110541"/>
+                </a:lnTo>
+                <a:lnTo>
+                  <a:pt x="149568" y="156818"/>
+                </a:lnTo>
+                <a:lnTo>
+                  <a:pt x="109489" y="179956"/>
+                </a:lnTo>
+                <a:lnTo>
+                  <a:pt x="148083" y="179956"/>
+                </a:lnTo>
+                <a:lnTo>
+                  <a:pt x="188158" y="156818"/>
+                </a:lnTo>
+                <a:lnTo>
+                  <a:pt x="108008" y="110541"/>
+                </a:lnTo>
+                <a:lnTo>
+                  <a:pt x="148083" y="87403"/>
+                </a:lnTo>
+                <a:lnTo>
+                  <a:pt x="147995" y="87403"/>
+                </a:lnTo>
+                <a:lnTo>
+                  <a:pt x="67840" y="41126"/>
+                </a:lnTo>
+                <a:lnTo>
+                  <a:pt x="27765" y="17987"/>
+                </a:lnTo>
+                <a:lnTo>
+                  <a:pt x="4627" y="4627"/>
                 </a:lnTo>
                 <a:close/>
               </a:path>
-              <a:path w="41660" h="54887">
+              <a:path w="192786" h="254000">
                 <a:moveTo>
-                  <a:pt x="11000" y="38887"/>
+                  <a:pt x="50903" y="179956"/>
                 </a:moveTo>
                 <a:lnTo>
-                  <a:pt x="16000" y="38887"/>
-                </a:lnTo>
-                <a:lnTo>
-                  <a:pt x="17340" y="38887"/>
-                </a:lnTo>
-                <a:lnTo>
-                  <a:pt x="26000" y="33887"/>
-                </a:lnTo>
-                <a:lnTo>
-                  <a:pt x="16000" y="33887"/>
-                </a:lnTo>
-                <a:lnTo>
-                  <a:pt x="16000" y="28887"/>
-                </a:lnTo>
-                <a:lnTo>
-                  <a:pt x="11000" y="26000"/>
+                  <a:pt x="74041" y="179956"/>
+                </a:lnTo>
+                <a:lnTo>
+                  <a:pt x="80242" y="179956"/>
+                </a:lnTo>
+                <a:lnTo>
+                  <a:pt x="120317" y="156818"/>
+                </a:lnTo>
+                <a:lnTo>
+                  <a:pt x="74041" y="156818"/>
+                </a:lnTo>
+                <a:lnTo>
+                  <a:pt x="74041" y="133680"/>
+                </a:lnTo>
+                <a:lnTo>
+                  <a:pt x="50903" y="120319"/>
                 </a:lnTo>
                 <a:close/>
               </a:path>
-              <a:path w="41660" h="54887">
+              <a:path w="192786" h="254000">
                 <a:moveTo>
-                  <a:pt x="6000" y="21774"/>
+                  <a:pt x="27765" y="100763"/>
                 </a:moveTo>
                 <a:lnTo>
-                  <a:pt x="1000" y="18887"/>
-                </a:lnTo>
-                <a:lnTo>
-                  <a:pt x="1000" y="43887"/>
-                </a:lnTo>
-                <a:lnTo>
-                  <a:pt x="1000" y="48887"/>
-                </a:lnTo>
-                <a:lnTo>
-                  <a:pt x="1000" y="53887"/>
-                </a:lnTo>
-                <a:lnTo>
-                  <a:pt x="18113" y="53887"/>
-                </a:lnTo>
-                <a:lnTo>
-                  <a:pt x="21000" y="48887"/>
-                </a:lnTo>
-                <a:lnTo>
-                  <a:pt x="6000" y="48887"/>
-                </a:lnTo>
-                <a:lnTo>
-                  <a:pt x="6000" y="43887"/>
+                  <a:pt x="4627" y="87403"/>
+                </a:lnTo>
+                <a:lnTo>
+                  <a:pt x="4627" y="203095"/>
+                </a:lnTo>
+                <a:lnTo>
+                  <a:pt x="4627" y="226233"/>
+                </a:lnTo>
+                <a:lnTo>
+                  <a:pt x="4627" y="249372"/>
+                </a:lnTo>
+                <a:lnTo>
+                  <a:pt x="83819" y="249372"/>
+                </a:lnTo>
+                <a:lnTo>
+                  <a:pt x="97179" y="226233"/>
+                </a:lnTo>
+                <a:lnTo>
+                  <a:pt x="27765" y="226233"/>
+                </a:lnTo>
+                <a:lnTo>
+                  <a:pt x="27765" y="203095"/>
                 </a:lnTo>
                 <a:close/>
               </a:path>
-              <a:path w="41660" h="54887">
+              <a:path w="192786" h="254000">
                 <a:moveTo>
-                  <a:pt x="23113" y="53887"/>
+                  <a:pt x="106957" y="249372"/>
                 </a:moveTo>
                 <a:lnTo>
-                  <a:pt x="26000" y="48887"/>
-                </a:lnTo>
-                <a:lnTo>
-                  <a:pt x="23000" y="48887"/>
-                </a:lnTo>
-                <a:lnTo>
-                  <a:pt x="20113" y="53887"/>
+                  <a:pt x="120317" y="226233"/>
+                </a:lnTo>
+                <a:lnTo>
+                  <a:pt x="106434" y="226233"/>
+                </a:lnTo>
+                <a:lnTo>
+                  <a:pt x="93075" y="249372"/>
                 </a:lnTo>
                 <a:close/>
               </a:path>
@@ -2861,129 +2861,129 @@
             <a:cxnLst/>
             <a:rect l="0" t="0" r="r" b="b"/>
             <a:pathLst>
-              <a:path w="41660" h="54887">
+              <a:path w="192786" h="254000">
                 <a:moveTo>
-                  <a:pt x="1000" y="3887"/>
+                  <a:pt x="4627" y="17987"/>
                 </a:moveTo>
                 <a:lnTo>
-                  <a:pt x="1000" y="13887"/>
-                </a:lnTo>
-                <a:lnTo>
-                  <a:pt x="6000" y="16774"/>
-                </a:lnTo>
-                <a:lnTo>
-                  <a:pt x="6000" y="13887"/>
-                </a:lnTo>
-                <a:lnTo>
-                  <a:pt x="6000" y="8887"/>
-                </a:lnTo>
-                <a:lnTo>
-                  <a:pt x="23321" y="18887"/>
-                </a:lnTo>
-                <a:lnTo>
-                  <a:pt x="14660" y="23887"/>
-                </a:lnTo>
-                <a:lnTo>
-                  <a:pt x="15000" y="23887"/>
-                </a:lnTo>
-                <a:lnTo>
-                  <a:pt x="32320" y="33887"/>
-                </a:lnTo>
-                <a:lnTo>
-                  <a:pt x="23660" y="38887"/>
-                </a:lnTo>
-                <a:lnTo>
-                  <a:pt x="32000" y="38887"/>
-                </a:lnTo>
-                <a:lnTo>
-                  <a:pt x="40660" y="33887"/>
-                </a:lnTo>
-                <a:lnTo>
-                  <a:pt x="23340" y="23887"/>
-                </a:lnTo>
-                <a:lnTo>
-                  <a:pt x="32000" y="18887"/>
-                </a:lnTo>
-                <a:lnTo>
-                  <a:pt x="31981" y="18887"/>
-                </a:lnTo>
-                <a:lnTo>
-                  <a:pt x="14660" y="8887"/>
-                </a:lnTo>
-                <a:lnTo>
-                  <a:pt x="6000" y="3887"/>
-                </a:lnTo>
-                <a:lnTo>
-                  <a:pt x="1000" y="1000"/>
+                  <a:pt x="4627" y="64264"/>
+                </a:lnTo>
+                <a:lnTo>
+                  <a:pt x="27765" y="77624"/>
+                </a:lnTo>
+                <a:lnTo>
+                  <a:pt x="27765" y="64264"/>
+                </a:lnTo>
+                <a:lnTo>
+                  <a:pt x="27765" y="41126"/>
+                </a:lnTo>
+                <a:lnTo>
+                  <a:pt x="107920" y="87403"/>
+                </a:lnTo>
+                <a:lnTo>
+                  <a:pt x="67840" y="110541"/>
+                </a:lnTo>
+                <a:lnTo>
+                  <a:pt x="69414" y="110541"/>
+                </a:lnTo>
+                <a:lnTo>
+                  <a:pt x="149568" y="156818"/>
+                </a:lnTo>
+                <a:lnTo>
+                  <a:pt x="109489" y="179956"/>
+                </a:lnTo>
+                <a:lnTo>
+                  <a:pt x="148083" y="179956"/>
+                </a:lnTo>
+                <a:lnTo>
+                  <a:pt x="188158" y="156818"/>
+                </a:lnTo>
+                <a:lnTo>
+                  <a:pt x="108008" y="110541"/>
+                </a:lnTo>
+                <a:lnTo>
+                  <a:pt x="148083" y="87403"/>
+                </a:lnTo>
+                <a:lnTo>
+                  <a:pt x="147995" y="87403"/>
+                </a:lnTo>
+                <a:lnTo>
+                  <a:pt x="67840" y="41126"/>
+                </a:lnTo>
+                <a:lnTo>
+                  <a:pt x="27765" y="17987"/>
+                </a:lnTo>
+                <a:lnTo>
+                  <a:pt x="4627" y="4627"/>
                 </a:lnTo>
                 <a:close/>
               </a:path>
-              <a:path w="41660" h="54887">
+              <a:path w="192786" h="254000">
                 <a:moveTo>
-                  <a:pt x="11000" y="38887"/>
+                  <a:pt x="50903" y="179956"/>
                 </a:moveTo>
                 <a:lnTo>
-                  <a:pt x="16000" y="38887"/>
-                </a:lnTo>
-                <a:lnTo>
-                  <a:pt x="17340" y="38887"/>
-                </a:lnTo>
-                <a:lnTo>
-                  <a:pt x="26000" y="33887"/>
-                </a:lnTo>
-                <a:lnTo>
-                  <a:pt x="16000" y="33887"/>
-                </a:lnTo>
-                <a:lnTo>
-                  <a:pt x="16000" y="28887"/>
-                </a:lnTo>
-                <a:lnTo>
-                  <a:pt x="11000" y="26000"/>
+                  <a:pt x="74041" y="179956"/>
+                </a:lnTo>
+                <a:lnTo>
+                  <a:pt x="80242" y="179956"/>
+                </a:lnTo>
+                <a:lnTo>
+                  <a:pt x="120317" y="156818"/>
+                </a:lnTo>
+                <a:lnTo>
+                  <a:pt x="74041" y="156818"/>
+                </a:lnTo>
+                <a:lnTo>
+                  <a:pt x="74041" y="133680"/>
+                </a:lnTo>
+                <a:lnTo>
+                  <a:pt x="50903" y="120319"/>
                 </a:lnTo>
                 <a:close/>
               </a:path>
-              <a:path w="41660" h="54887">
+              <a:path w="192786" h="254000">
                 <a:moveTo>
-                  <a:pt x="6000" y="21774"/>
+                  <a:pt x="27765" y="100763"/>
                 </a:moveTo>
                 <a:lnTo>
-                  <a:pt x="1000" y="18887"/>
-                </a:lnTo>
-                <a:lnTo>
-                  <a:pt x="1000" y="43887"/>
-                </a:lnTo>
-                <a:lnTo>
-                  <a:pt x="1000" y="48887"/>
-                </a:lnTo>
-                <a:lnTo>
-                  <a:pt x="1000" y="53887"/>
-                </a:lnTo>
-                <a:lnTo>
-                  <a:pt x="18113" y="53887"/>
-                </a:lnTo>
-                <a:lnTo>
-                  <a:pt x="21000" y="48887"/>
-                </a:lnTo>
-                <a:lnTo>
-                  <a:pt x="6000" y="48887"/>
-                </a:lnTo>
-                <a:lnTo>
-                  <a:pt x="6000" y="43887"/>
+                  <a:pt x="4627" y="87403"/>
+                </a:lnTo>
+                <a:lnTo>
+                  <a:pt x="4627" y="203095"/>
+                </a:lnTo>
+                <a:lnTo>
+                  <a:pt x="4627" y="226233"/>
+                </a:lnTo>
+                <a:lnTo>
+                  <a:pt x="4627" y="249372"/>
+                </a:lnTo>
+                <a:lnTo>
+                  <a:pt x="83819" y="249372"/>
+                </a:lnTo>
+                <a:lnTo>
+                  <a:pt x="97179" y="226233"/>
+                </a:lnTo>
+                <a:lnTo>
+                  <a:pt x="27765" y="226233"/>
+                </a:lnTo>
+                <a:lnTo>
+                  <a:pt x="27765" y="203095"/>
                 </a:lnTo>
                 <a:close/>
               </a:path>
-              <a:path w="41660" h="54887">
+              <a:path w="192786" h="254000">
                 <a:moveTo>
-                  <a:pt x="23113" y="53887"/>
+                  <a:pt x="106957" y="249372"/>
                 </a:moveTo>
                 <a:lnTo>
-                  <a:pt x="26000" y="48887"/>
-                </a:lnTo>
-                <a:lnTo>
-                  <a:pt x="23000" y="48887"/>
-                </a:lnTo>
-                <a:lnTo>
-                  <a:pt x="20113" y="53887"/>
+                  <a:pt x="120317" y="226233"/>
+                </a:lnTo>
+                <a:lnTo>
+                  <a:pt x="106434" y="226233"/>
+                </a:lnTo>
+                <a:lnTo>
+                  <a:pt x="93075" y="249372"/>
                 </a:lnTo>
                 <a:close/>
               </a:path>

--- a/bigtree/samples/bigtree_lab_organisms.pptx
+++ b/bigtree/samples/bigtree_lab_organisms.pptx
@@ -242,64 +242,62 @@
             <a:pathLst>
               <a:path w="347028" h="457200">
                 <a:moveTo>
-                  <a:pt x="8330" y="32378"/>
+                  <a:pt x="8333" y="32378"/>
                 </a:moveTo>
                 <a:lnTo>
-                  <a:pt x="8330" y="115676"/>
-                </a:lnTo>
-                <a:lnTo>
-                  <a:pt x="49980" y="139724"/>
-                </a:lnTo>
-                <a:lnTo>
-                  <a:pt x="49980" y="115676"/>
-                </a:lnTo>
-                <a:lnTo>
-                  <a:pt x="49980" y="74027"/>
-                </a:lnTo>
-                <a:lnTo>
-                  <a:pt x="194264" y="157325"/>
-                </a:lnTo>
-                <a:lnTo>
-                  <a:pt x="122117" y="198974"/>
-                </a:lnTo>
-                <a:lnTo>
-                  <a:pt x="124950" y="198974"/>
-                </a:lnTo>
-                <a:lnTo>
-                  <a:pt x="269234" y="282273"/>
+                  <a:pt x="8333" y="115676"/>
+                </a:lnTo>
+                <a:lnTo>
+                  <a:pt x="49982" y="139724"/>
+                </a:lnTo>
+                <a:lnTo>
+                  <a:pt x="49982" y="115676"/>
+                </a:lnTo>
+                <a:lnTo>
+                  <a:pt x="49982" y="74027"/>
+                </a:lnTo>
+                <a:lnTo>
+                  <a:pt x="194263" y="157325"/>
+                </a:lnTo>
+                <a:lnTo>
+                  <a:pt x="122118" y="198974"/>
+                </a:lnTo>
+                <a:lnTo>
+                  <a:pt x="124951" y="198974"/>
+                </a:lnTo>
+                <a:lnTo>
+                  <a:pt x="269232" y="282273"/>
                 </a:lnTo>
                 <a:lnTo>
                   <a:pt x="197087" y="323922"/>
                 </a:lnTo>
                 <a:lnTo>
-                  <a:pt x="266560" y="323922"/>
-                </a:lnTo>
-                <a:lnTo>
-                  <a:pt x="338697" y="282273"/>
-                </a:lnTo>
-                <a:lnTo>
-                  <a:pt x="194422" y="198974"/>
-                </a:lnTo>
-                <a:lnTo>
-                  <a:pt x="266560" y="157325"/>
-                </a:lnTo>
-                <a:lnTo>
-                  <a:pt x="266401" y="157325"/>
-                </a:lnTo>
-                <a:lnTo>
-                  <a:pt x="122117" y="74027"/>
-                </a:lnTo>
-                <a:lnTo>
-                  <a:pt x="49980" y="32378"/>
-                </a:lnTo>
-                <a:lnTo>
-                  <a:pt x="8330" y="8329"/>
+                  <a:pt x="266558" y="323922"/>
+                </a:lnTo>
+                <a:lnTo>
+                  <a:pt x="338694" y="282273"/>
+                </a:lnTo>
+                <a:lnTo>
+                  <a:pt x="194421" y="198974"/>
+                </a:lnTo>
+                <a:lnTo>
+                  <a:pt x="266558" y="157325"/>
+                </a:lnTo>
+                <a:lnTo>
+                  <a:pt x="266400" y="157325"/>
+                </a:lnTo>
+                <a:lnTo>
+                  <a:pt x="122118" y="74027"/>
+                </a:lnTo>
+                <a:lnTo>
+                  <a:pt x="49982" y="32378"/>
+                </a:lnTo>
+                <a:lnTo>
+                  <a:pt x="8333" y="8329"/>
                 </a:lnTo>
                 <a:close/>
-              </a:path>
-              <a:path w="347028" h="457200">
                 <a:moveTo>
-                  <a:pt x="91630" y="323922"/>
+                  <a:pt x="91631" y="323922"/>
                 </a:moveTo>
                 <a:lnTo>
                   <a:pt x="133280" y="323922"/>
@@ -308,7 +306,7 @@
                   <a:pt x="144442" y="323922"/>
                 </a:lnTo>
                 <a:lnTo>
-                  <a:pt x="216580" y="282273"/>
+                  <a:pt x="216579" y="282273"/>
                 </a:lnTo>
                 <a:lnTo>
                   <a:pt x="133280" y="282273"/>
@@ -317,25 +315,23 @@
                   <a:pt x="133280" y="240624"/>
                 </a:lnTo>
                 <a:lnTo>
-                  <a:pt x="91630" y="216575"/>
+                  <a:pt x="91631" y="216575"/>
                 </a:lnTo>
                 <a:close/>
-              </a:path>
-              <a:path w="347028" h="457200">
                 <a:moveTo>
-                  <a:pt x="49980" y="181373"/>
+                  <a:pt x="49982" y="181373"/>
                 </a:moveTo>
                 <a:lnTo>
-                  <a:pt x="8330" y="157325"/>
-                </a:lnTo>
-                <a:lnTo>
-                  <a:pt x="8330" y="365571"/>
-                </a:lnTo>
-                <a:lnTo>
-                  <a:pt x="8330" y="407220"/>
-                </a:lnTo>
-                <a:lnTo>
-                  <a:pt x="8330" y="448870"/>
+                  <a:pt x="8333" y="157325"/>
+                </a:lnTo>
+                <a:lnTo>
+                  <a:pt x="8333" y="365571"/>
+                </a:lnTo>
+                <a:lnTo>
+                  <a:pt x="8333" y="407220"/>
+                </a:lnTo>
+                <a:lnTo>
+                  <a:pt x="8333" y="448870"/>
                 </a:lnTo>
                 <a:lnTo>
                   <a:pt x="150881" y="448870"/>
@@ -344,22 +340,20 @@
                   <a:pt x="174930" y="407220"/>
                 </a:lnTo>
                 <a:lnTo>
-                  <a:pt x="49980" y="407220"/>
-                </a:lnTo>
-                <a:lnTo>
-                  <a:pt x="49980" y="365571"/>
+                  <a:pt x="49982" y="407220"/>
+                </a:lnTo>
+                <a:lnTo>
+                  <a:pt x="49982" y="365571"/>
                 </a:lnTo>
                 <a:close/>
-              </a:path>
-              <a:path w="347028" h="457200">
                 <a:moveTo>
                   <a:pt x="192531" y="448870"/>
                 </a:moveTo>
                 <a:lnTo>
-                  <a:pt x="216580" y="407220"/>
-                </a:lnTo>
-                <a:lnTo>
-                  <a:pt x="191590" y="407220"/>
+                  <a:pt x="216579" y="407220"/>
+                </a:lnTo>
+                <a:lnTo>
+                  <a:pt x="191589" y="407220"/>
                 </a:lnTo>
                 <a:lnTo>
                   <a:pt x="167541" y="448870"/>
@@ -767,22 +761,22 @@
             <a:pathLst>
               <a:path w="3123184" h="4114800">
                 <a:moveTo>
-                  <a:pt x="74968" y="291402"/>
+                  <a:pt x="74968" y="291406"/>
                 </a:moveTo>
                 <a:lnTo>
-                  <a:pt x="74968" y="1041088"/>
-                </a:lnTo>
-                <a:lnTo>
-                  <a:pt x="449810" y="1257522"/>
-                </a:lnTo>
-                <a:lnTo>
-                  <a:pt x="449810" y="1041088"/>
-                </a:lnTo>
-                <a:lnTo>
-                  <a:pt x="449810" y="666245"/>
-                </a:lnTo>
-                <a:lnTo>
-                  <a:pt x="1748338" y="1415931"/>
+                  <a:pt x="74968" y="1041090"/>
+                </a:lnTo>
+                <a:lnTo>
+                  <a:pt x="449810" y="1257524"/>
+                </a:lnTo>
+                <a:lnTo>
+                  <a:pt x="449810" y="1041090"/>
+                </a:lnTo>
+                <a:lnTo>
+                  <a:pt x="449810" y="666248"/>
+                </a:lnTo>
+                <a:lnTo>
+                  <a:pt x="1748338" y="1415932"/>
                 </a:lnTo>
                 <a:lnTo>
                   <a:pt x="1099036" y="1790774"/>
@@ -791,103 +785,97 @@
                   <a:pt x="1124526" y="1790774"/>
                 </a:lnTo>
                 <a:lnTo>
-                  <a:pt x="2423054" y="2540459"/>
-                </a:lnTo>
-                <a:lnTo>
-                  <a:pt x="1773752" y="2915302"/>
-                </a:lnTo>
-                <a:lnTo>
-                  <a:pt x="2398989" y="2915302"/>
-                </a:lnTo>
-                <a:lnTo>
-                  <a:pt x="3048215" y="2540459"/>
+                  <a:pt x="2423054" y="2540458"/>
+                </a:lnTo>
+                <a:lnTo>
+                  <a:pt x="1773752" y="2915301"/>
+                </a:lnTo>
+                <a:lnTo>
+                  <a:pt x="2398989" y="2915301"/>
+                </a:lnTo>
+                <a:lnTo>
+                  <a:pt x="3048215" y="2540458"/>
                 </a:lnTo>
                 <a:lnTo>
                   <a:pt x="1749762" y="1790774"/>
                 </a:lnTo>
                 <a:lnTo>
-                  <a:pt x="2398989" y="1415931"/>
-                </a:lnTo>
-                <a:lnTo>
-                  <a:pt x="2397564" y="1415931"/>
-                </a:lnTo>
-                <a:lnTo>
-                  <a:pt x="1099036" y="666245"/>
-                </a:lnTo>
-                <a:lnTo>
-                  <a:pt x="449810" y="291402"/>
-                </a:lnTo>
-                <a:lnTo>
-                  <a:pt x="74968" y="74968"/>
+                  <a:pt x="2398989" y="1415932"/>
+                </a:lnTo>
+                <a:lnTo>
+                  <a:pt x="2397564" y="1415932"/>
+                </a:lnTo>
+                <a:lnTo>
+                  <a:pt x="1099036" y="666248"/>
+                </a:lnTo>
+                <a:lnTo>
+                  <a:pt x="449810" y="291406"/>
+                </a:lnTo>
+                <a:lnTo>
+                  <a:pt x="74968" y="74972"/>
                 </a:lnTo>
                 <a:close/>
-              </a:path>
-              <a:path w="3123184" h="4114800">
                 <a:moveTo>
-                  <a:pt x="824652" y="2915302"/>
+                  <a:pt x="824652" y="2915301"/>
                 </a:moveTo>
                 <a:lnTo>
-                  <a:pt x="1199494" y="2915302"/>
-                </a:lnTo>
-                <a:lnTo>
-                  <a:pt x="1299952" y="2915302"/>
-                </a:lnTo>
-                <a:lnTo>
-                  <a:pt x="1949178" y="2540459"/>
-                </a:lnTo>
-                <a:lnTo>
-                  <a:pt x="1199494" y="2540459"/>
-                </a:lnTo>
-                <a:lnTo>
-                  <a:pt x="1199494" y="2165617"/>
-                </a:lnTo>
-                <a:lnTo>
-                  <a:pt x="824652" y="1949182"/>
+                  <a:pt x="1199494" y="2915301"/>
+                </a:lnTo>
+                <a:lnTo>
+                  <a:pt x="1299952" y="2915301"/>
+                </a:lnTo>
+                <a:lnTo>
+                  <a:pt x="1949178" y="2540458"/>
+                </a:lnTo>
+                <a:lnTo>
+                  <a:pt x="1199494" y="2540458"/>
+                </a:lnTo>
+                <a:lnTo>
+                  <a:pt x="1199494" y="2165616"/>
+                </a:lnTo>
+                <a:lnTo>
+                  <a:pt x="824652" y="1949183"/>
                 </a:lnTo>
                 <a:close/>
-              </a:path>
-              <a:path w="3123184" h="4114800">
                 <a:moveTo>
-                  <a:pt x="449810" y="1632365"/>
+                  <a:pt x="449810" y="1632366"/>
                 </a:moveTo>
                 <a:lnTo>
-                  <a:pt x="74968" y="1415931"/>
-                </a:lnTo>
-                <a:lnTo>
-                  <a:pt x="74968" y="3290145"/>
-                </a:lnTo>
-                <a:lnTo>
-                  <a:pt x="74968" y="3664988"/>
-                </a:lnTo>
-                <a:lnTo>
-                  <a:pt x="74968" y="4039831"/>
-                </a:lnTo>
-                <a:lnTo>
-                  <a:pt x="1357902" y="4039831"/>
-                </a:lnTo>
-                <a:lnTo>
-                  <a:pt x="1574336" y="3664988"/>
-                </a:lnTo>
-                <a:lnTo>
-                  <a:pt x="449810" y="3664988"/>
-                </a:lnTo>
-                <a:lnTo>
-                  <a:pt x="449810" y="3290145"/>
+                  <a:pt x="74968" y="1415932"/>
+                </a:lnTo>
+                <a:lnTo>
+                  <a:pt x="74968" y="3290143"/>
+                </a:lnTo>
+                <a:lnTo>
+                  <a:pt x="74968" y="3664985"/>
+                </a:lnTo>
+                <a:lnTo>
+                  <a:pt x="74968" y="4039827"/>
+                </a:lnTo>
+                <a:lnTo>
+                  <a:pt x="1357902" y="4039827"/>
+                </a:lnTo>
+                <a:lnTo>
+                  <a:pt x="1574336" y="3664985"/>
+                </a:lnTo>
+                <a:lnTo>
+                  <a:pt x="449810" y="3664985"/>
+                </a:lnTo>
+                <a:lnTo>
+                  <a:pt x="449810" y="3290143"/>
                 </a:lnTo>
                 <a:close/>
-              </a:path>
-              <a:path w="3123184" h="4114800">
                 <a:moveTo>
-                  <a:pt x="1732744" y="4039831"/>
+                  <a:pt x="1732744" y="4039827"/>
                 </a:moveTo>
                 <a:lnTo>
-                  <a:pt x="1949178" y="3664988"/>
-                </a:lnTo>
-                <a:lnTo>
-                  <a:pt x="1724273" y="3664988"/>
-                </a:lnTo>
-                <a:lnTo>
-                  <a:pt x="1507839" y="4039831"/>
+                  <a:pt x="1949178" y="3664985"/>
+                </a:lnTo>
+                <a:lnTo>
+                  <a:pt x="1724273" y="3664985"/>
+                </a:lnTo>
+                <a:lnTo>
+                  <a:pt x="1507839" y="4039827"/>
                 </a:lnTo>
                 <a:close/>
               </a:path>
@@ -1190,22 +1178,22 @@
             <a:pathLst>
               <a:path w="3123184" h="4114800">
                 <a:moveTo>
-                  <a:pt x="74968" y="291402"/>
+                  <a:pt x="74968" y="291406"/>
                 </a:moveTo>
                 <a:lnTo>
-                  <a:pt x="74968" y="1041088"/>
-                </a:lnTo>
-                <a:lnTo>
-                  <a:pt x="449810" y="1257522"/>
-                </a:lnTo>
-                <a:lnTo>
-                  <a:pt x="449810" y="1041088"/>
-                </a:lnTo>
-                <a:lnTo>
-                  <a:pt x="449810" y="666245"/>
-                </a:lnTo>
-                <a:lnTo>
-                  <a:pt x="1748338" y="1415931"/>
+                  <a:pt x="74968" y="1041090"/>
+                </a:lnTo>
+                <a:lnTo>
+                  <a:pt x="449810" y="1257524"/>
+                </a:lnTo>
+                <a:lnTo>
+                  <a:pt x="449810" y="1041090"/>
+                </a:lnTo>
+                <a:lnTo>
+                  <a:pt x="449810" y="666248"/>
+                </a:lnTo>
+                <a:lnTo>
+                  <a:pt x="1748338" y="1415932"/>
                 </a:lnTo>
                 <a:lnTo>
                   <a:pt x="1099036" y="1790774"/>
@@ -1214,103 +1202,97 @@
                   <a:pt x="1124526" y="1790774"/>
                 </a:lnTo>
                 <a:lnTo>
-                  <a:pt x="2423054" y="2540459"/>
-                </a:lnTo>
-                <a:lnTo>
-                  <a:pt x="1773752" y="2915302"/>
-                </a:lnTo>
-                <a:lnTo>
-                  <a:pt x="2398989" y="2915302"/>
-                </a:lnTo>
-                <a:lnTo>
-                  <a:pt x="3048215" y="2540459"/>
+                  <a:pt x="2423054" y="2540458"/>
+                </a:lnTo>
+                <a:lnTo>
+                  <a:pt x="1773752" y="2915301"/>
+                </a:lnTo>
+                <a:lnTo>
+                  <a:pt x="2398989" y="2915301"/>
+                </a:lnTo>
+                <a:lnTo>
+                  <a:pt x="3048215" y="2540458"/>
                 </a:lnTo>
                 <a:lnTo>
                   <a:pt x="1749762" y="1790774"/>
                 </a:lnTo>
                 <a:lnTo>
-                  <a:pt x="2398989" y="1415931"/>
-                </a:lnTo>
-                <a:lnTo>
-                  <a:pt x="2397564" y="1415931"/>
-                </a:lnTo>
-                <a:lnTo>
-                  <a:pt x="1099036" y="666245"/>
-                </a:lnTo>
-                <a:lnTo>
-                  <a:pt x="449810" y="291402"/>
-                </a:lnTo>
-                <a:lnTo>
-                  <a:pt x="74968" y="74968"/>
+                  <a:pt x="2398989" y="1415932"/>
+                </a:lnTo>
+                <a:lnTo>
+                  <a:pt x="2397564" y="1415932"/>
+                </a:lnTo>
+                <a:lnTo>
+                  <a:pt x="1099036" y="666248"/>
+                </a:lnTo>
+                <a:lnTo>
+                  <a:pt x="449810" y="291406"/>
+                </a:lnTo>
+                <a:lnTo>
+                  <a:pt x="74968" y="74972"/>
                 </a:lnTo>
                 <a:close/>
-              </a:path>
-              <a:path w="3123184" h="4114800">
                 <a:moveTo>
-                  <a:pt x="824652" y="2915302"/>
+                  <a:pt x="824652" y="2915301"/>
                 </a:moveTo>
                 <a:lnTo>
-                  <a:pt x="1199494" y="2915302"/>
-                </a:lnTo>
-                <a:lnTo>
-                  <a:pt x="1299952" y="2915302"/>
-                </a:lnTo>
-                <a:lnTo>
-                  <a:pt x="1949178" y="2540459"/>
-                </a:lnTo>
-                <a:lnTo>
-                  <a:pt x="1199494" y="2540459"/>
-                </a:lnTo>
-                <a:lnTo>
-                  <a:pt x="1199494" y="2165617"/>
-                </a:lnTo>
-                <a:lnTo>
-                  <a:pt x="824652" y="1949182"/>
+                  <a:pt x="1199494" y="2915301"/>
+                </a:lnTo>
+                <a:lnTo>
+                  <a:pt x="1299952" y="2915301"/>
+                </a:lnTo>
+                <a:lnTo>
+                  <a:pt x="1949178" y="2540458"/>
+                </a:lnTo>
+                <a:lnTo>
+                  <a:pt x="1199494" y="2540458"/>
+                </a:lnTo>
+                <a:lnTo>
+                  <a:pt x="1199494" y="2165616"/>
+                </a:lnTo>
+                <a:lnTo>
+                  <a:pt x="824652" y="1949183"/>
                 </a:lnTo>
                 <a:close/>
-              </a:path>
-              <a:path w="3123184" h="4114800">
                 <a:moveTo>
-                  <a:pt x="449810" y="1632365"/>
+                  <a:pt x="449810" y="1632366"/>
                 </a:moveTo>
                 <a:lnTo>
-                  <a:pt x="74968" y="1415931"/>
-                </a:lnTo>
-                <a:lnTo>
-                  <a:pt x="74968" y="3290145"/>
-                </a:lnTo>
-                <a:lnTo>
-                  <a:pt x="74968" y="3664988"/>
-                </a:lnTo>
-                <a:lnTo>
-                  <a:pt x="74968" y="4039831"/>
-                </a:lnTo>
-                <a:lnTo>
-                  <a:pt x="1357902" y="4039831"/>
-                </a:lnTo>
-                <a:lnTo>
-                  <a:pt x="1574336" y="3664988"/>
-                </a:lnTo>
-                <a:lnTo>
-                  <a:pt x="449810" y="3664988"/>
-                </a:lnTo>
-                <a:lnTo>
-                  <a:pt x="449810" y="3290145"/>
+                  <a:pt x="74968" y="1415932"/>
+                </a:lnTo>
+                <a:lnTo>
+                  <a:pt x="74968" y="3290143"/>
+                </a:lnTo>
+                <a:lnTo>
+                  <a:pt x="74968" y="3664985"/>
+                </a:lnTo>
+                <a:lnTo>
+                  <a:pt x="74968" y="4039827"/>
+                </a:lnTo>
+                <a:lnTo>
+                  <a:pt x="1357902" y="4039827"/>
+                </a:lnTo>
+                <a:lnTo>
+                  <a:pt x="1574336" y="3664985"/>
+                </a:lnTo>
+                <a:lnTo>
+                  <a:pt x="449810" y="3664985"/>
+                </a:lnTo>
+                <a:lnTo>
+                  <a:pt x="449810" y="3290143"/>
                 </a:lnTo>
                 <a:close/>
-              </a:path>
-              <a:path w="3123184" h="4114800">
                 <a:moveTo>
-                  <a:pt x="1732744" y="4039831"/>
+                  <a:pt x="1732744" y="4039827"/>
                 </a:moveTo>
                 <a:lnTo>
-                  <a:pt x="1949178" y="3664988"/>
-                </a:lnTo>
-                <a:lnTo>
-                  <a:pt x="1724273" y="3664988"/>
-                </a:lnTo>
-                <a:lnTo>
-                  <a:pt x="1507839" y="4039831"/>
+                  <a:pt x="1949178" y="3664985"/>
+                </a:lnTo>
+                <a:lnTo>
+                  <a:pt x="1724273" y="3664985"/>
+                </a:lnTo>
+                <a:lnTo>
+                  <a:pt x="1507839" y="4039827"/>
                 </a:lnTo>
                 <a:close/>
               </a:path>
@@ -1613,22 +1595,22 @@
             <a:pathLst>
               <a:path w="3123184" h="4114800">
                 <a:moveTo>
-                  <a:pt x="74968" y="291402"/>
+                  <a:pt x="74968" y="291406"/>
                 </a:moveTo>
                 <a:lnTo>
-                  <a:pt x="74968" y="1041088"/>
-                </a:lnTo>
-                <a:lnTo>
-                  <a:pt x="449810" y="1257522"/>
-                </a:lnTo>
-                <a:lnTo>
-                  <a:pt x="449810" y="1041088"/>
-                </a:lnTo>
-                <a:lnTo>
-                  <a:pt x="449810" y="666245"/>
-                </a:lnTo>
-                <a:lnTo>
-                  <a:pt x="1748338" y="1415931"/>
+                  <a:pt x="74968" y="1041090"/>
+                </a:lnTo>
+                <a:lnTo>
+                  <a:pt x="449810" y="1257524"/>
+                </a:lnTo>
+                <a:lnTo>
+                  <a:pt x="449810" y="1041090"/>
+                </a:lnTo>
+                <a:lnTo>
+                  <a:pt x="449810" y="666248"/>
+                </a:lnTo>
+                <a:lnTo>
+                  <a:pt x="1748338" y="1415932"/>
                 </a:lnTo>
                 <a:lnTo>
                   <a:pt x="1099036" y="1790774"/>
@@ -1637,103 +1619,97 @@
                   <a:pt x="1124526" y="1790774"/>
                 </a:lnTo>
                 <a:lnTo>
-                  <a:pt x="2423054" y="2540459"/>
-                </a:lnTo>
-                <a:lnTo>
-                  <a:pt x="1773752" y="2915302"/>
-                </a:lnTo>
-                <a:lnTo>
-                  <a:pt x="2398989" y="2915302"/>
-                </a:lnTo>
-                <a:lnTo>
-                  <a:pt x="3048215" y="2540459"/>
+                  <a:pt x="2423054" y="2540458"/>
+                </a:lnTo>
+                <a:lnTo>
+                  <a:pt x="1773752" y="2915301"/>
+                </a:lnTo>
+                <a:lnTo>
+                  <a:pt x="2398989" y="2915301"/>
+                </a:lnTo>
+                <a:lnTo>
+                  <a:pt x="3048215" y="2540458"/>
                 </a:lnTo>
                 <a:lnTo>
                   <a:pt x="1749762" y="1790774"/>
                 </a:lnTo>
                 <a:lnTo>
-                  <a:pt x="2398989" y="1415931"/>
-                </a:lnTo>
-                <a:lnTo>
-                  <a:pt x="2397564" y="1415931"/>
-                </a:lnTo>
-                <a:lnTo>
-                  <a:pt x="1099036" y="666245"/>
-                </a:lnTo>
-                <a:lnTo>
-                  <a:pt x="449810" y="291402"/>
-                </a:lnTo>
-                <a:lnTo>
-                  <a:pt x="74968" y="74968"/>
+                  <a:pt x="2398989" y="1415932"/>
+                </a:lnTo>
+                <a:lnTo>
+                  <a:pt x="2397564" y="1415932"/>
+                </a:lnTo>
+                <a:lnTo>
+                  <a:pt x="1099036" y="666248"/>
+                </a:lnTo>
+                <a:lnTo>
+                  <a:pt x="449810" y="291406"/>
+                </a:lnTo>
+                <a:lnTo>
+                  <a:pt x="74968" y="74972"/>
                 </a:lnTo>
                 <a:close/>
-              </a:path>
-              <a:path w="3123184" h="4114800">
                 <a:moveTo>
-                  <a:pt x="824652" y="2915302"/>
+                  <a:pt x="824652" y="2915301"/>
                 </a:moveTo>
                 <a:lnTo>
-                  <a:pt x="1199494" y="2915302"/>
-                </a:lnTo>
-                <a:lnTo>
-                  <a:pt x="1299952" y="2915302"/>
-                </a:lnTo>
-                <a:lnTo>
-                  <a:pt x="1949178" y="2540459"/>
-                </a:lnTo>
-                <a:lnTo>
-                  <a:pt x="1199494" y="2540459"/>
-                </a:lnTo>
-                <a:lnTo>
-                  <a:pt x="1199494" y="2165617"/>
-                </a:lnTo>
-                <a:lnTo>
-                  <a:pt x="824652" y="1949182"/>
+                  <a:pt x="1199494" y="2915301"/>
+                </a:lnTo>
+                <a:lnTo>
+                  <a:pt x="1299952" y="2915301"/>
+                </a:lnTo>
+                <a:lnTo>
+                  <a:pt x="1949178" y="2540458"/>
+                </a:lnTo>
+                <a:lnTo>
+                  <a:pt x="1199494" y="2540458"/>
+                </a:lnTo>
+                <a:lnTo>
+                  <a:pt x="1199494" y="2165616"/>
+                </a:lnTo>
+                <a:lnTo>
+                  <a:pt x="824652" y="1949183"/>
                 </a:lnTo>
                 <a:close/>
-              </a:path>
-              <a:path w="3123184" h="4114800">
                 <a:moveTo>
-                  <a:pt x="449810" y="1632365"/>
+                  <a:pt x="449810" y="1632366"/>
                 </a:moveTo>
                 <a:lnTo>
-                  <a:pt x="74968" y="1415931"/>
-                </a:lnTo>
-                <a:lnTo>
-                  <a:pt x="74968" y="3290145"/>
-                </a:lnTo>
-                <a:lnTo>
-                  <a:pt x="74968" y="3664988"/>
-                </a:lnTo>
-                <a:lnTo>
-                  <a:pt x="74968" y="4039831"/>
-                </a:lnTo>
-                <a:lnTo>
-                  <a:pt x="1357902" y="4039831"/>
-                </a:lnTo>
-                <a:lnTo>
-                  <a:pt x="1574336" y="3664988"/>
-                </a:lnTo>
-                <a:lnTo>
-                  <a:pt x="449810" y="3664988"/>
-                </a:lnTo>
-                <a:lnTo>
-                  <a:pt x="449810" y="3290145"/>
+                  <a:pt x="74968" y="1415932"/>
+                </a:lnTo>
+                <a:lnTo>
+                  <a:pt x="74968" y="3290143"/>
+                </a:lnTo>
+                <a:lnTo>
+                  <a:pt x="74968" y="3664985"/>
+                </a:lnTo>
+                <a:lnTo>
+                  <a:pt x="74968" y="4039827"/>
+                </a:lnTo>
+                <a:lnTo>
+                  <a:pt x="1357902" y="4039827"/>
+                </a:lnTo>
+                <a:lnTo>
+                  <a:pt x="1574336" y="3664985"/>
+                </a:lnTo>
+                <a:lnTo>
+                  <a:pt x="449810" y="3664985"/>
+                </a:lnTo>
+                <a:lnTo>
+                  <a:pt x="449810" y="3290143"/>
                 </a:lnTo>
                 <a:close/>
-              </a:path>
-              <a:path w="3123184" h="4114800">
                 <a:moveTo>
-                  <a:pt x="1732744" y="4039831"/>
+                  <a:pt x="1732744" y="4039827"/>
                 </a:moveTo>
                 <a:lnTo>
-                  <a:pt x="1949178" y="3664988"/>
-                </a:lnTo>
-                <a:lnTo>
-                  <a:pt x="1724273" y="3664988"/>
-                </a:lnTo>
-                <a:lnTo>
-                  <a:pt x="1507839" y="4039831"/>
+                  <a:pt x="1949178" y="3664985"/>
+                </a:lnTo>
+                <a:lnTo>
+                  <a:pt x="1724273" y="3664985"/>
+                </a:lnTo>
+                <a:lnTo>
+                  <a:pt x="1507839" y="4039827"/>
                 </a:lnTo>
                 <a:close/>
               </a:path>
@@ -1956,22 +1932,22 @@
             <a:pathLst>
               <a:path w="3123184" h="4114800">
                 <a:moveTo>
-                  <a:pt x="74968" y="291402"/>
+                  <a:pt x="74968" y="291406"/>
                 </a:moveTo>
                 <a:lnTo>
-                  <a:pt x="74968" y="1041088"/>
-                </a:lnTo>
-                <a:lnTo>
-                  <a:pt x="449810" y="1257522"/>
-                </a:lnTo>
-                <a:lnTo>
-                  <a:pt x="449810" y="1041088"/>
-                </a:lnTo>
-                <a:lnTo>
-                  <a:pt x="449810" y="666245"/>
-                </a:lnTo>
-                <a:lnTo>
-                  <a:pt x="1748338" y="1415931"/>
+                  <a:pt x="74968" y="1041090"/>
+                </a:lnTo>
+                <a:lnTo>
+                  <a:pt x="449810" y="1257524"/>
+                </a:lnTo>
+                <a:lnTo>
+                  <a:pt x="449810" y="1041090"/>
+                </a:lnTo>
+                <a:lnTo>
+                  <a:pt x="449810" y="666248"/>
+                </a:lnTo>
+                <a:lnTo>
+                  <a:pt x="1748338" y="1415932"/>
                 </a:lnTo>
                 <a:lnTo>
                   <a:pt x="1099036" y="1790774"/>
@@ -1980,103 +1956,97 @@
                   <a:pt x="1124526" y="1790774"/>
                 </a:lnTo>
                 <a:lnTo>
-                  <a:pt x="2423054" y="2540459"/>
-                </a:lnTo>
-                <a:lnTo>
-                  <a:pt x="1773752" y="2915302"/>
-                </a:lnTo>
-                <a:lnTo>
-                  <a:pt x="2398989" y="2915302"/>
-                </a:lnTo>
-                <a:lnTo>
-                  <a:pt x="3048215" y="2540459"/>
+                  <a:pt x="2423054" y="2540458"/>
+                </a:lnTo>
+                <a:lnTo>
+                  <a:pt x="1773752" y="2915301"/>
+                </a:lnTo>
+                <a:lnTo>
+                  <a:pt x="2398989" y="2915301"/>
+                </a:lnTo>
+                <a:lnTo>
+                  <a:pt x="3048215" y="2540458"/>
                 </a:lnTo>
                 <a:lnTo>
                   <a:pt x="1749762" y="1790774"/>
                 </a:lnTo>
                 <a:lnTo>
-                  <a:pt x="2398989" y="1415931"/>
-                </a:lnTo>
-                <a:lnTo>
-                  <a:pt x="2397564" y="1415931"/>
-                </a:lnTo>
-                <a:lnTo>
-                  <a:pt x="1099036" y="666245"/>
-                </a:lnTo>
-                <a:lnTo>
-                  <a:pt x="449810" y="291402"/>
-                </a:lnTo>
-                <a:lnTo>
-                  <a:pt x="74968" y="74968"/>
+                  <a:pt x="2398989" y="1415932"/>
+                </a:lnTo>
+                <a:lnTo>
+                  <a:pt x="2397564" y="1415932"/>
+                </a:lnTo>
+                <a:lnTo>
+                  <a:pt x="1099036" y="666248"/>
+                </a:lnTo>
+                <a:lnTo>
+                  <a:pt x="449810" y="291406"/>
+                </a:lnTo>
+                <a:lnTo>
+                  <a:pt x="74968" y="74972"/>
                 </a:lnTo>
                 <a:close/>
-              </a:path>
-              <a:path w="3123184" h="4114800">
                 <a:moveTo>
-                  <a:pt x="824652" y="2915302"/>
+                  <a:pt x="824652" y="2915301"/>
                 </a:moveTo>
                 <a:lnTo>
-                  <a:pt x="1199494" y="2915302"/>
-                </a:lnTo>
-                <a:lnTo>
-                  <a:pt x="1299952" y="2915302"/>
-                </a:lnTo>
-                <a:lnTo>
-                  <a:pt x="1949178" y="2540459"/>
-                </a:lnTo>
-                <a:lnTo>
-                  <a:pt x="1199494" y="2540459"/>
-                </a:lnTo>
-                <a:lnTo>
-                  <a:pt x="1199494" y="2165617"/>
-                </a:lnTo>
-                <a:lnTo>
-                  <a:pt x="824652" y="1949182"/>
+                  <a:pt x="1199494" y="2915301"/>
+                </a:lnTo>
+                <a:lnTo>
+                  <a:pt x="1299952" y="2915301"/>
+                </a:lnTo>
+                <a:lnTo>
+                  <a:pt x="1949178" y="2540458"/>
+                </a:lnTo>
+                <a:lnTo>
+                  <a:pt x="1199494" y="2540458"/>
+                </a:lnTo>
+                <a:lnTo>
+                  <a:pt x="1199494" y="2165616"/>
+                </a:lnTo>
+                <a:lnTo>
+                  <a:pt x="824652" y="1949183"/>
                 </a:lnTo>
                 <a:close/>
-              </a:path>
-              <a:path w="3123184" h="4114800">
                 <a:moveTo>
-                  <a:pt x="449810" y="1632365"/>
+                  <a:pt x="449810" y="1632366"/>
                 </a:moveTo>
                 <a:lnTo>
-                  <a:pt x="74968" y="1415931"/>
-                </a:lnTo>
-                <a:lnTo>
-                  <a:pt x="74968" y="3290145"/>
-                </a:lnTo>
-                <a:lnTo>
-                  <a:pt x="74968" y="3664988"/>
-                </a:lnTo>
-                <a:lnTo>
-                  <a:pt x="74968" y="4039831"/>
-                </a:lnTo>
-                <a:lnTo>
-                  <a:pt x="1357902" y="4039831"/>
-                </a:lnTo>
-                <a:lnTo>
-                  <a:pt x="1574336" y="3664988"/>
-                </a:lnTo>
-                <a:lnTo>
-                  <a:pt x="449810" y="3664988"/>
-                </a:lnTo>
-                <a:lnTo>
-                  <a:pt x="449810" y="3290145"/>
+                  <a:pt x="74968" y="1415932"/>
+                </a:lnTo>
+                <a:lnTo>
+                  <a:pt x="74968" y="3290143"/>
+                </a:lnTo>
+                <a:lnTo>
+                  <a:pt x="74968" y="3664985"/>
+                </a:lnTo>
+                <a:lnTo>
+                  <a:pt x="74968" y="4039827"/>
+                </a:lnTo>
+                <a:lnTo>
+                  <a:pt x="1357902" y="4039827"/>
+                </a:lnTo>
+                <a:lnTo>
+                  <a:pt x="1574336" y="3664985"/>
+                </a:lnTo>
+                <a:lnTo>
+                  <a:pt x="449810" y="3664985"/>
+                </a:lnTo>
+                <a:lnTo>
+                  <a:pt x="449810" y="3290143"/>
                 </a:lnTo>
                 <a:close/>
-              </a:path>
-              <a:path w="3123184" h="4114800">
                 <a:moveTo>
-                  <a:pt x="1732744" y="4039831"/>
+                  <a:pt x="1732744" y="4039827"/>
                 </a:moveTo>
                 <a:lnTo>
-                  <a:pt x="1949178" y="3664988"/>
-                </a:lnTo>
-                <a:lnTo>
-                  <a:pt x="1724273" y="3664988"/>
-                </a:lnTo>
-                <a:lnTo>
-                  <a:pt x="1507839" y="4039831"/>
+                  <a:pt x="1949178" y="3664985"/>
+                </a:lnTo>
+                <a:lnTo>
+                  <a:pt x="1724273" y="3664985"/>
+                </a:lnTo>
+                <a:lnTo>
+                  <a:pt x="1507839" y="4039827"/>
                 </a:lnTo>
                 <a:close/>
               </a:path>
@@ -2449,19 +2419,19 @@
             <a:pathLst>
               <a:path w="192786" h="254000">
                 <a:moveTo>
-                  <a:pt x="4627" y="17987"/>
+                  <a:pt x="4627" y="17989"/>
                 </a:moveTo>
                 <a:lnTo>
-                  <a:pt x="4627" y="64264"/>
-                </a:lnTo>
-                <a:lnTo>
-                  <a:pt x="27765" y="77624"/>
-                </a:lnTo>
-                <a:lnTo>
-                  <a:pt x="27765" y="64264"/>
-                </a:lnTo>
-                <a:lnTo>
-                  <a:pt x="27765" y="41126"/>
+                  <a:pt x="4627" y="64265"/>
+                </a:lnTo>
+                <a:lnTo>
+                  <a:pt x="27765" y="77625"/>
+                </a:lnTo>
+                <a:lnTo>
+                  <a:pt x="27765" y="64265"/>
+                </a:lnTo>
+                <a:lnTo>
+                  <a:pt x="27765" y="41127"/>
                 </a:lnTo>
                 <a:lnTo>
                   <a:pt x="107920" y="87403"/>
@@ -2473,16 +2443,16 @@
                   <a:pt x="69414" y="110541"/>
                 </a:lnTo>
                 <a:lnTo>
-                  <a:pt x="149568" y="156818"/>
-                </a:lnTo>
-                <a:lnTo>
-                  <a:pt x="109489" y="179956"/>
-                </a:lnTo>
-                <a:lnTo>
-                  <a:pt x="148083" y="179956"/>
-                </a:lnTo>
-                <a:lnTo>
-                  <a:pt x="188158" y="156818"/>
+                  <a:pt x="149568" y="156817"/>
+                </a:lnTo>
+                <a:lnTo>
+                  <a:pt x="109489" y="179955"/>
+                </a:lnTo>
+                <a:lnTo>
+                  <a:pt x="148083" y="179955"/>
+                </a:lnTo>
+                <a:lnTo>
+                  <a:pt x="188158" y="156817"/>
                 </a:lnTo>
                 <a:lnTo>
                   <a:pt x="108008" y="110541"/>
@@ -2494,41 +2464,37 @@
                   <a:pt x="147995" y="87403"/>
                 </a:lnTo>
                 <a:lnTo>
-                  <a:pt x="67840" y="41126"/>
-                </a:lnTo>
-                <a:lnTo>
-                  <a:pt x="27765" y="17987"/>
-                </a:lnTo>
-                <a:lnTo>
-                  <a:pt x="4627" y="4627"/>
+                  <a:pt x="67840" y="41127"/>
+                </a:lnTo>
+                <a:lnTo>
+                  <a:pt x="27765" y="17989"/>
+                </a:lnTo>
+                <a:lnTo>
+                  <a:pt x="4627" y="4629"/>
                 </a:lnTo>
                 <a:close/>
-              </a:path>
-              <a:path w="192786" h="254000">
                 <a:moveTo>
-                  <a:pt x="50903" y="179956"/>
+                  <a:pt x="50903" y="179955"/>
                 </a:moveTo>
                 <a:lnTo>
-                  <a:pt x="74041" y="179956"/>
-                </a:lnTo>
-                <a:lnTo>
-                  <a:pt x="80242" y="179956"/>
-                </a:lnTo>
-                <a:lnTo>
-                  <a:pt x="120317" y="156818"/>
-                </a:lnTo>
-                <a:lnTo>
-                  <a:pt x="74041" y="156818"/>
-                </a:lnTo>
-                <a:lnTo>
-                  <a:pt x="74041" y="133680"/>
-                </a:lnTo>
-                <a:lnTo>
-                  <a:pt x="50903" y="120319"/>
+                  <a:pt x="74041" y="179955"/>
+                </a:lnTo>
+                <a:lnTo>
+                  <a:pt x="80242" y="179955"/>
+                </a:lnTo>
+                <a:lnTo>
+                  <a:pt x="120317" y="156817"/>
+                </a:lnTo>
+                <a:lnTo>
+                  <a:pt x="74041" y="156817"/>
+                </a:lnTo>
+                <a:lnTo>
+                  <a:pt x="74041" y="133679"/>
+                </a:lnTo>
+                <a:lnTo>
+                  <a:pt x="50903" y="120320"/>
                 </a:lnTo>
                 <a:close/>
-              </a:path>
-              <a:path w="192786" h="254000">
                 <a:moveTo>
                   <a:pt x="27765" y="100763"/>
                 </a:moveTo>
@@ -2536,40 +2502,38 @@
                   <a:pt x="4627" y="87403"/>
                 </a:lnTo>
                 <a:lnTo>
-                  <a:pt x="4627" y="203095"/>
-                </a:lnTo>
-                <a:lnTo>
-                  <a:pt x="4627" y="226233"/>
-                </a:lnTo>
-                <a:lnTo>
-                  <a:pt x="4627" y="249372"/>
-                </a:lnTo>
-                <a:lnTo>
-                  <a:pt x="83819" y="249372"/>
-                </a:lnTo>
-                <a:lnTo>
-                  <a:pt x="97179" y="226233"/>
-                </a:lnTo>
-                <a:lnTo>
-                  <a:pt x="27765" y="226233"/>
-                </a:lnTo>
-                <a:lnTo>
-                  <a:pt x="27765" y="203095"/>
+                  <a:pt x="4627" y="203094"/>
+                </a:lnTo>
+                <a:lnTo>
+                  <a:pt x="4627" y="226232"/>
+                </a:lnTo>
+                <a:lnTo>
+                  <a:pt x="4627" y="249370"/>
+                </a:lnTo>
+                <a:lnTo>
+                  <a:pt x="83819" y="249370"/>
+                </a:lnTo>
+                <a:lnTo>
+                  <a:pt x="97179" y="226232"/>
+                </a:lnTo>
+                <a:lnTo>
+                  <a:pt x="27765" y="226232"/>
+                </a:lnTo>
+                <a:lnTo>
+                  <a:pt x="27765" y="203094"/>
                 </a:lnTo>
                 <a:close/>
-              </a:path>
-              <a:path w="192786" h="254000">
                 <a:moveTo>
-                  <a:pt x="106957" y="249372"/>
+                  <a:pt x="106957" y="249370"/>
                 </a:moveTo>
                 <a:lnTo>
-                  <a:pt x="120317" y="226233"/>
-                </a:lnTo>
-                <a:lnTo>
-                  <a:pt x="106434" y="226233"/>
-                </a:lnTo>
-                <a:lnTo>
-                  <a:pt x="93075" y="249372"/>
+                  <a:pt x="120317" y="226232"/>
+                </a:lnTo>
+                <a:lnTo>
+                  <a:pt x="106434" y="226232"/>
+                </a:lnTo>
+                <a:lnTo>
+                  <a:pt x="93075" y="249370"/>
                 </a:lnTo>
                 <a:close/>
               </a:path>
@@ -2863,19 +2827,19 @@
             <a:pathLst>
               <a:path w="192786" h="254000">
                 <a:moveTo>
-                  <a:pt x="4627" y="17987"/>
+                  <a:pt x="4627" y="17989"/>
                 </a:moveTo>
                 <a:lnTo>
-                  <a:pt x="4627" y="64264"/>
-                </a:lnTo>
-                <a:lnTo>
-                  <a:pt x="27765" y="77624"/>
-                </a:lnTo>
-                <a:lnTo>
-                  <a:pt x="27765" y="64264"/>
-                </a:lnTo>
-                <a:lnTo>
-                  <a:pt x="27765" y="41126"/>
+                  <a:pt x="4627" y="64265"/>
+                </a:lnTo>
+                <a:lnTo>
+                  <a:pt x="27765" y="77625"/>
+                </a:lnTo>
+                <a:lnTo>
+                  <a:pt x="27765" y="64265"/>
+                </a:lnTo>
+                <a:lnTo>
+                  <a:pt x="27765" y="41127"/>
                 </a:lnTo>
                 <a:lnTo>
                   <a:pt x="107920" y="87403"/>
@@ -2887,16 +2851,16 @@
                   <a:pt x="69414" y="110541"/>
                 </a:lnTo>
                 <a:lnTo>
-                  <a:pt x="149568" y="156818"/>
-                </a:lnTo>
-                <a:lnTo>
-                  <a:pt x="109489" y="179956"/>
-                </a:lnTo>
-                <a:lnTo>
-                  <a:pt x="148083" y="179956"/>
-                </a:lnTo>
-                <a:lnTo>
-                  <a:pt x="188158" y="156818"/>
+                  <a:pt x="149568" y="156817"/>
+                </a:lnTo>
+                <a:lnTo>
+                  <a:pt x="109489" y="179955"/>
+                </a:lnTo>
+                <a:lnTo>
+                  <a:pt x="148083" y="179955"/>
+                </a:lnTo>
+                <a:lnTo>
+                  <a:pt x="188158" y="156817"/>
                 </a:lnTo>
                 <a:lnTo>
                   <a:pt x="108008" y="110541"/>
@@ -2908,41 +2872,37 @@
                   <a:pt x="147995" y="87403"/>
                 </a:lnTo>
                 <a:lnTo>
-                  <a:pt x="67840" y="41126"/>
-                </a:lnTo>
-                <a:lnTo>
-                  <a:pt x="27765" y="17987"/>
-                </a:lnTo>
-                <a:lnTo>
-                  <a:pt x="4627" y="4627"/>
+                  <a:pt x="67840" y="41127"/>
+                </a:lnTo>
+                <a:lnTo>
+                  <a:pt x="27765" y="17989"/>
+                </a:lnTo>
+                <a:lnTo>
+                  <a:pt x="4627" y="4629"/>
                 </a:lnTo>
                 <a:close/>
-              </a:path>
-              <a:path w="192786" h="254000">
                 <a:moveTo>
-                  <a:pt x="50903" y="179956"/>
+                  <a:pt x="50903" y="179955"/>
                 </a:moveTo>
                 <a:lnTo>
-                  <a:pt x="74041" y="179956"/>
-                </a:lnTo>
-                <a:lnTo>
-                  <a:pt x="80242" y="179956"/>
-                </a:lnTo>
-                <a:lnTo>
-                  <a:pt x="120317" y="156818"/>
-                </a:lnTo>
-                <a:lnTo>
-                  <a:pt x="74041" y="156818"/>
-                </a:lnTo>
-                <a:lnTo>
-                  <a:pt x="74041" y="133680"/>
-                </a:lnTo>
-                <a:lnTo>
-                  <a:pt x="50903" y="120319"/>
+                  <a:pt x="74041" y="179955"/>
+                </a:lnTo>
+                <a:lnTo>
+                  <a:pt x="80242" y="179955"/>
+                </a:lnTo>
+                <a:lnTo>
+                  <a:pt x="120317" y="156817"/>
+                </a:lnTo>
+                <a:lnTo>
+                  <a:pt x="74041" y="156817"/>
+                </a:lnTo>
+                <a:lnTo>
+                  <a:pt x="74041" y="133679"/>
+                </a:lnTo>
+                <a:lnTo>
+                  <a:pt x="50903" y="120320"/>
                 </a:lnTo>
                 <a:close/>
-              </a:path>
-              <a:path w="192786" h="254000">
                 <a:moveTo>
                   <a:pt x="27765" y="100763"/>
                 </a:moveTo>
@@ -2950,40 +2910,38 @@
                   <a:pt x="4627" y="87403"/>
                 </a:lnTo>
                 <a:lnTo>
-                  <a:pt x="4627" y="203095"/>
-                </a:lnTo>
-                <a:lnTo>
-                  <a:pt x="4627" y="226233"/>
-                </a:lnTo>
-                <a:lnTo>
-                  <a:pt x="4627" y="249372"/>
-                </a:lnTo>
-                <a:lnTo>
-                  <a:pt x="83819" y="249372"/>
-                </a:lnTo>
-                <a:lnTo>
-                  <a:pt x="97179" y="226233"/>
-                </a:lnTo>
-                <a:lnTo>
-                  <a:pt x="27765" y="226233"/>
-                </a:lnTo>
-                <a:lnTo>
-                  <a:pt x="27765" y="203095"/>
+                  <a:pt x="4627" y="203094"/>
+                </a:lnTo>
+                <a:lnTo>
+                  <a:pt x="4627" y="226232"/>
+                </a:lnTo>
+                <a:lnTo>
+                  <a:pt x="4627" y="249370"/>
+                </a:lnTo>
+                <a:lnTo>
+                  <a:pt x="83819" y="249370"/>
+                </a:lnTo>
+                <a:lnTo>
+                  <a:pt x="97179" y="226232"/>
+                </a:lnTo>
+                <a:lnTo>
+                  <a:pt x="27765" y="226232"/>
+                </a:lnTo>
+                <a:lnTo>
+                  <a:pt x="27765" y="203094"/>
                 </a:lnTo>
                 <a:close/>
-              </a:path>
-              <a:path w="192786" h="254000">
                 <a:moveTo>
-                  <a:pt x="106957" y="249372"/>
+                  <a:pt x="106957" y="249370"/>
                 </a:moveTo>
                 <a:lnTo>
-                  <a:pt x="120317" y="226233"/>
-                </a:lnTo>
-                <a:lnTo>
-                  <a:pt x="106434" y="226233"/>
-                </a:lnTo>
-                <a:lnTo>
-                  <a:pt x="93075" y="249372"/>
+                  <a:pt x="120317" y="226232"/>
+                </a:lnTo>
+                <a:lnTo>
+                  <a:pt x="106434" y="226232"/>
+                </a:lnTo>
+                <a:lnTo>
+                  <a:pt x="93075" y="249370"/>
                 </a:lnTo>
                 <a:close/>
               </a:path>

--- a/bigtree/samples/bigtree_lab_organisms.pptx
+++ b/bigtree/samples/bigtree_lab_organisms.pptx
@@ -9051,7 +9051,7 @@
                 <a:buNone/>
                 <a:defRPr sz="1400" b="0">
                   <a:solidFill>
-                    <a:schemeClr val="bg1"/>
+                    <a:schemeClr val="tx1"/>
                   </a:solidFill>
                   <a:latin typeface="+mn-lt"/>
                   <a:ea typeface="+mn-ea"/>

--- a/bigtree/samples/bigtree_lab_organisms.pptx
+++ b/bigtree/samples/bigtree_lab_organisms.pptx
@@ -26,6 +26,9 @@
     <p:sldId id="412" r:id="rIdOrg12"/>
     <p:sldId id="413" r:id="rIdOrg13"/>
     <p:sldId id="414" r:id="rIdOrg14"/>
+    <p:sldId id="415" r:id="rIdOrg15"/>
+    <p:sldId id="416" r:id="rIdOrg16"/>
+    <p:sldId id="417" r:id="rIdOrg17"/>
     <p:sldId id="451" r:id="rIdStruct1"/>
     <p:sldId id="452" r:id="rIdStruct2"/>
   </p:sldIdLst>
@@ -13923,35 +13926,57 @@
           <a:p>
             <a:r>
               <a:rPr lang="ja-JP"/>
-              <a:t>目次</a:t>
+              <a:t>申込経路の入れ替わり</a:t>
+            </a:r>
+          </a:p>
+        </p:txBody>
+      </p:sp>
+      <p:sp>
+        <p:nvSpPr>
+          <p:cNvPr id="3" name="Lead"/>
+          <p:cNvSpPr>
+            <a:spLocks noGrp="1"/>
+          </p:cNvSpPr>
+          <p:nvPr>
+            <p:ph type="body" idx="13" sz="quarter"/>
+          </p:nvPr>
+        </p:nvSpPr>
+        <p:spPr/>
+        <p:txBody>
+          <a:bodyPr/>
+          <a:lstStyle/>
+          <a:p>
+            <a:r>
+              <a:rPr lang="ja-JP"/>
+              <a:t>2023年にオンラインが紙を上回った</a:t>
             </a:r>
           </a:p>
         </p:txBody>
       </p:sp>
       <p:grpSp>
         <p:nvGrpSpPr>
-          <p:cNvPr id="33" name="organism/O-S1 目次"/>
+          <p:cNvPr id="16" name="organism/O-B24 逆転（2つの推移の交差）"/>
           <p:cNvGrpSpPr/>
           <p:nvPr/>
         </p:nvGrpSpPr>
         <p:grpSpPr>
           <a:xfrm>
-            <a:off x="457200" y="965200"/>
-            <a:ext cx="8229600" cy="3657600"/>
-            <a:chOff x="457200" y="965200"/>
-            <a:chExt cx="8229600" cy="3657600"/>
+            <a:off x="457200" y="1527175"/>
+            <a:ext cx="8229600" cy="2940050"/>
+            <a:chOff x="457200" y="1527175"/>
+            <a:chExt cx="8229600" cy="2940050"/>
           </a:xfrm>
         </p:grpSpPr>
         <p:sp>
           <p:nvSpPr>
-            <p:cNvPr id="3" name="Rule_01"/>
+            <p:cNvPr id="4" name="Axis"/>
             <p:cNvSpPr/>
             <p:nvPr/>
           </p:nvSpPr>
           <p:spPr>
             <a:xfrm>
-              <a:off x="457200" y="965200"/>
-              <a:ext cx="3962400" cy="12700"/>
+              <a:off x="457200" y="3889375"/>
+              <a:ext cx="6731000" cy="12700"/>
             </a:xfrm>
             <a:prstGeom prst="rect">
               <a:avLst/>
@@ -13966,14 +13991,14 @@
         </p:sp>
         <p:sp>
           <p:nvSpPr>
-            <p:cNvPr id="4" name="Rule_02"/>
+            <p:cNvPr id="5" name="Drop_交点"/>
             <p:cNvSpPr/>
             <p:nvPr/>
           </p:nvSpPr>
           <p:spPr>
             <a:xfrm>
-              <a:off x="4724400" y="965200"/>
-              <a:ext cx="3962400" cy="12700"/>
+              <a:off x="4081399" y="2861500"/>
+              <a:ext cx="12700" cy="1027874"/>
             </a:xfrm>
             <a:prstGeom prst="rect">
               <a:avLst/>
@@ -13988,20 +14013,106 @@
         </p:sp>
         <p:sp>
           <p:nvSpPr>
-            <p:cNvPr id="5" name="Rule_03"/>
+            <p:cNvPr id="6" name="Line_旧"/>
             <p:cNvSpPr/>
             <p:nvPr/>
           </p:nvSpPr>
           <p:spPr>
             <a:xfrm>
-              <a:off x="457200" y="2235200"/>
-              <a:ext cx="3962400" cy="12700"/>
-            </a:xfrm>
-            <a:prstGeom prst="rect">
+              <a:off x="457200" y="1976755"/>
+              <a:ext cx="6731000" cy="1577340"/>
+            </a:xfrm>
+            <a:custGeom>
+              <a:avLst/>
+              <a:gdLst/>
+              <a:ahLst/>
+              <a:cxnLst/>
+              <a:rect l="0" t="0" r="r" b="b"/>
+              <a:pathLst>
+                <a:path w="6731000" h="1577340" fill="none">
+                  <a:moveTo>
+                    <a:pt x="0" y="0"/>
+                  </a:moveTo>
+                  <a:lnTo>
+                    <a:pt x="1649095" y="154305"/>
+                  </a:lnTo>
+                  <a:lnTo>
+                    <a:pt x="4193413" y="994410"/>
+                  </a:lnTo>
+                  <a:lnTo>
+                    <a:pt x="6731000" y="1577340"/>
+                  </a:lnTo>
+                </a:path>
+              </a:pathLst>
+            </a:custGeom>
+            <a:noFill/>
+            <a:ln w="25400" cap="flat">
+              <a:solidFill>
+                <a:schemeClr val="accent3"/>
+              </a:solidFill>
+              <a:miter lim="800000"/>
+            </a:ln>
+          </p:spPr>
+        </p:sp>
+        <p:sp>
+          <p:nvSpPr>
+            <p:cNvPr id="7" name="Line_新"/>
+            <p:cNvSpPr/>
+            <p:nvPr/>
+          </p:nvSpPr>
+          <p:spPr>
+            <a:xfrm>
+              <a:off x="457200" y="1908175"/>
+              <a:ext cx="6731000" cy="1628775"/>
+            </a:xfrm>
+            <a:custGeom>
+              <a:avLst/>
+              <a:gdLst/>
+              <a:ahLst/>
+              <a:cxnLst/>
+              <a:rect l="0" t="0" r="r" b="b"/>
+              <a:pathLst>
+                <a:path w="6731000" h="1628775" fill="none">
+                  <a:moveTo>
+                    <a:pt x="0" y="1628775"/>
+                  </a:moveTo>
+                  <a:lnTo>
+                    <a:pt x="2160651" y="1337310"/>
+                  </a:lnTo>
+                  <a:lnTo>
+                    <a:pt x="4570349" y="582930"/>
+                  </a:lnTo>
+                  <a:lnTo>
+                    <a:pt x="6731000" y="0"/>
+                  </a:lnTo>
+                </a:path>
+              </a:pathLst>
+            </a:custGeom>
+            <a:noFill/>
+            <a:ln w="31750" cap="flat">
+              <a:solidFill>
+                <a:schemeClr val="accent1"/>
+              </a:solidFill>
+              <a:miter lim="800000"/>
+            </a:ln>
+          </p:spPr>
+        </p:sp>
+        <p:sp>
+          <p:nvSpPr>
+            <p:cNvPr id="8" name="Dot_交点"/>
+            <p:cNvSpPr/>
+            <p:nvPr/>
+          </p:nvSpPr>
+          <p:spPr>
+            <a:xfrm>
+              <a:off x="4030599" y="2728150"/>
+              <a:ext cx="114300" cy="114300"/>
+            </a:xfrm>
+            <a:prstGeom prst="ellipse">
               <a:avLst/>
             </a:prstGeom>
             <a:solidFill>
-              <a:schemeClr val="accent5"/>
+              <a:schemeClr val="accent6"/>
             </a:solidFill>
             <a:ln>
               <a:noFill/>
@@ -14010,80 +14121,60 @@
         </p:sp>
         <p:sp>
           <p:nvSpPr>
-            <p:cNvPr id="6" name="Rule_04"/>
-            <p:cNvSpPr/>
-            <p:nvPr/>
-          </p:nvSpPr>
-          <p:spPr>
-            <a:xfrm>
-              <a:off x="4724400" y="2235200"/>
-              <a:ext cx="3962400" cy="12700"/>
-            </a:xfrm>
-            <a:prstGeom prst="rect">
-              <a:avLst/>
-            </a:prstGeom>
-            <a:solidFill>
-              <a:schemeClr val="accent5"/>
-            </a:solidFill>
-            <a:ln>
-              <a:noFill/>
-            </a:ln>
-          </p:spPr>
-        </p:sp>
-        <p:sp>
-          <p:nvSpPr>
-            <p:cNvPr id="7" name="Rule_05"/>
-            <p:cNvSpPr/>
-            <p:nvPr/>
-          </p:nvSpPr>
-          <p:spPr>
-            <a:xfrm>
-              <a:off x="457200" y="3505200"/>
-              <a:ext cx="3962400" cy="12700"/>
-            </a:xfrm>
-            <a:prstGeom prst="rect">
-              <a:avLst/>
-            </a:prstGeom>
-            <a:solidFill>
-              <a:schemeClr val="accent5"/>
-            </a:solidFill>
-            <a:ln>
-              <a:noFill/>
-            </a:ln>
-          </p:spPr>
-        </p:sp>
-        <p:sp>
-          <p:nvSpPr>
-            <p:cNvPr id="8" name="Rule_06"/>
-            <p:cNvSpPr/>
-            <p:nvPr/>
-          </p:nvSpPr>
-          <p:spPr>
-            <a:xfrm>
-              <a:off x="4724400" y="3505200"/>
-              <a:ext cx="3962400" cy="12700"/>
-            </a:xfrm>
-            <a:prstGeom prst="rect">
-              <a:avLst/>
-            </a:prstGeom>
-            <a:solidFill>
-              <a:schemeClr val="accent5"/>
-            </a:solidFill>
-            <a:ln>
-              <a:noFill/>
-            </a:ln>
-          </p:spPr>
-        </p:sp>
-        <p:sp>
-          <p:nvSpPr>
-            <p:cNvPr id="9" name="No_01"/>
+            <p:cNvPr id="9" name="Label_交点"/>
             <p:cNvSpPr txBox="1"/>
             <p:nvPr/>
           </p:nvSpPr>
           <p:spPr>
             <a:xfrm>
-              <a:off x="457200" y="1117600"/>
-              <a:ext cx="381000" cy="247650"/>
+              <a:off x="3389249" y="2277300"/>
+              <a:ext cx="1397000" cy="196850"/>
+            </a:xfrm>
+            <a:prstGeom prst="rect">
+              <a:avLst/>
+            </a:prstGeom>
+            <a:noFill/>
+          </p:spPr>
+          <p:txBody>
+            <a:bodyPr wrap="square" lIns="0" tIns="0" rIns="0" bIns="0" anchor="ctr">
+              <a:noAutofit/>
+            </a:bodyPr>
+            <a:lstStyle>
+              <a:lvl1pPr marL="0" indent="0" algn="ctr">
+                <a:lnSpc>
+                  <a:spcPts val="1540"/>
+                </a:lnSpc>
+                <a:spcBef>
+                  <a:spcPts val="0"/>
+                </a:spcBef>
+                <a:buNone/>
+                <a:defRPr sz="1100" b="0">
+                  <a:solidFill>
+                    <a:schemeClr val="accent6"/>
+                  </a:solidFill>
+                  <a:latin typeface="+mn-lt"/>
+                  <a:ea typeface="+mn-ea"/>
+                </a:defRPr>
+              </a:lvl1pPr>
+            </a:lstStyle>
+            <a:p>
+              <a:r>
+                <a:rPr lang="ja-JP"/>
+                <a:t>2023年に逆転</a:t>
+              </a:r>
+            </a:p>
+          </p:txBody>
+        </p:sp>
+        <p:sp>
+          <p:nvSpPr>
+            <p:cNvPr id="10" name="Label_旧"/>
+            <p:cNvSpPr txBox="1"/>
+            <p:nvPr/>
+          </p:nvSpPr>
+          <p:spPr>
+            <a:xfrm>
+              <a:off x="457200" y="1640205"/>
+              <a:ext cx="2032000" cy="247650"/>
             </a:xfrm>
             <a:prstGeom prst="rect">
               <a:avLst/>
@@ -14096,6 +14187,52 @@
             </a:bodyPr>
             <a:lstStyle>
               <a:lvl1pPr marL="0" indent="0" algn="l">
+                <a:lnSpc>
+                  <a:spcPts val="1960"/>
+                </a:lnSpc>
+                <a:spcBef>
+                  <a:spcPts val="0"/>
+                </a:spcBef>
+                <a:buNone/>
+                <a:defRPr sz="1400" b="0">
+                  <a:solidFill>
+                    <a:schemeClr val="tx2"/>
+                  </a:solidFill>
+                  <a:latin typeface="+mn-lt"/>
+                  <a:ea typeface="+mn-ea"/>
+                </a:defRPr>
+              </a:lvl1pPr>
+            </a:lstStyle>
+            <a:p>
+              <a:r>
+                <a:rPr lang="ja-JP"/>
+                <a:t>紙の申込書</a:t>
+              </a:r>
+            </a:p>
+          </p:txBody>
+        </p:sp>
+        <p:sp>
+          <p:nvSpPr>
+            <p:cNvPr id="11" name="Label_新"/>
+            <p:cNvSpPr txBox="1"/>
+            <p:nvPr/>
+          </p:nvSpPr>
+          <p:spPr>
+            <a:xfrm>
+              <a:off x="5156200" y="1571625"/>
+              <a:ext cx="2032000" cy="247650"/>
+            </a:xfrm>
+            <a:prstGeom prst="rect">
+              <a:avLst/>
+            </a:prstGeom>
+            <a:noFill/>
+          </p:spPr>
+          <p:txBody>
+            <a:bodyPr wrap="square" lIns="0" tIns="0" rIns="0" bIns="0" anchor="ctr">
+              <a:noAutofit/>
+            </a:bodyPr>
+            <a:lstStyle>
+              <a:lvl1pPr marL="0" indent="0" algn="r">
                 <a:lnSpc>
                   <a:spcPts val="1960"/>
                 </a:lnSpc>
@@ -14115,21 +14252,21 @@
             <a:p>
               <a:r>
                 <a:rPr lang="ja-JP"/>
-                <a:t>01</a:t>
+                <a:t>オンライン申込</a:t>
               </a:r>
             </a:p>
           </p:txBody>
         </p:sp>
         <p:sp>
           <p:nvSpPr>
-            <p:cNvPr id="10" name="No_02"/>
+            <p:cNvPr id="12" name="Axis_始"/>
             <p:cNvSpPr txBox="1"/>
             <p:nvPr/>
           </p:nvSpPr>
           <p:spPr>
             <a:xfrm>
-              <a:off x="4724400" y="1117600"/>
-              <a:ext cx="381000" cy="247650"/>
+              <a:off x="457200" y="3965575"/>
+              <a:ext cx="1270000" cy="139700"/>
             </a:xfrm>
             <a:prstGeom prst="rect">
               <a:avLst/>
@@ -14143,15 +14280,15 @@
             <a:lstStyle>
               <a:lvl1pPr marL="0" indent="0" algn="l">
                 <a:lnSpc>
-                  <a:spcPts val="1960"/>
+                  <a:spcPts val="1080"/>
                 </a:lnSpc>
                 <a:spcBef>
                   <a:spcPts val="0"/>
                 </a:spcBef>
                 <a:buNone/>
-                <a:defRPr sz="1400" b="0">
+                <a:defRPr sz="900" b="0">
                   <a:solidFill>
-                    <a:schemeClr val="accent1"/>
+                    <a:schemeClr val="tx2"/>
                   </a:solidFill>
                   <a:latin typeface="+mn-lt"/>
                   <a:ea typeface="+mn-ea"/>
@@ -14161,21 +14298,21 @@
             <a:p>
               <a:r>
                 <a:rPr lang="ja-JP"/>
-                <a:t>02</a:t>
+                <a:t>2021年</a:t>
               </a:r>
             </a:p>
           </p:txBody>
         </p:sp>
         <p:sp>
           <p:nvSpPr>
-            <p:cNvPr id="11" name="No_03"/>
+            <p:cNvPr id="13" name="Axis_交点"/>
             <p:cNvSpPr txBox="1"/>
             <p:nvPr/>
           </p:nvSpPr>
           <p:spPr>
             <a:xfrm>
-              <a:off x="457200" y="2387600"/>
-              <a:ext cx="381000" cy="247650"/>
+              <a:off x="3452749" y="3965575"/>
+              <a:ext cx="1270000" cy="139700"/>
             </a:xfrm>
             <a:prstGeom prst="rect">
               <a:avLst/>
@@ -14187,17 +14324,17 @@
               <a:noAutofit/>
             </a:bodyPr>
             <a:lstStyle>
-              <a:lvl1pPr marL="0" indent="0" algn="l">
+              <a:lvl1pPr marL="0" indent="0" algn="ctr">
                 <a:lnSpc>
-                  <a:spcPts val="1960"/>
+                  <a:spcPts val="1080"/>
                 </a:lnSpc>
                 <a:spcBef>
                   <a:spcPts val="0"/>
                 </a:spcBef>
                 <a:buNone/>
-                <a:defRPr sz="1400" b="0">
+                <a:defRPr sz="900" b="0">
                   <a:solidFill>
-                    <a:schemeClr val="accent1"/>
+                    <a:schemeClr val="accent6"/>
                   </a:solidFill>
                   <a:latin typeface="+mn-lt"/>
                   <a:ea typeface="+mn-ea"/>
@@ -14207,21 +14344,21 @@
             <a:p>
               <a:r>
                 <a:rPr lang="ja-JP"/>
-                <a:t>03</a:t>
+                <a:t>2023年</a:t>
               </a:r>
             </a:p>
           </p:txBody>
         </p:sp>
         <p:sp>
           <p:nvSpPr>
-            <p:cNvPr id="12" name="No_04"/>
+            <p:cNvPr id="14" name="Axis_終"/>
             <p:cNvSpPr txBox="1"/>
             <p:nvPr/>
           </p:nvSpPr>
           <p:spPr>
             <a:xfrm>
-              <a:off x="4724400" y="2387600"/>
-              <a:ext cx="381000" cy="247650"/>
+              <a:off x="5918200" y="3965575"/>
+              <a:ext cx="1270000" cy="139700"/>
             </a:xfrm>
             <a:prstGeom prst="rect">
               <a:avLst/>
@@ -14233,17 +14370,17 @@
               <a:noAutofit/>
             </a:bodyPr>
             <a:lstStyle>
-              <a:lvl1pPr marL="0" indent="0" algn="l">
+              <a:lvl1pPr marL="0" indent="0" algn="r">
                 <a:lnSpc>
-                  <a:spcPts val="1960"/>
+                  <a:spcPts val="1080"/>
                 </a:lnSpc>
                 <a:spcBef>
                   <a:spcPts val="0"/>
                 </a:spcBef>
                 <a:buNone/>
-                <a:defRPr sz="1400" b="0">
+                <a:defRPr sz="900" b="0">
                   <a:solidFill>
-                    <a:schemeClr val="accent1"/>
+                    <a:schemeClr val="tx2"/>
                   </a:solidFill>
                   <a:latin typeface="+mn-lt"/>
                   <a:ea typeface="+mn-ea"/>
@@ -14253,389 +14390,21 @@
             <a:p>
               <a:r>
                 <a:rPr lang="ja-JP"/>
-                <a:t>04</a:t>
+                <a:t>2025年</a:t>
               </a:r>
             </a:p>
           </p:txBody>
         </p:sp>
         <p:sp>
           <p:nvSpPr>
-            <p:cNvPr id="13" name="No_05"/>
+            <p:cNvPr id="15" name="Note"/>
             <p:cNvSpPr txBox="1"/>
             <p:nvPr/>
           </p:nvSpPr>
           <p:spPr>
             <a:xfrm>
-              <a:off x="457200" y="3657600"/>
-              <a:ext cx="381000" cy="247650"/>
-            </a:xfrm>
-            <a:prstGeom prst="rect">
-              <a:avLst/>
-            </a:prstGeom>
-            <a:noFill/>
-          </p:spPr>
-          <p:txBody>
-            <a:bodyPr wrap="square" lIns="0" tIns="0" rIns="0" bIns="0" anchor="ctr">
-              <a:noAutofit/>
-            </a:bodyPr>
-            <a:lstStyle>
-              <a:lvl1pPr marL="0" indent="0" algn="l">
-                <a:lnSpc>
-                  <a:spcPts val="1960"/>
-                </a:lnSpc>
-                <a:spcBef>
-                  <a:spcPts val="0"/>
-                </a:spcBef>
-                <a:buNone/>
-                <a:defRPr sz="1400" b="0">
-                  <a:solidFill>
-                    <a:schemeClr val="accent1"/>
-                  </a:solidFill>
-                  <a:latin typeface="+mn-lt"/>
-                  <a:ea typeface="+mn-ea"/>
-                </a:defRPr>
-              </a:lvl1pPr>
-            </a:lstStyle>
-            <a:p>
-              <a:r>
-                <a:rPr lang="ja-JP"/>
-                <a:t>05</a:t>
-              </a:r>
-            </a:p>
-          </p:txBody>
-        </p:sp>
-        <p:sp>
-          <p:nvSpPr>
-            <p:cNvPr id="14" name="No_06"/>
-            <p:cNvSpPr txBox="1"/>
-            <p:nvPr/>
-          </p:nvSpPr>
-          <p:spPr>
-            <a:xfrm>
-              <a:off x="4724400" y="3657600"/>
-              <a:ext cx="381000" cy="247650"/>
-            </a:xfrm>
-            <a:prstGeom prst="rect">
-              <a:avLst/>
-            </a:prstGeom>
-            <a:noFill/>
-          </p:spPr>
-          <p:txBody>
-            <a:bodyPr wrap="square" lIns="0" tIns="0" rIns="0" bIns="0" anchor="ctr">
-              <a:noAutofit/>
-            </a:bodyPr>
-            <a:lstStyle>
-              <a:lvl1pPr marL="0" indent="0" algn="l">
-                <a:lnSpc>
-                  <a:spcPts val="1960"/>
-                </a:lnSpc>
-                <a:spcBef>
-                  <a:spcPts val="0"/>
-                </a:spcBef>
-                <a:buNone/>
-                <a:defRPr sz="1400" b="0">
-                  <a:solidFill>
-                    <a:schemeClr val="accent1"/>
-                  </a:solidFill>
-                  <a:latin typeface="+mn-lt"/>
-                  <a:ea typeface="+mn-ea"/>
-                </a:defRPr>
-              </a:lvl1pPr>
-            </a:lstStyle>
-            <a:p>
-              <a:r>
-                <a:rPr lang="ja-JP"/>
-                <a:t>06</a:t>
-              </a:r>
-            </a:p>
-          </p:txBody>
-        </p:sp>
-        <p:sp>
-          <p:nvSpPr>
-            <p:cNvPr id="15" name="Title_01"/>
-            <p:cNvSpPr txBox="1"/>
-            <p:nvPr/>
-          </p:nvSpPr>
-          <p:spPr>
-            <a:xfrm>
-              <a:off x="914400" y="1079500"/>
-              <a:ext cx="2946400" cy="298450"/>
-            </a:xfrm>
-            <a:prstGeom prst="rect">
-              <a:avLst/>
-            </a:prstGeom>
-            <a:noFill/>
-          </p:spPr>
-          <p:txBody>
-            <a:bodyPr wrap="square" lIns="0" tIns="0" rIns="0" bIns="0" anchor="ctr">
-              <a:noAutofit/>
-            </a:bodyPr>
-            <a:lstStyle>
-              <a:lvl1pPr marL="0" indent="0" algn="l">
-                <a:lnSpc>
-                  <a:spcPts val="2340"/>
-                </a:lnSpc>
-                <a:spcBef>
-                  <a:spcPts val="0"/>
-                </a:spcBef>
-                <a:buNone/>
-                <a:defRPr sz="1800" b="1">
-                  <a:solidFill>
-                    <a:schemeClr val="tx1"/>
-                  </a:solidFill>
-                  <a:latin typeface="+mn-lt"/>
-                  <a:ea typeface="+mn-ea"/>
-                </a:defRPr>
-              </a:lvl1pPr>
-            </a:lstStyle>
-            <a:p>
-              <a:r>
-                <a:rPr lang="ja-JP"/>
-                <a:t>今月の読まれ方</a:t>
-              </a:r>
-            </a:p>
-          </p:txBody>
-        </p:sp>
-        <p:sp>
-          <p:nvSpPr>
-            <p:cNvPr id="16" name="Title_02"/>
-            <p:cNvSpPr txBox="1"/>
-            <p:nvPr/>
-          </p:nvSpPr>
-          <p:spPr>
-            <a:xfrm>
-              <a:off x="5181600" y="1079500"/>
-              <a:ext cx="2946400" cy="298450"/>
-            </a:xfrm>
-            <a:prstGeom prst="rect">
-              <a:avLst/>
-            </a:prstGeom>
-            <a:noFill/>
-          </p:spPr>
-          <p:txBody>
-            <a:bodyPr wrap="square" lIns="0" tIns="0" rIns="0" bIns="0" anchor="ctr">
-              <a:noAutofit/>
-            </a:bodyPr>
-            <a:lstStyle>
-              <a:lvl1pPr marL="0" indent="0" algn="l">
-                <a:lnSpc>
-                  <a:spcPts val="2340"/>
-                </a:lnSpc>
-                <a:spcBef>
-                  <a:spcPts val="0"/>
-                </a:spcBef>
-                <a:buNone/>
-                <a:defRPr sz="1800" b="1">
-                  <a:solidFill>
-                    <a:schemeClr val="tx1"/>
-                  </a:solidFill>
-                  <a:latin typeface="+mn-lt"/>
-                  <a:ea typeface="+mn-ea"/>
-                </a:defRPr>
-              </a:lvl1pPr>
-            </a:lstStyle>
-            <a:p>
-              <a:r>
-                <a:rPr lang="ja-JP"/>
-                <a:t>記事ごとの成績</a:t>
-              </a:r>
-            </a:p>
-          </p:txBody>
-        </p:sp>
-        <p:sp>
-          <p:nvSpPr>
-            <p:cNvPr id="17" name="Title_03"/>
-            <p:cNvSpPr txBox="1"/>
-            <p:nvPr/>
-          </p:nvSpPr>
-          <p:spPr>
-            <a:xfrm>
-              <a:off x="914400" y="2349500"/>
-              <a:ext cx="2946400" cy="298450"/>
-            </a:xfrm>
-            <a:prstGeom prst="rect">
-              <a:avLst/>
-            </a:prstGeom>
-            <a:noFill/>
-          </p:spPr>
-          <p:txBody>
-            <a:bodyPr wrap="square" lIns="0" tIns="0" rIns="0" bIns="0" anchor="ctr">
-              <a:noAutofit/>
-            </a:bodyPr>
-            <a:lstStyle>
-              <a:lvl1pPr marL="0" indent="0" algn="l">
-                <a:lnSpc>
-                  <a:spcPts val="2340"/>
-                </a:lnSpc>
-                <a:spcBef>
-                  <a:spcPts val="0"/>
-                </a:spcBef>
-                <a:buNone/>
-                <a:defRPr sz="1800" b="1">
-                  <a:solidFill>
-                    <a:schemeClr val="tx1"/>
-                  </a:solidFill>
-                  <a:latin typeface="+mn-lt"/>
-                  <a:ea typeface="+mn-ea"/>
-                </a:defRPr>
-              </a:lvl1pPr>
-            </a:lstStyle>
-            <a:p>
-              <a:r>
-                <a:rPr lang="ja-JP"/>
-                <a:t>流入元の変化</a:t>
-              </a:r>
-            </a:p>
-          </p:txBody>
-        </p:sp>
-        <p:sp>
-          <p:nvSpPr>
-            <p:cNvPr id="18" name="Title_04"/>
-            <p:cNvSpPr txBox="1"/>
-            <p:nvPr/>
-          </p:nvSpPr>
-          <p:spPr>
-            <a:xfrm>
-              <a:off x="5181600" y="2349500"/>
-              <a:ext cx="2946400" cy="298450"/>
-            </a:xfrm>
-            <a:prstGeom prst="rect">
-              <a:avLst/>
-            </a:prstGeom>
-            <a:noFill/>
-          </p:spPr>
-          <p:txBody>
-            <a:bodyPr wrap="square" lIns="0" tIns="0" rIns="0" bIns="0" anchor="ctr">
-              <a:noAutofit/>
-            </a:bodyPr>
-            <a:lstStyle>
-              <a:lvl1pPr marL="0" indent="0" algn="l">
-                <a:lnSpc>
-                  <a:spcPts val="2340"/>
-                </a:lnSpc>
-                <a:spcBef>
-                  <a:spcPts val="0"/>
-                </a:spcBef>
-                <a:buNone/>
-                <a:defRPr sz="1800" b="1">
-                  <a:solidFill>
-                    <a:schemeClr val="tx1"/>
-                  </a:solidFill>
-                  <a:latin typeface="+mn-lt"/>
-                  <a:ea typeface="+mn-ea"/>
-                </a:defRPr>
-              </a:lvl1pPr>
-            </a:lstStyle>
-            <a:p>
-              <a:r>
-                <a:rPr lang="ja-JP"/>
-                <a:t>うまくいった型</a:t>
-              </a:r>
-            </a:p>
-          </p:txBody>
-        </p:sp>
-        <p:sp>
-          <p:nvSpPr>
-            <p:cNvPr id="19" name="Title_05"/>
-            <p:cNvSpPr txBox="1"/>
-            <p:nvPr/>
-          </p:nvSpPr>
-          <p:spPr>
-            <a:xfrm>
-              <a:off x="914400" y="3619500"/>
-              <a:ext cx="2946400" cy="298450"/>
-            </a:xfrm>
-            <a:prstGeom prst="rect">
-              <a:avLst/>
-            </a:prstGeom>
-            <a:noFill/>
-          </p:spPr>
-          <p:txBody>
-            <a:bodyPr wrap="square" lIns="0" tIns="0" rIns="0" bIns="0" anchor="ctr">
-              <a:noAutofit/>
-            </a:bodyPr>
-            <a:lstStyle>
-              <a:lvl1pPr marL="0" indent="0" algn="l">
-                <a:lnSpc>
-                  <a:spcPts val="2340"/>
-                </a:lnSpc>
-                <a:spcBef>
-                  <a:spcPts val="0"/>
-                </a:spcBef>
-                <a:buNone/>
-                <a:defRPr sz="1800" b="1">
-                  <a:solidFill>
-                    <a:schemeClr val="tx1"/>
-                  </a:solidFill>
-                  <a:latin typeface="+mn-lt"/>
-                  <a:ea typeface="+mn-ea"/>
-                </a:defRPr>
-              </a:lvl1pPr>
-            </a:lstStyle>
-            <a:p>
-              <a:r>
-                <a:rPr lang="ja-JP"/>
-                <a:t>次の一手</a:t>
-              </a:r>
-            </a:p>
-          </p:txBody>
-        </p:sp>
-        <p:sp>
-          <p:nvSpPr>
-            <p:cNvPr id="20" name="Title_06"/>
-            <p:cNvSpPr txBox="1"/>
-            <p:nvPr/>
-          </p:nvSpPr>
-          <p:spPr>
-            <a:xfrm>
-              <a:off x="5181600" y="3619500"/>
-              <a:ext cx="2946400" cy="298450"/>
-            </a:xfrm>
-            <a:prstGeom prst="rect">
-              <a:avLst/>
-            </a:prstGeom>
-            <a:noFill/>
-          </p:spPr>
-          <p:txBody>
-            <a:bodyPr wrap="square" lIns="0" tIns="0" rIns="0" bIns="0" anchor="ctr">
-              <a:noAutofit/>
-            </a:bodyPr>
-            <a:lstStyle>
-              <a:lvl1pPr marL="0" indent="0" algn="l">
-                <a:lnSpc>
-                  <a:spcPts val="2340"/>
-                </a:lnSpc>
-                <a:spcBef>
-                  <a:spcPts val="0"/>
-                </a:spcBef>
-                <a:buNone/>
-                <a:defRPr sz="1800" b="1">
-                  <a:solidFill>
-                    <a:schemeClr val="tx1"/>
-                  </a:solidFill>
-                  <a:latin typeface="+mn-lt"/>
-                  <a:ea typeface="+mn-ea"/>
-                </a:defRPr>
-              </a:lvl1pPr>
-            </a:lstStyle>
-            <a:p>
-              <a:r>
-                <a:rPr lang="ja-JP"/>
-                <a:t>付録</a:t>
-              </a:r>
-            </a:p>
-          </p:txBody>
-        </p:sp>
-        <p:sp>
-          <p:nvSpPr>
-            <p:cNvPr id="21" name="Sub_01"/>
-            <p:cNvSpPr txBox="1"/>
-            <p:nvPr/>
-          </p:nvSpPr>
-          <p:spPr>
-            <a:xfrm>
-              <a:off x="914400" y="1409700"/>
-              <a:ext cx="2946400" cy="196850"/>
+              <a:off x="457200" y="4219575"/>
+              <a:ext cx="6985000" cy="196850"/>
             </a:xfrm>
             <a:prstGeom prst="rect">
               <a:avLst/>
@@ -14667,21 +14436,585 @@
             <a:p>
               <a:r>
                 <a:rPr lang="ja-JP"/>
-                <a:t>PV・スキ・フォロワー</a:t>
+                <a:t>※ 各年の実数があるなら折れ線グラフで作る。これは数字が無く「逆転した」ことだけを言う図</a:t>
               </a:r>
             </a:p>
           </p:txBody>
         </p:sp>
-        <p:sp>
-          <p:nvSpPr>
-            <p:cNvPr id="22" name="Sub_02"/>
+      </p:grpSp>
+      <p:sp>
+        <p:nvSpPr>
+          <p:cNvPr id="17" name="SlideNumber"/>
+          <p:cNvSpPr>
+            <a:spLocks noGrp="1"/>
+          </p:cNvSpPr>
+          <p:nvPr>
+            <p:ph type="sldNum" idx="12" sz="quarter"/>
+          </p:nvPr>
+        </p:nvSpPr>
+        <p:spPr/>
+        <p:txBody>
+          <a:bodyPr/>
+          <a:lstStyle/>
+          <a:p>
+            <a:fld id="{B6F15528-21DE-4FAA-801E-634DDDAF4B2B}" type="slidenum">
+              <a:rPr lang="ja-JP"/>
+              <a:t>‹#›</a:t>
+            </a:fld>
+          </a:p>
+        </p:txBody>
+      </p:sp>
+    </p:spTree>
+  </p:cSld>
+  <p:clrMapOvr>
+    <a:masterClrMapping/>
+  </p:clrMapOvr>
+</p:sld>
+</file>
+
+<file path=ppt/slides/slide23.xml><?xml version="1.0" encoding="utf-8"?>
+<p:sld xmlns:a="http://schemas.openxmlformats.org/drawingml/2006/main" xmlns:r="http://schemas.openxmlformats.org/officeDocument/2006/relationships" xmlns:p="http://schemas.openxmlformats.org/presentationml/2006/main">
+  <p:cSld>
+    <p:spTree>
+      <p:nvGrpSpPr>
+        <p:cNvPr id="1" name=""/>
+        <p:cNvGrpSpPr/>
+        <p:nvPr/>
+      </p:nvGrpSpPr>
+      <p:grpSpPr>
+        <a:xfrm>
+          <a:off x="0" y="0"/>
+          <a:ext cx="0" cy="0"/>
+          <a:chOff x="0" y="0"/>
+          <a:chExt cx="0" cy="0"/>
+        </a:xfrm>
+      </p:grpSpPr>
+      <p:sp>
+        <p:nvSpPr>
+          <p:cNvPr id="2" name="Title"/>
+          <p:cNvSpPr>
+            <a:spLocks noGrp="1"/>
+          </p:cNvSpPr>
+          <p:nvPr>
+            <p:ph type="title"/>
+          </p:nvPr>
+        </p:nvSpPr>
+        <p:spPr/>
+        <p:txBody>
+          <a:bodyPr/>
+          <a:lstStyle/>
+          <a:p>
+            <a:r>
+              <a:rPr lang="ja-JP"/>
+              <a:t>打ち手が頭打ちになった理由</a:t>
+            </a:r>
+          </a:p>
+        </p:txBody>
+      </p:sp>
+      <p:sp>
+        <p:nvSpPr>
+          <p:cNvPr id="3" name="Lead"/>
+          <p:cNvSpPr>
+            <a:spLocks noGrp="1"/>
+          </p:cNvSpPr>
+          <p:nvPr>
+            <p:ph type="body" idx="13" sz="quarter"/>
+          </p:nvPr>
+        </p:nvSpPr>
+        <p:spPr/>
+        <p:txBody>
+          <a:bodyPr/>
+          <a:lstStyle/>
+          <a:p>
+            <a:r>
+              <a:rPr lang="ja-JP"/>
+              <a:t>対応を速くしても、1日の上限は動かない</a:t>
+            </a:r>
+          </a:p>
+        </p:txBody>
+      </p:sp>
+      <p:grpSp>
+        <p:nvGrpSpPr>
+          <p:cNvPr id="33" name="organism/O-B25 壁（進行が止まる）"/>
+          <p:cNvGrpSpPr/>
+          <p:nvPr/>
+        </p:nvGrpSpPr>
+        <p:grpSpPr>
+          <a:xfrm>
+            <a:off x="457200" y="1600200"/>
+            <a:ext cx="8229600" cy="2794000"/>
+            <a:chOff x="457200" y="1600200"/>
+            <a:chExt cx="8229600" cy="2794000"/>
+          </a:xfrm>
+        </p:grpSpPr>
+        <p:sp>
+          <p:nvSpPr>
+            <p:cNvPr id="4" name="Pill_1"/>
+            <p:cNvSpPr/>
+            <p:nvPr/>
+          </p:nvSpPr>
+          <p:spPr>
+            <a:xfrm>
+              <a:off x="457200" y="2057400"/>
+              <a:ext cx="2667000" cy="482600"/>
+            </a:xfrm>
+            <a:prstGeom prst="rect">
+              <a:avLst/>
+            </a:prstGeom>
+            <a:solidFill>
+              <a:schemeClr val="bg2"/>
+            </a:solidFill>
+            <a:ln>
+              <a:noFill/>
+            </a:ln>
+          </p:spPr>
+        </p:sp>
+        <p:sp>
+          <p:nvSpPr>
+            <p:cNvPr id="5" name="PillText_1"/>
             <p:cNvSpPr txBox="1"/>
             <p:nvPr/>
           </p:nvSpPr>
           <p:spPr>
             <a:xfrm>
-              <a:off x="5181600" y="1409700"/>
-              <a:ext cx="2946400" cy="196850"/>
+              <a:off x="609600" y="2174875"/>
+              <a:ext cx="2159000" cy="247650"/>
+            </a:xfrm>
+            <a:prstGeom prst="rect">
+              <a:avLst/>
+            </a:prstGeom>
+            <a:noFill/>
+          </p:spPr>
+          <p:txBody>
+            <a:bodyPr wrap="square" lIns="0" tIns="0" rIns="0" bIns="0" anchor="ctr">
+              <a:noAutofit/>
+            </a:bodyPr>
+            <a:lstStyle>
+              <a:lvl1pPr marL="0" indent="0" algn="l">
+                <a:lnSpc>
+                  <a:spcPts val="1960"/>
+                </a:lnSpc>
+                <a:spcBef>
+                  <a:spcPts val="0"/>
+                </a:spcBef>
+                <a:buNone/>
+                <a:defRPr sz="1400" b="0">
+                  <a:solidFill>
+                    <a:schemeClr val="tx1"/>
+                  </a:solidFill>
+                  <a:latin typeface="+mn-lt"/>
+                  <a:ea typeface="+mn-ea"/>
+                </a:defRPr>
+              </a:lvl1pPr>
+            </a:lstStyle>
+            <a:p>
+              <a:r>
+                <a:rPr lang="ja-JP"/>
+                <a:t>問い合わせの自動返信</a:t>
+              </a:r>
+            </a:p>
+          </p:txBody>
+        </p:sp>
+        <p:sp>
+          <p:nvSpPr>
+            <p:cNvPr id="6" name="Arrow_1"/>
+            <p:cNvSpPr txBox="1"/>
+            <p:nvPr/>
+          </p:nvSpPr>
+          <p:spPr>
+            <a:xfrm>
+              <a:off x="3378200" y="2149475"/>
+              <a:ext cx="381000" cy="298450"/>
+            </a:xfrm>
+            <a:prstGeom prst="rect">
+              <a:avLst/>
+            </a:prstGeom>
+            <a:noFill/>
+          </p:spPr>
+          <p:txBody>
+            <a:bodyPr wrap="square" lIns="0" tIns="0" rIns="0" bIns="0" anchor="ctr">
+              <a:noAutofit/>
+            </a:bodyPr>
+            <a:lstStyle>
+              <a:lvl1pPr marL="0" indent="0" algn="ctr">
+                <a:lnSpc>
+                  <a:spcPts val="2340"/>
+                </a:lnSpc>
+                <a:spcBef>
+                  <a:spcPts val="0"/>
+                </a:spcBef>
+                <a:buNone/>
+                <a:defRPr sz="1800" b="1">
+                  <a:solidFill>
+                    <a:schemeClr val="accent1"/>
+                  </a:solidFill>
+                  <a:latin typeface="+mn-lt"/>
+                  <a:ea typeface="+mn-ea"/>
+                </a:defRPr>
+              </a:lvl1pPr>
+            </a:lstStyle>
+            <a:p>
+              <a:r>
+                <a:rPr lang="ja-JP"/>
+                <a:t>→</a:t>
+              </a:r>
+            </a:p>
+          </p:txBody>
+        </p:sp>
+        <p:sp>
+          <p:nvSpPr>
+            <p:cNvPr id="7" name="Pill_2"/>
+            <p:cNvSpPr/>
+            <p:nvPr/>
+          </p:nvSpPr>
+          <p:spPr>
+            <a:xfrm>
+              <a:off x="457200" y="2755900"/>
+              <a:ext cx="2667000" cy="482600"/>
+            </a:xfrm>
+            <a:prstGeom prst="rect">
+              <a:avLst/>
+            </a:prstGeom>
+            <a:solidFill>
+              <a:schemeClr val="bg2"/>
+            </a:solidFill>
+            <a:ln>
+              <a:noFill/>
+            </a:ln>
+          </p:spPr>
+        </p:sp>
+        <p:sp>
+          <p:nvSpPr>
+            <p:cNvPr id="8" name="PillText_2"/>
+            <p:cNvSpPr txBox="1"/>
+            <p:nvPr/>
+          </p:nvSpPr>
+          <p:spPr>
+            <a:xfrm>
+              <a:off x="609600" y="2873375"/>
+              <a:ext cx="2159000" cy="247650"/>
+            </a:xfrm>
+            <a:prstGeom prst="rect">
+              <a:avLst/>
+            </a:prstGeom>
+            <a:noFill/>
+          </p:spPr>
+          <p:txBody>
+            <a:bodyPr wrap="square" lIns="0" tIns="0" rIns="0" bIns="0" anchor="ctr">
+              <a:noAutofit/>
+            </a:bodyPr>
+            <a:lstStyle>
+              <a:lvl1pPr marL="0" indent="0" algn="l">
+                <a:lnSpc>
+                  <a:spcPts val="1960"/>
+                </a:lnSpc>
+                <a:spcBef>
+                  <a:spcPts val="0"/>
+                </a:spcBef>
+                <a:buNone/>
+                <a:defRPr sz="1400" b="0">
+                  <a:solidFill>
+                    <a:schemeClr val="tx1"/>
+                  </a:solidFill>
+                  <a:latin typeface="+mn-lt"/>
+                  <a:ea typeface="+mn-ea"/>
+                </a:defRPr>
+              </a:lvl1pPr>
+            </a:lstStyle>
+            <a:p>
+              <a:r>
+                <a:rPr lang="ja-JP"/>
+                <a:t>テンプレートの整備</a:t>
+              </a:r>
+            </a:p>
+          </p:txBody>
+        </p:sp>
+        <p:sp>
+          <p:nvSpPr>
+            <p:cNvPr id="9" name="Arrow_2"/>
+            <p:cNvSpPr txBox="1"/>
+            <p:nvPr/>
+          </p:nvSpPr>
+          <p:spPr>
+            <a:xfrm>
+              <a:off x="3378200" y="2847975"/>
+              <a:ext cx="381000" cy="298450"/>
+            </a:xfrm>
+            <a:prstGeom prst="rect">
+              <a:avLst/>
+            </a:prstGeom>
+            <a:noFill/>
+          </p:spPr>
+          <p:txBody>
+            <a:bodyPr wrap="square" lIns="0" tIns="0" rIns="0" bIns="0" anchor="ctr">
+              <a:noAutofit/>
+            </a:bodyPr>
+            <a:lstStyle>
+              <a:lvl1pPr marL="0" indent="0" algn="ctr">
+                <a:lnSpc>
+                  <a:spcPts val="2340"/>
+                </a:lnSpc>
+                <a:spcBef>
+                  <a:spcPts val="0"/>
+                </a:spcBef>
+                <a:buNone/>
+                <a:defRPr sz="1800" b="1">
+                  <a:solidFill>
+                    <a:schemeClr val="accent1"/>
+                  </a:solidFill>
+                  <a:latin typeface="+mn-lt"/>
+                  <a:ea typeface="+mn-ea"/>
+                </a:defRPr>
+              </a:lvl1pPr>
+            </a:lstStyle>
+            <a:p>
+              <a:r>
+                <a:rPr lang="ja-JP"/>
+                <a:t>→</a:t>
+              </a:r>
+            </a:p>
+          </p:txBody>
+        </p:sp>
+        <p:sp>
+          <p:nvSpPr>
+            <p:cNvPr id="10" name="Pill_3"/>
+            <p:cNvSpPr/>
+            <p:nvPr/>
+          </p:nvSpPr>
+          <p:spPr>
+            <a:xfrm>
+              <a:off x="457200" y="3454400"/>
+              <a:ext cx="2667000" cy="482600"/>
+            </a:xfrm>
+            <a:prstGeom prst="rect">
+              <a:avLst/>
+            </a:prstGeom>
+            <a:solidFill>
+              <a:schemeClr val="bg2"/>
+            </a:solidFill>
+            <a:ln>
+              <a:noFill/>
+            </a:ln>
+          </p:spPr>
+        </p:sp>
+        <p:sp>
+          <p:nvSpPr>
+            <p:cNvPr id="11" name="PillText_3"/>
+            <p:cNvSpPr txBox="1"/>
+            <p:nvPr/>
+          </p:nvSpPr>
+          <p:spPr>
+            <a:xfrm>
+              <a:off x="609600" y="3571875"/>
+              <a:ext cx="2159000" cy="247650"/>
+            </a:xfrm>
+            <a:prstGeom prst="rect">
+              <a:avLst/>
+            </a:prstGeom>
+            <a:noFill/>
+          </p:spPr>
+          <p:txBody>
+            <a:bodyPr wrap="square" lIns="0" tIns="0" rIns="0" bIns="0" anchor="ctr">
+              <a:noAutofit/>
+            </a:bodyPr>
+            <a:lstStyle>
+              <a:lvl1pPr marL="0" indent="0" algn="l">
+                <a:lnSpc>
+                  <a:spcPts val="1960"/>
+                </a:lnSpc>
+                <a:spcBef>
+                  <a:spcPts val="0"/>
+                </a:spcBef>
+                <a:buNone/>
+                <a:defRPr sz="1400" b="0">
+                  <a:solidFill>
+                    <a:schemeClr val="tx1"/>
+                  </a:solidFill>
+                  <a:latin typeface="+mn-lt"/>
+                  <a:ea typeface="+mn-ea"/>
+                </a:defRPr>
+              </a:lvl1pPr>
+            </a:lstStyle>
+            <a:p>
+              <a:r>
+                <a:rPr lang="ja-JP"/>
+                <a:t>担当者を増やす</a:t>
+              </a:r>
+            </a:p>
+          </p:txBody>
+        </p:sp>
+        <p:sp>
+          <p:nvSpPr>
+            <p:cNvPr id="12" name="Arrow_3"/>
+            <p:cNvSpPr txBox="1"/>
+            <p:nvPr/>
+          </p:nvSpPr>
+          <p:spPr>
+            <a:xfrm>
+              <a:off x="3378200" y="3546475"/>
+              <a:ext cx="381000" cy="298450"/>
+            </a:xfrm>
+            <a:prstGeom prst="rect">
+              <a:avLst/>
+            </a:prstGeom>
+            <a:noFill/>
+          </p:spPr>
+          <p:txBody>
+            <a:bodyPr wrap="square" lIns="0" tIns="0" rIns="0" bIns="0" anchor="ctr">
+              <a:noAutofit/>
+            </a:bodyPr>
+            <a:lstStyle>
+              <a:lvl1pPr marL="0" indent="0" algn="ctr">
+                <a:lnSpc>
+                  <a:spcPts val="2340"/>
+                </a:lnSpc>
+                <a:spcBef>
+                  <a:spcPts val="0"/>
+                </a:spcBef>
+                <a:buNone/>
+                <a:defRPr sz="1800" b="1">
+                  <a:solidFill>
+                    <a:schemeClr val="accent1"/>
+                  </a:solidFill>
+                  <a:latin typeface="+mn-lt"/>
+                  <a:ea typeface="+mn-ea"/>
+                </a:defRPr>
+              </a:lvl1pPr>
+            </a:lstStyle>
+            <a:p>
+              <a:r>
+                <a:rPr lang="ja-JP"/>
+                <a:t>→</a:t>
+              </a:r>
+            </a:p>
+          </p:txBody>
+        </p:sp>
+        <p:sp>
+          <p:nvSpPr>
+            <p:cNvPr id="13" name="WallLabel"/>
+            <p:cNvSpPr txBox="1"/>
+            <p:nvPr/>
+          </p:nvSpPr>
+          <p:spPr>
+            <a:xfrm>
+              <a:off x="4013200" y="1733550"/>
+              <a:ext cx="1905000" cy="247650"/>
+            </a:xfrm>
+            <a:prstGeom prst="rect">
+              <a:avLst/>
+            </a:prstGeom>
+            <a:noFill/>
+          </p:spPr>
+          <p:txBody>
+            <a:bodyPr wrap="square" lIns="0" tIns="0" rIns="0" bIns="0" anchor="ctr">
+              <a:noAutofit/>
+            </a:bodyPr>
+            <a:lstStyle>
+              <a:lvl1pPr marL="0" indent="0" algn="l">
+                <a:lnSpc>
+                  <a:spcPts val="1960"/>
+                </a:lnSpc>
+                <a:spcBef>
+                  <a:spcPts val="0"/>
+                </a:spcBef>
+                <a:buNone/>
+                <a:defRPr sz="1400" b="0">
+                  <a:solidFill>
+                    <a:schemeClr val="tx2"/>
+                  </a:solidFill>
+                  <a:latin typeface="+mn-lt"/>
+                  <a:ea typeface="+mn-ea"/>
+                </a:defRPr>
+              </a:lvl1pPr>
+            </a:lstStyle>
+            <a:p>
+              <a:r>
+                <a:rPr lang="ja-JP"/>
+                <a:t>1日の対応件数の上限</a:t>
+              </a:r>
+            </a:p>
+          </p:txBody>
+        </p:sp>
+        <p:sp>
+          <p:nvSpPr>
+            <p:cNvPr id="14" name="Beyond_card"/>
+            <p:cNvSpPr/>
+            <p:nvPr/>
+          </p:nvSpPr>
+          <p:spPr>
+            <a:xfrm>
+              <a:off x="5283200" y="2489200"/>
+              <a:ext cx="2667000" cy="1016000"/>
+            </a:xfrm>
+            <a:prstGeom prst="rect">
+              <a:avLst/>
+            </a:prstGeom>
+            <a:solidFill>
+              <a:schemeClr val="bg2">
+                <a:alpha val="45000"/>
+              </a:schemeClr>
+            </a:solidFill>
+            <a:ln>
+              <a:noFill/>
+            </a:ln>
+          </p:spPr>
+        </p:sp>
+        <p:sp>
+          <p:nvSpPr>
+            <p:cNvPr id="15" name="Beyond"/>
+            <p:cNvSpPr txBox="1"/>
+            <p:nvPr/>
+          </p:nvSpPr>
+          <p:spPr>
+            <a:xfrm>
+              <a:off x="5435600" y="2873375"/>
+              <a:ext cx="2362200" cy="247650"/>
+            </a:xfrm>
+            <a:prstGeom prst="rect">
+              <a:avLst/>
+            </a:prstGeom>
+            <a:noFill/>
+          </p:spPr>
+          <p:txBody>
+            <a:bodyPr wrap="square" lIns="0" tIns="0" rIns="0" bIns="0" anchor="ctr">
+              <a:noAutofit/>
+            </a:bodyPr>
+            <a:lstStyle>
+              <a:lvl1pPr marL="0" indent="0" algn="l">
+                <a:lnSpc>
+                  <a:spcPts val="1960"/>
+                </a:lnSpc>
+                <a:spcBef>
+                  <a:spcPts val="0"/>
+                </a:spcBef>
+                <a:buNone/>
+                <a:defRPr sz="1400" b="0">
+                  <a:solidFill>
+                    <a:schemeClr val="tx2"/>
+                  </a:solidFill>
+                  <a:latin typeface="+mn-lt"/>
+                  <a:ea typeface="+mn-ea"/>
+                </a:defRPr>
+              </a:lvl1pPr>
+            </a:lstStyle>
+            <a:p>
+              <a:r>
+                <a:rPr lang="ja-JP"/>
+                <a:t>問い合わせを減らす</a:t>
+              </a:r>
+            </a:p>
+          </p:txBody>
+        </p:sp>
+        <p:sp>
+          <p:nvSpPr>
+            <p:cNvPr id="16" name="Note"/>
+            <p:cNvSpPr txBox="1"/>
+            <p:nvPr/>
+          </p:nvSpPr>
+          <p:spPr>
+            <a:xfrm>
+              <a:off x="457200" y="4140200"/>
+              <a:ext cx="5715000" cy="196850"/>
             </a:xfrm>
             <a:prstGeom prst="rect">
               <a:avLst/>
@@ -14713,470 +15046,362 @@
             <a:p>
               <a:r>
                 <a:rPr lang="ja-JP"/>
-                <a:t>連載 #1〜#4 の比較</a:t>
+                <a:t>※ 壁の向こう側は薄く見せる（届かなかった対象）</a:t>
               </a:r>
             </a:p>
           </p:txBody>
         </p:sp>
         <p:sp>
           <p:nvSpPr>
-            <p:cNvPr id="23" name="Sub_03"/>
-            <p:cNvSpPr txBox="1"/>
-            <p:nvPr/>
-          </p:nvSpPr>
-          <p:spPr>
-            <a:xfrm>
-              <a:off x="914400" y="2679700"/>
-              <a:ext cx="2946400" cy="196850"/>
-            </a:xfrm>
-            <a:prstGeom prst="rect">
-              <a:avLst/>
-            </a:prstGeom>
-            <a:noFill/>
-          </p:spPr>
-          <p:txBody>
-            <a:bodyPr wrap="square" lIns="0" tIns="0" rIns="0" bIns="0" anchor="ctr">
-              <a:noAutofit/>
-            </a:bodyPr>
-            <a:lstStyle>
-              <a:lvl1pPr marL="0" indent="0" algn="l">
-                <a:lnSpc>
-                  <a:spcPts val="1540"/>
-                </a:lnSpc>
-                <a:spcBef>
-                  <a:spcPts val="0"/>
-                </a:spcBef>
-                <a:buNone/>
-                <a:defRPr sz="1100" b="0">
-                  <a:solidFill>
-                    <a:schemeClr val="tx2"/>
-                  </a:solidFill>
-                  <a:latin typeface="+mn-lt"/>
-                  <a:ea typeface="+mn-ea"/>
-                </a:defRPr>
-              </a:lvl1pPr>
-            </a:lstStyle>
-            <a:p>
-              <a:r>
-                <a:rPr lang="ja-JP"/>
-                <a:t>検索が全体の 58%</a:t>
-              </a:r>
-            </a:p>
-          </p:txBody>
-        </p:sp>
-        <p:sp>
-          <p:nvSpPr>
-            <p:cNvPr id="24" name="Sub_04"/>
-            <p:cNvSpPr txBox="1"/>
-            <p:nvPr/>
-          </p:nvSpPr>
-          <p:spPr>
-            <a:xfrm>
-              <a:off x="5181600" y="2679700"/>
-              <a:ext cx="2946400" cy="196850"/>
-            </a:xfrm>
-            <a:prstGeom prst="rect">
-              <a:avLst/>
-            </a:prstGeom>
-            <a:noFill/>
-          </p:spPr>
-          <p:txBody>
-            <a:bodyPr wrap="square" lIns="0" tIns="0" rIns="0" bIns="0" anchor="ctr">
-              <a:noAutofit/>
-            </a:bodyPr>
-            <a:lstStyle>
-              <a:lvl1pPr marL="0" indent="0" algn="l">
-                <a:lnSpc>
-                  <a:spcPts val="1540"/>
-                </a:lnSpc>
-                <a:spcBef>
-                  <a:spcPts val="0"/>
-                </a:spcBef>
-                <a:buNone/>
-                <a:defRPr sz="1100" b="0">
-                  <a:solidFill>
-                    <a:schemeClr val="tx2"/>
-                  </a:solidFill>
-                  <a:latin typeface="+mn-lt"/>
-                  <a:ea typeface="+mn-ea"/>
-                </a:defRPr>
-              </a:lvl1pPr>
-            </a:lstStyle>
-            <a:p>
-              <a:r>
-                <a:rPr lang="ja-JP"/>
-                <a:t>一次情報 × 図解</a:t>
-              </a:r>
-            </a:p>
-          </p:txBody>
-        </p:sp>
-        <p:sp>
-          <p:nvSpPr>
-            <p:cNvPr id="25" name="Sub_05"/>
-            <p:cNvSpPr txBox="1"/>
-            <p:nvPr/>
-          </p:nvSpPr>
-          <p:spPr>
-            <a:xfrm>
-              <a:off x="914400" y="3949700"/>
-              <a:ext cx="2946400" cy="196850"/>
-            </a:xfrm>
-            <a:prstGeom prst="rect">
-              <a:avLst/>
-            </a:prstGeom>
-            <a:noFill/>
-          </p:spPr>
-          <p:txBody>
-            <a:bodyPr wrap="square" lIns="0" tIns="0" rIns="0" bIns="0" anchor="ctr">
-              <a:noAutofit/>
-            </a:bodyPr>
-            <a:lstStyle>
-              <a:lvl1pPr marL="0" indent="0" algn="l">
-                <a:lnSpc>
-                  <a:spcPts val="1540"/>
-                </a:lnSpc>
-                <a:spcBef>
-                  <a:spcPts val="0"/>
-                </a:spcBef>
-                <a:buNone/>
-                <a:defRPr sz="1100" b="0">
-                  <a:solidFill>
-                    <a:schemeClr val="tx2"/>
-                  </a:solidFill>
-                  <a:latin typeface="+mn-lt"/>
-                  <a:ea typeface="+mn-ea"/>
-                </a:defRPr>
-              </a:lvl1pPr>
-            </a:lstStyle>
-            <a:p>
-              <a:r>
-                <a:rPr lang="ja-JP"/>
-                <a:t>連載 #5 のテーマ</a:t>
-              </a:r>
-            </a:p>
-          </p:txBody>
-        </p:sp>
-        <p:sp>
-          <p:nvSpPr>
-            <p:cNvPr id="26" name="Sub_06"/>
-            <p:cNvSpPr txBox="1"/>
-            <p:nvPr/>
-          </p:nvSpPr>
-          <p:spPr>
-            <a:xfrm>
-              <a:off x="5181600" y="3949700"/>
-              <a:ext cx="2946400" cy="196850"/>
-            </a:xfrm>
-            <a:prstGeom prst="rect">
-              <a:avLst/>
-            </a:prstGeom>
-            <a:noFill/>
-          </p:spPr>
-          <p:txBody>
-            <a:bodyPr wrap="square" lIns="0" tIns="0" rIns="0" bIns="0" anchor="ctr">
-              <a:noAutofit/>
-            </a:bodyPr>
-            <a:lstStyle>
-              <a:lvl1pPr marL="0" indent="0" algn="l">
-                <a:lnSpc>
-                  <a:spcPts val="1540"/>
-                </a:lnSpc>
-                <a:spcBef>
-                  <a:spcPts val="0"/>
-                </a:spcBef>
-                <a:buNone/>
-                <a:defRPr sz="1100" b="0">
-                  <a:solidFill>
-                    <a:schemeClr val="tx2"/>
-                  </a:solidFill>
-                  <a:latin typeface="+mn-lt"/>
-                  <a:ea typeface="+mn-ea"/>
-                </a:defRPr>
-              </a:lvl1pPr>
-            </a:lstStyle>
-            <a:p>
-              <a:r>
-                <a:rPr lang="ja-JP"/>
-                <a:t>数値の定義と出典</a:t>
-              </a:r>
-            </a:p>
-          </p:txBody>
-        </p:sp>
-        <p:sp>
-          <p:nvSpPr>
-            <p:cNvPr id="27" name="Page_01"/>
-            <p:cNvSpPr txBox="1"/>
-            <p:nvPr/>
-          </p:nvSpPr>
-          <p:spPr>
-            <a:xfrm>
-              <a:off x="4038600" y="1117600"/>
-              <a:ext cx="381000" cy="247650"/>
-            </a:xfrm>
-            <a:prstGeom prst="rect">
-              <a:avLst/>
-            </a:prstGeom>
-            <a:noFill/>
-          </p:spPr>
-          <p:txBody>
-            <a:bodyPr wrap="square" lIns="0" tIns="0" rIns="0" bIns="0" anchor="ctr">
-              <a:noAutofit/>
-            </a:bodyPr>
-            <a:lstStyle>
-              <a:lvl1pPr marL="0" indent="0" algn="r">
-                <a:lnSpc>
-                  <a:spcPts val="1960"/>
-                </a:lnSpc>
-                <a:spcBef>
-                  <a:spcPts val="0"/>
-                </a:spcBef>
-                <a:buNone/>
-                <a:defRPr sz="1400" b="0">
-                  <a:solidFill>
-                    <a:schemeClr val="tx2"/>
-                  </a:solidFill>
-                  <a:latin typeface="+mn-lt"/>
-                  <a:ea typeface="+mn-ea"/>
-                </a:defRPr>
-              </a:lvl1pPr>
-            </a:lstStyle>
-            <a:p>
-              <a:r>
-                <a:rPr lang="ja-JP"/>
-                <a:t>2</a:t>
-              </a:r>
-            </a:p>
-          </p:txBody>
-        </p:sp>
-        <p:sp>
-          <p:nvSpPr>
-            <p:cNvPr id="28" name="Page_02"/>
-            <p:cNvSpPr txBox="1"/>
-            <p:nvPr/>
-          </p:nvSpPr>
-          <p:spPr>
-            <a:xfrm>
-              <a:off x="8305800" y="1117600"/>
-              <a:ext cx="381000" cy="247650"/>
-            </a:xfrm>
-            <a:prstGeom prst="rect">
-              <a:avLst/>
-            </a:prstGeom>
-            <a:noFill/>
-          </p:spPr>
-          <p:txBody>
-            <a:bodyPr wrap="square" lIns="0" tIns="0" rIns="0" bIns="0" anchor="ctr">
-              <a:noAutofit/>
-            </a:bodyPr>
-            <a:lstStyle>
-              <a:lvl1pPr marL="0" indent="0" algn="r">
-                <a:lnSpc>
-                  <a:spcPts val="1960"/>
-                </a:lnSpc>
-                <a:spcBef>
-                  <a:spcPts val="0"/>
-                </a:spcBef>
-                <a:buNone/>
-                <a:defRPr sz="1400" b="0">
-                  <a:solidFill>
-                    <a:schemeClr val="tx2"/>
-                  </a:solidFill>
-                  <a:latin typeface="+mn-lt"/>
-                  <a:ea typeface="+mn-ea"/>
-                </a:defRPr>
-              </a:lvl1pPr>
-            </a:lstStyle>
-            <a:p>
-              <a:r>
-                <a:rPr lang="ja-JP"/>
-                <a:t>6</a:t>
-              </a:r>
-            </a:p>
-          </p:txBody>
-        </p:sp>
-        <p:sp>
-          <p:nvSpPr>
-            <p:cNvPr id="29" name="Page_03"/>
-            <p:cNvSpPr txBox="1"/>
-            <p:nvPr/>
-          </p:nvSpPr>
-          <p:spPr>
-            <a:xfrm>
-              <a:off x="4038600" y="2387600"/>
-              <a:ext cx="381000" cy="247650"/>
-            </a:xfrm>
-            <a:prstGeom prst="rect">
-              <a:avLst/>
-            </a:prstGeom>
-            <a:noFill/>
-          </p:spPr>
-          <p:txBody>
-            <a:bodyPr wrap="square" lIns="0" tIns="0" rIns="0" bIns="0" anchor="ctr">
-              <a:noAutofit/>
-            </a:bodyPr>
-            <a:lstStyle>
-              <a:lvl1pPr marL="0" indent="0" algn="r">
-                <a:lnSpc>
-                  <a:spcPts val="1960"/>
-                </a:lnSpc>
-                <a:spcBef>
-                  <a:spcPts val="0"/>
-                </a:spcBef>
-                <a:buNone/>
-                <a:defRPr sz="1400" b="0">
-                  <a:solidFill>
-                    <a:schemeClr val="tx2"/>
-                  </a:solidFill>
-                  <a:latin typeface="+mn-lt"/>
-                  <a:ea typeface="+mn-ea"/>
-                </a:defRPr>
-              </a:lvl1pPr>
-            </a:lstStyle>
-            <a:p>
-              <a:r>
-                <a:rPr lang="ja-JP"/>
-                <a:t>9</a:t>
-              </a:r>
-            </a:p>
-          </p:txBody>
-        </p:sp>
-        <p:sp>
-          <p:nvSpPr>
-            <p:cNvPr id="30" name="Page_04"/>
-            <p:cNvSpPr txBox="1"/>
-            <p:nvPr/>
-          </p:nvSpPr>
-          <p:spPr>
-            <a:xfrm>
-              <a:off x="8305800" y="2387600"/>
-              <a:ext cx="381000" cy="247650"/>
-            </a:xfrm>
-            <a:prstGeom prst="rect">
-              <a:avLst/>
-            </a:prstGeom>
-            <a:noFill/>
-          </p:spPr>
-          <p:txBody>
-            <a:bodyPr wrap="square" lIns="0" tIns="0" rIns="0" bIns="0" anchor="ctr">
-              <a:noAutofit/>
-            </a:bodyPr>
-            <a:lstStyle>
-              <a:lvl1pPr marL="0" indent="0" algn="r">
-                <a:lnSpc>
-                  <a:spcPts val="1960"/>
-                </a:lnSpc>
-                <a:spcBef>
-                  <a:spcPts val="0"/>
-                </a:spcBef>
-                <a:buNone/>
-                <a:defRPr sz="1400" b="0">
-                  <a:solidFill>
-                    <a:schemeClr val="tx2"/>
-                  </a:solidFill>
-                  <a:latin typeface="+mn-lt"/>
-                  <a:ea typeface="+mn-ea"/>
-                </a:defRPr>
-              </a:lvl1pPr>
-            </a:lstStyle>
-            <a:p>
-              <a:r>
-                <a:rPr lang="ja-JP"/>
-                <a:t>12</a:t>
-              </a:r>
-            </a:p>
-          </p:txBody>
-        </p:sp>
-        <p:sp>
-          <p:nvSpPr>
-            <p:cNvPr id="31" name="Page_05"/>
-            <p:cNvSpPr txBox="1"/>
-            <p:nvPr/>
-          </p:nvSpPr>
-          <p:spPr>
-            <a:xfrm>
-              <a:off x="4038600" y="3657600"/>
-              <a:ext cx="381000" cy="247650"/>
-            </a:xfrm>
-            <a:prstGeom prst="rect">
-              <a:avLst/>
-            </a:prstGeom>
-            <a:noFill/>
-          </p:spPr>
-          <p:txBody>
-            <a:bodyPr wrap="square" lIns="0" tIns="0" rIns="0" bIns="0" anchor="ctr">
-              <a:noAutofit/>
-            </a:bodyPr>
-            <a:lstStyle>
-              <a:lvl1pPr marL="0" indent="0" algn="r">
-                <a:lnSpc>
-                  <a:spcPts val="1960"/>
-                </a:lnSpc>
-                <a:spcBef>
-                  <a:spcPts val="0"/>
-                </a:spcBef>
-                <a:buNone/>
-                <a:defRPr sz="1400" b="0">
-                  <a:solidFill>
-                    <a:schemeClr val="tx2"/>
-                  </a:solidFill>
-                  <a:latin typeface="+mn-lt"/>
-                  <a:ea typeface="+mn-ea"/>
-                </a:defRPr>
-              </a:lvl1pPr>
-            </a:lstStyle>
-            <a:p>
-              <a:r>
-                <a:rPr lang="ja-JP"/>
-                <a:t>15</a:t>
-              </a:r>
-            </a:p>
-          </p:txBody>
-        </p:sp>
-        <p:sp>
-          <p:nvSpPr>
-            <p:cNvPr id="32" name="Page_06"/>
-            <p:cNvSpPr txBox="1"/>
-            <p:nvPr/>
-          </p:nvSpPr>
-          <p:spPr>
-            <a:xfrm>
-              <a:off x="8305800" y="3657600"/>
-              <a:ext cx="381000" cy="247650"/>
-            </a:xfrm>
-            <a:prstGeom prst="rect">
-              <a:avLst/>
-            </a:prstGeom>
-            <a:noFill/>
-          </p:spPr>
-          <p:txBody>
-            <a:bodyPr wrap="square" lIns="0" tIns="0" rIns="0" bIns="0" anchor="ctr">
-              <a:noAutofit/>
-            </a:bodyPr>
-            <a:lstStyle>
-              <a:lvl1pPr marL="0" indent="0" algn="r">
-                <a:lnSpc>
-                  <a:spcPts val="1960"/>
-                </a:lnSpc>
-                <a:spcBef>
-                  <a:spcPts val="0"/>
-                </a:spcBef>
-                <a:buNone/>
-                <a:defRPr sz="1400" b="0">
-                  <a:solidFill>
-                    <a:schemeClr val="tx2"/>
-                  </a:solidFill>
-                  <a:latin typeface="+mn-lt"/>
-                  <a:ea typeface="+mn-ea"/>
-                </a:defRPr>
-              </a:lvl1pPr>
-            </a:lstStyle>
-            <a:p>
-              <a:r>
-                <a:rPr lang="ja-JP"/>
-                <a:t>18</a:t>
-              </a:r>
-            </a:p>
-          </p:txBody>
+            <p:cNvPr id="17" name="Brick_1a"/>
+            <p:cNvSpPr/>
+            <p:nvPr/>
+          </p:nvSpPr>
+          <p:spPr>
+            <a:xfrm>
+              <a:off x="4013200" y="2057400"/>
+              <a:ext cx="532130" cy="212725"/>
+            </a:xfrm>
+            <a:prstGeom prst="rect">
+              <a:avLst/>
+            </a:prstGeom>
+            <a:solidFill>
+              <a:schemeClr val="accent5"/>
+            </a:solidFill>
+            <a:ln>
+              <a:noFill/>
+            </a:ln>
+          </p:spPr>
+        </p:sp>
+        <p:sp>
+          <p:nvSpPr>
+            <p:cNvPr id="18" name="Brick_1b"/>
+            <p:cNvSpPr/>
+            <p:nvPr/>
+          </p:nvSpPr>
+          <p:spPr>
+            <a:xfrm>
+              <a:off x="4583430" y="2057400"/>
+              <a:ext cx="318770" cy="212725"/>
+            </a:xfrm>
+            <a:prstGeom prst="rect">
+              <a:avLst/>
+            </a:prstGeom>
+            <a:solidFill>
+              <a:schemeClr val="accent5"/>
+            </a:solidFill>
+            <a:ln>
+              <a:noFill/>
+            </a:ln>
+          </p:spPr>
+        </p:sp>
+        <p:sp>
+          <p:nvSpPr>
+            <p:cNvPr id="19" name="Brick_2a"/>
+            <p:cNvSpPr/>
+            <p:nvPr/>
+          </p:nvSpPr>
+          <p:spPr>
+            <a:xfrm>
+              <a:off x="4013200" y="2295525"/>
+              <a:ext cx="318770" cy="212725"/>
+            </a:xfrm>
+            <a:prstGeom prst="rect">
+              <a:avLst/>
+            </a:prstGeom>
+            <a:solidFill>
+              <a:schemeClr val="accent5"/>
+            </a:solidFill>
+            <a:ln>
+              <a:noFill/>
+            </a:ln>
+          </p:spPr>
+        </p:sp>
+        <p:sp>
+          <p:nvSpPr>
+            <p:cNvPr id="20" name="Brick_2b"/>
+            <p:cNvSpPr/>
+            <p:nvPr/>
+          </p:nvSpPr>
+          <p:spPr>
+            <a:xfrm>
+              <a:off x="4370070" y="2295525"/>
+              <a:ext cx="532130" cy="212725"/>
+            </a:xfrm>
+            <a:prstGeom prst="rect">
+              <a:avLst/>
+            </a:prstGeom>
+            <a:solidFill>
+              <a:schemeClr val="accent5"/>
+            </a:solidFill>
+            <a:ln>
+              <a:noFill/>
+            </a:ln>
+          </p:spPr>
+        </p:sp>
+        <p:sp>
+          <p:nvSpPr>
+            <p:cNvPr id="21" name="Brick_3a"/>
+            <p:cNvSpPr/>
+            <p:nvPr/>
+          </p:nvSpPr>
+          <p:spPr>
+            <a:xfrm>
+              <a:off x="4013200" y="2533650"/>
+              <a:ext cx="532130" cy="212725"/>
+            </a:xfrm>
+            <a:prstGeom prst="rect">
+              <a:avLst/>
+            </a:prstGeom>
+            <a:solidFill>
+              <a:schemeClr val="accent5"/>
+            </a:solidFill>
+            <a:ln>
+              <a:noFill/>
+            </a:ln>
+          </p:spPr>
+        </p:sp>
+        <p:sp>
+          <p:nvSpPr>
+            <p:cNvPr id="22" name="Brick_3b"/>
+            <p:cNvSpPr/>
+            <p:nvPr/>
+          </p:nvSpPr>
+          <p:spPr>
+            <a:xfrm>
+              <a:off x="4583430" y="2533650"/>
+              <a:ext cx="318770" cy="212725"/>
+            </a:xfrm>
+            <a:prstGeom prst="rect">
+              <a:avLst/>
+            </a:prstGeom>
+            <a:solidFill>
+              <a:schemeClr val="accent5"/>
+            </a:solidFill>
+            <a:ln>
+              <a:noFill/>
+            </a:ln>
+          </p:spPr>
+        </p:sp>
+        <p:sp>
+          <p:nvSpPr>
+            <p:cNvPr id="23" name="Brick_4a"/>
+            <p:cNvSpPr/>
+            <p:nvPr/>
+          </p:nvSpPr>
+          <p:spPr>
+            <a:xfrm>
+              <a:off x="4013200" y="2771775"/>
+              <a:ext cx="318770" cy="212725"/>
+            </a:xfrm>
+            <a:prstGeom prst="rect">
+              <a:avLst/>
+            </a:prstGeom>
+            <a:solidFill>
+              <a:schemeClr val="accent5"/>
+            </a:solidFill>
+            <a:ln>
+              <a:noFill/>
+            </a:ln>
+          </p:spPr>
+        </p:sp>
+        <p:sp>
+          <p:nvSpPr>
+            <p:cNvPr id="24" name="Brick_4b"/>
+            <p:cNvSpPr/>
+            <p:nvPr/>
+          </p:nvSpPr>
+          <p:spPr>
+            <a:xfrm>
+              <a:off x="4370070" y="2771775"/>
+              <a:ext cx="532130" cy="212725"/>
+            </a:xfrm>
+            <a:prstGeom prst="rect">
+              <a:avLst/>
+            </a:prstGeom>
+            <a:solidFill>
+              <a:schemeClr val="accent5"/>
+            </a:solidFill>
+            <a:ln>
+              <a:noFill/>
+            </a:ln>
+          </p:spPr>
+        </p:sp>
+        <p:sp>
+          <p:nvSpPr>
+            <p:cNvPr id="25" name="Brick_5a"/>
+            <p:cNvSpPr/>
+            <p:nvPr/>
+          </p:nvSpPr>
+          <p:spPr>
+            <a:xfrm>
+              <a:off x="4013200" y="3009900"/>
+              <a:ext cx="532130" cy="212725"/>
+            </a:xfrm>
+            <a:prstGeom prst="rect">
+              <a:avLst/>
+            </a:prstGeom>
+            <a:solidFill>
+              <a:schemeClr val="accent5"/>
+            </a:solidFill>
+            <a:ln>
+              <a:noFill/>
+            </a:ln>
+          </p:spPr>
+        </p:sp>
+        <p:sp>
+          <p:nvSpPr>
+            <p:cNvPr id="26" name="Brick_5b"/>
+            <p:cNvSpPr/>
+            <p:nvPr/>
+          </p:nvSpPr>
+          <p:spPr>
+            <a:xfrm>
+              <a:off x="4583430" y="3009900"/>
+              <a:ext cx="318770" cy="212725"/>
+            </a:xfrm>
+            <a:prstGeom prst="rect">
+              <a:avLst/>
+            </a:prstGeom>
+            <a:solidFill>
+              <a:schemeClr val="accent5"/>
+            </a:solidFill>
+            <a:ln>
+              <a:noFill/>
+            </a:ln>
+          </p:spPr>
+        </p:sp>
+        <p:sp>
+          <p:nvSpPr>
+            <p:cNvPr id="27" name="Brick_6a"/>
+            <p:cNvSpPr/>
+            <p:nvPr/>
+          </p:nvSpPr>
+          <p:spPr>
+            <a:xfrm>
+              <a:off x="4013200" y="3248025"/>
+              <a:ext cx="318770" cy="212725"/>
+            </a:xfrm>
+            <a:prstGeom prst="rect">
+              <a:avLst/>
+            </a:prstGeom>
+            <a:solidFill>
+              <a:schemeClr val="accent5"/>
+            </a:solidFill>
+            <a:ln>
+              <a:noFill/>
+            </a:ln>
+          </p:spPr>
+        </p:sp>
+        <p:sp>
+          <p:nvSpPr>
+            <p:cNvPr id="28" name="Brick_6b"/>
+            <p:cNvSpPr/>
+            <p:nvPr/>
+          </p:nvSpPr>
+          <p:spPr>
+            <a:xfrm>
+              <a:off x="4370070" y="3248025"/>
+              <a:ext cx="532130" cy="212725"/>
+            </a:xfrm>
+            <a:prstGeom prst="rect">
+              <a:avLst/>
+            </a:prstGeom>
+            <a:solidFill>
+              <a:schemeClr val="accent5"/>
+            </a:solidFill>
+            <a:ln>
+              <a:noFill/>
+            </a:ln>
+          </p:spPr>
+        </p:sp>
+        <p:sp>
+          <p:nvSpPr>
+            <p:cNvPr id="29" name="Brick_7a"/>
+            <p:cNvSpPr/>
+            <p:nvPr/>
+          </p:nvSpPr>
+          <p:spPr>
+            <a:xfrm>
+              <a:off x="4013200" y="3486150"/>
+              <a:ext cx="532130" cy="212725"/>
+            </a:xfrm>
+            <a:prstGeom prst="rect">
+              <a:avLst/>
+            </a:prstGeom>
+            <a:solidFill>
+              <a:schemeClr val="accent5"/>
+            </a:solidFill>
+            <a:ln>
+              <a:noFill/>
+            </a:ln>
+          </p:spPr>
+        </p:sp>
+        <p:sp>
+          <p:nvSpPr>
+            <p:cNvPr id="30" name="Brick_7b"/>
+            <p:cNvSpPr/>
+            <p:nvPr/>
+          </p:nvSpPr>
+          <p:spPr>
+            <a:xfrm>
+              <a:off x="4583430" y="3486150"/>
+              <a:ext cx="318770" cy="212725"/>
+            </a:xfrm>
+            <a:prstGeom prst="rect">
+              <a:avLst/>
+            </a:prstGeom>
+            <a:solidFill>
+              <a:schemeClr val="accent5"/>
+            </a:solidFill>
+            <a:ln>
+              <a:noFill/>
+            </a:ln>
+          </p:spPr>
+        </p:sp>
+        <p:sp>
+          <p:nvSpPr>
+            <p:cNvPr id="31" name="Brick_8a"/>
+            <p:cNvSpPr/>
+            <p:nvPr/>
+          </p:nvSpPr>
+          <p:spPr>
+            <a:xfrm>
+              <a:off x="4013200" y="3724275"/>
+              <a:ext cx="318770" cy="212725"/>
+            </a:xfrm>
+            <a:prstGeom prst="rect">
+              <a:avLst/>
+            </a:prstGeom>
+            <a:solidFill>
+              <a:schemeClr val="accent5"/>
+            </a:solidFill>
+            <a:ln>
+              <a:noFill/>
+            </a:ln>
+          </p:spPr>
+        </p:sp>
+        <p:sp>
+          <p:nvSpPr>
+            <p:cNvPr id="32" name="Brick_8b"/>
+            <p:cNvSpPr/>
+            <p:nvPr/>
+          </p:nvSpPr>
+          <p:spPr>
+            <a:xfrm>
+              <a:off x="4370070" y="3724275"/>
+              <a:ext cx="532130" cy="212725"/>
+            </a:xfrm>
+            <a:prstGeom prst="rect">
+              <a:avLst/>
+            </a:prstGeom>
+            <a:solidFill>
+              <a:schemeClr val="accent5"/>
+            </a:solidFill>
+            <a:ln>
+              <a:noFill/>
+            </a:ln>
+          </p:spPr>
         </p:sp>
       </p:grpSp>
       <p:sp>
@@ -15209,7 +15434,1703 @@
 </p:sld>
 </file>
 
-<file path=ppt/slides/slide23.xml><?xml version="1.0" encoding="utf-8"?>
+<file path=ppt/slides/slide24.xml><?xml version="1.0" encoding="utf-8"?>
+<p:sld xmlns:a="http://schemas.openxmlformats.org/drawingml/2006/main" xmlns:r="http://schemas.openxmlformats.org/officeDocument/2006/relationships" xmlns:p="http://schemas.openxmlformats.org/presentationml/2006/main">
+  <p:cSld>
+    <p:spTree>
+      <p:nvGrpSpPr>
+        <p:cNvPr id="1" name=""/>
+        <p:cNvGrpSpPr/>
+        <p:nvPr/>
+      </p:nvGrpSpPr>
+      <p:grpSpPr>
+        <a:xfrm>
+          <a:off x="0" y="0"/>
+          <a:ext cx="0" cy="0"/>
+          <a:chOff x="0" y="0"/>
+          <a:chExt cx="0" cy="0"/>
+        </a:xfrm>
+      </p:grpSpPr>
+      <p:sp>
+        <p:nvSpPr>
+          <p:cNvPr id="2" name="Title"/>
+          <p:cNvSpPr>
+            <a:spLocks noGrp="1"/>
+          </p:cNvSpPr>
+          <p:nvPr>
+            <p:ph type="title"/>
+          </p:nvPr>
+        </p:nvSpPr>
+        <p:spPr/>
+        <p:txBody>
+          <a:bodyPr/>
+          <a:lstStyle/>
+          <a:p>
+            <a:r>
+              <a:rPr lang="ja-JP"/>
+              <a:t>運用ルールが回らなくなった</a:t>
+            </a:r>
+          </a:p>
+        </p:txBody>
+      </p:sp>
+      <p:sp>
+        <p:nvSpPr>
+          <p:cNvPr id="3" name="Lead"/>
+          <p:cNvSpPr>
+            <a:spLocks noGrp="1"/>
+          </p:cNvSpPr>
+          <p:nvPr>
+            <p:ph type="body" idx="13" sz="quarter"/>
+          </p:nvPr>
+        </p:nvSpPr>
+        <p:spPr/>
+        <p:txBody>
+          <a:bodyPr/>
+          <a:lstStyle/>
+          <a:p>
+            <a:r>
+              <a:rPr lang="ja-JP"/>
+              <a:t>足し続けた結果、誰も全体を把握できない</a:t>
+            </a:r>
+          </a:p>
+        </p:txBody>
+      </p:sp>
+      <p:grpSp>
+        <p:nvGrpSpPr>
+          <p:cNvPr id="13" name="organism/O-B26 積層（積み上がって破綻）"/>
+          <p:cNvGrpSpPr/>
+          <p:nvPr/>
+        </p:nvGrpSpPr>
+        <p:grpSpPr>
+          <a:xfrm>
+            <a:off x="457200" y="1600200"/>
+            <a:ext cx="8229600" cy="2794000"/>
+            <a:chOff x="457200" y="1600200"/>
+            <a:chExt cx="8229600" cy="2794000"/>
+          </a:xfrm>
+        </p:grpSpPr>
+        <p:sp>
+          <p:nvSpPr>
+            <p:cNvPr id="4" name="Slab_1"/>
+            <p:cNvSpPr/>
+            <p:nvPr/>
+          </p:nvSpPr>
+          <p:spPr>
+            <a:xfrm>
+              <a:off x="457200" y="3670300"/>
+              <a:ext cx="1905000" cy="215900"/>
+            </a:xfrm>
+            <a:prstGeom prst="rect">
+              <a:avLst/>
+            </a:prstGeom>
+            <a:solidFill>
+              <a:schemeClr val="accent5"/>
+            </a:solidFill>
+            <a:ln>
+              <a:noFill/>
+            </a:ln>
+          </p:spPr>
+        </p:sp>
+        <p:sp>
+          <p:nvSpPr>
+            <p:cNvPr id="5" name="Slab_2"/>
+            <p:cNvSpPr/>
+            <p:nvPr/>
+          </p:nvSpPr>
+          <p:spPr>
+            <a:xfrm>
+              <a:off x="469900" y="3378200"/>
+              <a:ext cx="1905000" cy="215900"/>
+            </a:xfrm>
+            <a:prstGeom prst="rect">
+              <a:avLst/>
+            </a:prstGeom>
+            <a:solidFill>
+              <a:schemeClr val="accent5"/>
+            </a:solidFill>
+            <a:ln>
+              <a:noFill/>
+            </a:ln>
+          </p:spPr>
+        </p:sp>
+        <p:sp>
+          <p:nvSpPr>
+            <p:cNvPr id="6" name="Slab_3"/>
+            <p:cNvSpPr/>
+            <p:nvPr/>
+          </p:nvSpPr>
+          <p:spPr>
+            <a:xfrm>
+              <a:off x="495300" y="3086100"/>
+              <a:ext cx="1905000" cy="215900"/>
+            </a:xfrm>
+            <a:prstGeom prst="rect">
+              <a:avLst/>
+            </a:prstGeom>
+            <a:solidFill>
+              <a:schemeClr val="accent5"/>
+            </a:solidFill>
+            <a:ln>
+              <a:noFill/>
+            </a:ln>
+          </p:spPr>
+        </p:sp>
+        <p:sp>
+          <p:nvSpPr>
+            <p:cNvPr id="7" name="Slab_4"/>
+            <p:cNvSpPr/>
+            <p:nvPr/>
+          </p:nvSpPr>
+          <p:spPr>
+            <a:xfrm>
+              <a:off x="546100" y="2794000"/>
+              <a:ext cx="1905000" cy="215900"/>
+            </a:xfrm>
+            <a:prstGeom prst="rect">
+              <a:avLst/>
+            </a:prstGeom>
+            <a:solidFill>
+              <a:schemeClr val="accent5"/>
+            </a:solidFill>
+            <a:ln>
+              <a:noFill/>
+            </a:ln>
+          </p:spPr>
+        </p:sp>
+        <p:sp>
+          <p:nvSpPr>
+            <p:cNvPr id="8" name="Slab_5"/>
+            <p:cNvSpPr/>
+            <p:nvPr/>
+          </p:nvSpPr>
+          <p:spPr>
+            <a:xfrm>
+              <a:off x="622300" y="2501900"/>
+              <a:ext cx="1905000" cy="215900"/>
+            </a:xfrm>
+            <a:prstGeom prst="rect">
+              <a:avLst/>
+            </a:prstGeom>
+            <a:solidFill>
+              <a:schemeClr val="accent5"/>
+            </a:solidFill>
+            <a:ln>
+              <a:noFill/>
+            </a:ln>
+          </p:spPr>
+        </p:sp>
+        <p:sp>
+          <p:nvSpPr>
+            <p:cNvPr id="9" name="Slab_6"/>
+            <p:cNvSpPr/>
+            <p:nvPr/>
+          </p:nvSpPr>
+          <p:spPr>
+            <a:xfrm rot="240000">
+              <a:off x="701358" y="2275967"/>
+              <a:ext cx="1905000" cy="215900"/>
+            </a:xfrm>
+            <a:prstGeom prst="rect">
+              <a:avLst/>
+            </a:prstGeom>
+            <a:solidFill>
+              <a:schemeClr val="accent5"/>
+            </a:solidFill>
+            <a:ln>
+              <a:noFill/>
+            </a:ln>
+          </p:spPr>
+        </p:sp>
+        <p:sp>
+          <p:nvSpPr>
+            <p:cNvPr id="10" name="StackLabel"/>
+            <p:cNvSpPr txBox="1"/>
+            <p:nvPr/>
+          </p:nvSpPr>
+          <p:spPr>
+            <a:xfrm>
+              <a:off x="457200" y="1885950"/>
+              <a:ext cx="2921000" cy="247650"/>
+            </a:xfrm>
+            <a:prstGeom prst="rect">
+              <a:avLst/>
+            </a:prstGeom>
+            <a:noFill/>
+          </p:spPr>
+          <p:txBody>
+            <a:bodyPr wrap="square" lIns="0" tIns="0" rIns="0" bIns="0" anchor="ctr">
+              <a:noAutofit/>
+            </a:bodyPr>
+            <a:lstStyle>
+              <a:lvl1pPr marL="0" indent="0" algn="l">
+                <a:lnSpc>
+                  <a:spcPts val="1960"/>
+                </a:lnSpc>
+                <a:spcBef>
+                  <a:spcPts val="0"/>
+                </a:spcBef>
+                <a:buNone/>
+                <a:defRPr sz="1400" b="0">
+                  <a:solidFill>
+                    <a:schemeClr val="tx1"/>
+                  </a:solidFill>
+                  <a:latin typeface="+mn-lt"/>
+                  <a:ea typeface="+mn-ea"/>
+                </a:defRPr>
+              </a:lvl1pPr>
+            </a:lstStyle>
+            <a:p>
+              <a:r>
+                <a:rPr lang="ja-JP"/>
+                <a:t>増え続ける運用ルール</a:t>
+              </a:r>
+            </a:p>
+          </p:txBody>
+        </p:sp>
+        <p:sp>
+          <p:nvSpPr>
+            <p:cNvPr id="11" name="StackNote"/>
+            <p:cNvSpPr txBox="1"/>
+            <p:nvPr/>
+          </p:nvSpPr>
+          <p:spPr>
+            <a:xfrm>
+              <a:off x="2997200" y="2949575"/>
+              <a:ext cx="2540000" cy="196850"/>
+            </a:xfrm>
+            <a:prstGeom prst="rect">
+              <a:avLst/>
+            </a:prstGeom>
+            <a:noFill/>
+          </p:spPr>
+          <p:txBody>
+            <a:bodyPr wrap="square" lIns="0" tIns="0" rIns="0" bIns="0" anchor="ctr">
+              <a:noAutofit/>
+            </a:bodyPr>
+            <a:lstStyle>
+              <a:lvl1pPr marL="0" indent="0" algn="l">
+                <a:lnSpc>
+                  <a:spcPts val="1540"/>
+                </a:lnSpc>
+                <a:spcBef>
+                  <a:spcPts val="0"/>
+                </a:spcBef>
+                <a:buNone/>
+                <a:defRPr sz="1100" b="0">
+                  <a:solidFill>
+                    <a:schemeClr val="tx2"/>
+                  </a:solidFill>
+                  <a:latin typeface="+mn-lt"/>
+                  <a:ea typeface="+mn-ea"/>
+                </a:defRPr>
+              </a:lvl1pPr>
+            </a:lstStyle>
+            <a:p>
+              <a:r>
+                <a:rPr lang="ja-JP"/>
+                <a:t>書いても書いても終わらない</a:t>
+              </a:r>
+            </a:p>
+          </p:txBody>
+        </p:sp>
+        <p:sp>
+          <p:nvSpPr>
+            <p:cNvPr id="12" name="Note"/>
+            <p:cNvSpPr txBox="1"/>
+            <p:nvPr/>
+          </p:nvSpPr>
+          <p:spPr>
+            <a:xfrm>
+              <a:off x="457200" y="4140200"/>
+              <a:ext cx="5715000" cy="196850"/>
+            </a:xfrm>
+            <a:prstGeom prst="rect">
+              <a:avLst/>
+            </a:prstGeom>
+            <a:noFill/>
+          </p:spPr>
+          <p:txBody>
+            <a:bodyPr wrap="square" lIns="0" tIns="0" rIns="0" bIns="0" anchor="ctr">
+              <a:noAutofit/>
+            </a:bodyPr>
+            <a:lstStyle>
+              <a:lvl1pPr marL="0" indent="0" algn="l">
+                <a:lnSpc>
+                  <a:spcPts val="1540"/>
+                </a:lnSpc>
+                <a:spcBef>
+                  <a:spcPts val="0"/>
+                </a:spcBef>
+                <a:buNone/>
+                <a:defRPr sz="1100" b="0">
+                  <a:solidFill>
+                    <a:schemeClr val="tx2"/>
+                  </a:solidFill>
+                  <a:latin typeface="+mn-lt"/>
+                  <a:ea typeface="+mn-ea"/>
+                </a:defRPr>
+              </a:lvl1pPr>
+            </a:lstStyle>
+            <a:p>
+              <a:r>
+                <a:rPr lang="ja-JP"/>
+                <a:t>※ 矩形の中は空にする（傾いた面の文字は読めない）</a:t>
+              </a:r>
+            </a:p>
+          </p:txBody>
+        </p:sp>
+      </p:grpSp>
+      <p:sp>
+        <p:nvSpPr>
+          <p:cNvPr id="14" name="SlideNumber"/>
+          <p:cNvSpPr>
+            <a:spLocks noGrp="1"/>
+          </p:cNvSpPr>
+          <p:nvPr>
+            <p:ph type="sldNum" idx="12" sz="quarter"/>
+          </p:nvPr>
+        </p:nvSpPr>
+        <p:spPr/>
+        <p:txBody>
+          <a:bodyPr/>
+          <a:lstStyle/>
+          <a:p>
+            <a:fld id="{B6F15528-21DE-4FAA-801E-634DDDAF4B2B}" type="slidenum">
+              <a:rPr lang="ja-JP"/>
+              <a:t>‹#›</a:t>
+            </a:fld>
+          </a:p>
+        </p:txBody>
+      </p:sp>
+    </p:spTree>
+  </p:cSld>
+  <p:clrMapOvr>
+    <a:masterClrMapping/>
+  </p:clrMapOvr>
+</p:sld>
+</file>
+
+<file path=ppt/slides/slide25.xml><?xml version="1.0" encoding="utf-8"?>
+<p:sld xmlns:a="http://schemas.openxmlformats.org/drawingml/2006/main" xmlns:r="http://schemas.openxmlformats.org/officeDocument/2006/relationships" xmlns:p="http://schemas.openxmlformats.org/presentationml/2006/main">
+  <p:cSld>
+    <p:spTree>
+      <p:nvGrpSpPr>
+        <p:cNvPr id="1" name=""/>
+        <p:cNvGrpSpPr/>
+        <p:nvPr/>
+      </p:nvGrpSpPr>
+      <p:grpSpPr>
+        <a:xfrm>
+          <a:off x="0" y="0"/>
+          <a:ext cx="0" cy="0"/>
+          <a:chOff x="0" y="0"/>
+          <a:chExt cx="0" cy="0"/>
+        </a:xfrm>
+      </p:grpSpPr>
+      <p:sp>
+        <p:nvSpPr>
+          <p:cNvPr id="2" name="Title"/>
+          <p:cNvSpPr>
+            <a:spLocks noGrp="1"/>
+          </p:cNvSpPr>
+          <p:nvPr>
+            <p:ph type="title"/>
+          </p:nvPr>
+        </p:nvSpPr>
+        <p:spPr/>
+        <p:txBody>
+          <a:bodyPr/>
+          <a:lstStyle/>
+          <a:p>
+            <a:r>
+              <a:rPr lang="ja-JP"/>
+              <a:t>目次</a:t>
+            </a:r>
+          </a:p>
+        </p:txBody>
+      </p:sp>
+      <p:grpSp>
+        <p:nvGrpSpPr>
+          <p:cNvPr id="33" name="organism/O-S1 目次"/>
+          <p:cNvGrpSpPr/>
+          <p:nvPr/>
+        </p:nvGrpSpPr>
+        <p:grpSpPr>
+          <a:xfrm>
+            <a:off x="457200" y="965200"/>
+            <a:ext cx="8229600" cy="3657600"/>
+            <a:chOff x="457200" y="965200"/>
+            <a:chExt cx="8229600" cy="3657600"/>
+          </a:xfrm>
+        </p:grpSpPr>
+        <p:sp>
+          <p:nvSpPr>
+            <p:cNvPr id="3" name="Rule_01"/>
+            <p:cNvSpPr/>
+            <p:nvPr/>
+          </p:nvSpPr>
+          <p:spPr>
+            <a:xfrm>
+              <a:off x="457200" y="965200"/>
+              <a:ext cx="3962400" cy="12700"/>
+            </a:xfrm>
+            <a:prstGeom prst="rect">
+              <a:avLst/>
+            </a:prstGeom>
+            <a:solidFill>
+              <a:schemeClr val="accent5"/>
+            </a:solidFill>
+            <a:ln>
+              <a:noFill/>
+            </a:ln>
+          </p:spPr>
+        </p:sp>
+        <p:sp>
+          <p:nvSpPr>
+            <p:cNvPr id="4" name="Rule_02"/>
+            <p:cNvSpPr/>
+            <p:nvPr/>
+          </p:nvSpPr>
+          <p:spPr>
+            <a:xfrm>
+              <a:off x="4724400" y="965200"/>
+              <a:ext cx="3962400" cy="12700"/>
+            </a:xfrm>
+            <a:prstGeom prst="rect">
+              <a:avLst/>
+            </a:prstGeom>
+            <a:solidFill>
+              <a:schemeClr val="accent5"/>
+            </a:solidFill>
+            <a:ln>
+              <a:noFill/>
+            </a:ln>
+          </p:spPr>
+        </p:sp>
+        <p:sp>
+          <p:nvSpPr>
+            <p:cNvPr id="5" name="Rule_03"/>
+            <p:cNvSpPr/>
+            <p:nvPr/>
+          </p:nvSpPr>
+          <p:spPr>
+            <a:xfrm>
+              <a:off x="457200" y="2235200"/>
+              <a:ext cx="3962400" cy="12700"/>
+            </a:xfrm>
+            <a:prstGeom prst="rect">
+              <a:avLst/>
+            </a:prstGeom>
+            <a:solidFill>
+              <a:schemeClr val="accent5"/>
+            </a:solidFill>
+            <a:ln>
+              <a:noFill/>
+            </a:ln>
+          </p:spPr>
+        </p:sp>
+        <p:sp>
+          <p:nvSpPr>
+            <p:cNvPr id="6" name="Rule_04"/>
+            <p:cNvSpPr/>
+            <p:nvPr/>
+          </p:nvSpPr>
+          <p:spPr>
+            <a:xfrm>
+              <a:off x="4724400" y="2235200"/>
+              <a:ext cx="3962400" cy="12700"/>
+            </a:xfrm>
+            <a:prstGeom prst="rect">
+              <a:avLst/>
+            </a:prstGeom>
+            <a:solidFill>
+              <a:schemeClr val="accent5"/>
+            </a:solidFill>
+            <a:ln>
+              <a:noFill/>
+            </a:ln>
+          </p:spPr>
+        </p:sp>
+        <p:sp>
+          <p:nvSpPr>
+            <p:cNvPr id="7" name="Rule_05"/>
+            <p:cNvSpPr/>
+            <p:nvPr/>
+          </p:nvSpPr>
+          <p:spPr>
+            <a:xfrm>
+              <a:off x="457200" y="3505200"/>
+              <a:ext cx="3962400" cy="12700"/>
+            </a:xfrm>
+            <a:prstGeom prst="rect">
+              <a:avLst/>
+            </a:prstGeom>
+            <a:solidFill>
+              <a:schemeClr val="accent5"/>
+            </a:solidFill>
+            <a:ln>
+              <a:noFill/>
+            </a:ln>
+          </p:spPr>
+        </p:sp>
+        <p:sp>
+          <p:nvSpPr>
+            <p:cNvPr id="8" name="Rule_06"/>
+            <p:cNvSpPr/>
+            <p:nvPr/>
+          </p:nvSpPr>
+          <p:spPr>
+            <a:xfrm>
+              <a:off x="4724400" y="3505200"/>
+              <a:ext cx="3962400" cy="12700"/>
+            </a:xfrm>
+            <a:prstGeom prst="rect">
+              <a:avLst/>
+            </a:prstGeom>
+            <a:solidFill>
+              <a:schemeClr val="accent5"/>
+            </a:solidFill>
+            <a:ln>
+              <a:noFill/>
+            </a:ln>
+          </p:spPr>
+        </p:sp>
+        <p:sp>
+          <p:nvSpPr>
+            <p:cNvPr id="9" name="No_01"/>
+            <p:cNvSpPr txBox="1"/>
+            <p:nvPr/>
+          </p:nvSpPr>
+          <p:spPr>
+            <a:xfrm>
+              <a:off x="457200" y="1117600"/>
+              <a:ext cx="381000" cy="247650"/>
+            </a:xfrm>
+            <a:prstGeom prst="rect">
+              <a:avLst/>
+            </a:prstGeom>
+            <a:noFill/>
+          </p:spPr>
+          <p:txBody>
+            <a:bodyPr wrap="square" lIns="0" tIns="0" rIns="0" bIns="0" anchor="ctr">
+              <a:noAutofit/>
+            </a:bodyPr>
+            <a:lstStyle>
+              <a:lvl1pPr marL="0" indent="0" algn="l">
+                <a:lnSpc>
+                  <a:spcPts val="1960"/>
+                </a:lnSpc>
+                <a:spcBef>
+                  <a:spcPts val="0"/>
+                </a:spcBef>
+                <a:buNone/>
+                <a:defRPr sz="1400" b="0">
+                  <a:solidFill>
+                    <a:schemeClr val="accent1"/>
+                  </a:solidFill>
+                  <a:latin typeface="+mn-lt"/>
+                  <a:ea typeface="+mn-ea"/>
+                </a:defRPr>
+              </a:lvl1pPr>
+            </a:lstStyle>
+            <a:p>
+              <a:r>
+                <a:rPr lang="ja-JP"/>
+                <a:t>01</a:t>
+              </a:r>
+            </a:p>
+          </p:txBody>
+        </p:sp>
+        <p:sp>
+          <p:nvSpPr>
+            <p:cNvPr id="10" name="No_02"/>
+            <p:cNvSpPr txBox="1"/>
+            <p:nvPr/>
+          </p:nvSpPr>
+          <p:spPr>
+            <a:xfrm>
+              <a:off x="4724400" y="1117600"/>
+              <a:ext cx="381000" cy="247650"/>
+            </a:xfrm>
+            <a:prstGeom prst="rect">
+              <a:avLst/>
+            </a:prstGeom>
+            <a:noFill/>
+          </p:spPr>
+          <p:txBody>
+            <a:bodyPr wrap="square" lIns="0" tIns="0" rIns="0" bIns="0" anchor="ctr">
+              <a:noAutofit/>
+            </a:bodyPr>
+            <a:lstStyle>
+              <a:lvl1pPr marL="0" indent="0" algn="l">
+                <a:lnSpc>
+                  <a:spcPts val="1960"/>
+                </a:lnSpc>
+                <a:spcBef>
+                  <a:spcPts val="0"/>
+                </a:spcBef>
+                <a:buNone/>
+                <a:defRPr sz="1400" b="0">
+                  <a:solidFill>
+                    <a:schemeClr val="accent1"/>
+                  </a:solidFill>
+                  <a:latin typeface="+mn-lt"/>
+                  <a:ea typeface="+mn-ea"/>
+                </a:defRPr>
+              </a:lvl1pPr>
+            </a:lstStyle>
+            <a:p>
+              <a:r>
+                <a:rPr lang="ja-JP"/>
+                <a:t>02</a:t>
+              </a:r>
+            </a:p>
+          </p:txBody>
+        </p:sp>
+        <p:sp>
+          <p:nvSpPr>
+            <p:cNvPr id="11" name="No_03"/>
+            <p:cNvSpPr txBox="1"/>
+            <p:nvPr/>
+          </p:nvSpPr>
+          <p:spPr>
+            <a:xfrm>
+              <a:off x="457200" y="2387600"/>
+              <a:ext cx="381000" cy="247650"/>
+            </a:xfrm>
+            <a:prstGeom prst="rect">
+              <a:avLst/>
+            </a:prstGeom>
+            <a:noFill/>
+          </p:spPr>
+          <p:txBody>
+            <a:bodyPr wrap="square" lIns="0" tIns="0" rIns="0" bIns="0" anchor="ctr">
+              <a:noAutofit/>
+            </a:bodyPr>
+            <a:lstStyle>
+              <a:lvl1pPr marL="0" indent="0" algn="l">
+                <a:lnSpc>
+                  <a:spcPts val="1960"/>
+                </a:lnSpc>
+                <a:spcBef>
+                  <a:spcPts val="0"/>
+                </a:spcBef>
+                <a:buNone/>
+                <a:defRPr sz="1400" b="0">
+                  <a:solidFill>
+                    <a:schemeClr val="accent1"/>
+                  </a:solidFill>
+                  <a:latin typeface="+mn-lt"/>
+                  <a:ea typeface="+mn-ea"/>
+                </a:defRPr>
+              </a:lvl1pPr>
+            </a:lstStyle>
+            <a:p>
+              <a:r>
+                <a:rPr lang="ja-JP"/>
+                <a:t>03</a:t>
+              </a:r>
+            </a:p>
+          </p:txBody>
+        </p:sp>
+        <p:sp>
+          <p:nvSpPr>
+            <p:cNvPr id="12" name="No_04"/>
+            <p:cNvSpPr txBox="1"/>
+            <p:nvPr/>
+          </p:nvSpPr>
+          <p:spPr>
+            <a:xfrm>
+              <a:off x="4724400" y="2387600"/>
+              <a:ext cx="381000" cy="247650"/>
+            </a:xfrm>
+            <a:prstGeom prst="rect">
+              <a:avLst/>
+            </a:prstGeom>
+            <a:noFill/>
+          </p:spPr>
+          <p:txBody>
+            <a:bodyPr wrap="square" lIns="0" tIns="0" rIns="0" bIns="0" anchor="ctr">
+              <a:noAutofit/>
+            </a:bodyPr>
+            <a:lstStyle>
+              <a:lvl1pPr marL="0" indent="0" algn="l">
+                <a:lnSpc>
+                  <a:spcPts val="1960"/>
+                </a:lnSpc>
+                <a:spcBef>
+                  <a:spcPts val="0"/>
+                </a:spcBef>
+                <a:buNone/>
+                <a:defRPr sz="1400" b="0">
+                  <a:solidFill>
+                    <a:schemeClr val="accent1"/>
+                  </a:solidFill>
+                  <a:latin typeface="+mn-lt"/>
+                  <a:ea typeface="+mn-ea"/>
+                </a:defRPr>
+              </a:lvl1pPr>
+            </a:lstStyle>
+            <a:p>
+              <a:r>
+                <a:rPr lang="ja-JP"/>
+                <a:t>04</a:t>
+              </a:r>
+            </a:p>
+          </p:txBody>
+        </p:sp>
+        <p:sp>
+          <p:nvSpPr>
+            <p:cNvPr id="13" name="No_05"/>
+            <p:cNvSpPr txBox="1"/>
+            <p:nvPr/>
+          </p:nvSpPr>
+          <p:spPr>
+            <a:xfrm>
+              <a:off x="457200" y="3657600"/>
+              <a:ext cx="381000" cy="247650"/>
+            </a:xfrm>
+            <a:prstGeom prst="rect">
+              <a:avLst/>
+            </a:prstGeom>
+            <a:noFill/>
+          </p:spPr>
+          <p:txBody>
+            <a:bodyPr wrap="square" lIns="0" tIns="0" rIns="0" bIns="0" anchor="ctr">
+              <a:noAutofit/>
+            </a:bodyPr>
+            <a:lstStyle>
+              <a:lvl1pPr marL="0" indent="0" algn="l">
+                <a:lnSpc>
+                  <a:spcPts val="1960"/>
+                </a:lnSpc>
+                <a:spcBef>
+                  <a:spcPts val="0"/>
+                </a:spcBef>
+                <a:buNone/>
+                <a:defRPr sz="1400" b="0">
+                  <a:solidFill>
+                    <a:schemeClr val="accent1"/>
+                  </a:solidFill>
+                  <a:latin typeface="+mn-lt"/>
+                  <a:ea typeface="+mn-ea"/>
+                </a:defRPr>
+              </a:lvl1pPr>
+            </a:lstStyle>
+            <a:p>
+              <a:r>
+                <a:rPr lang="ja-JP"/>
+                <a:t>05</a:t>
+              </a:r>
+            </a:p>
+          </p:txBody>
+        </p:sp>
+        <p:sp>
+          <p:nvSpPr>
+            <p:cNvPr id="14" name="No_06"/>
+            <p:cNvSpPr txBox="1"/>
+            <p:nvPr/>
+          </p:nvSpPr>
+          <p:spPr>
+            <a:xfrm>
+              <a:off x="4724400" y="3657600"/>
+              <a:ext cx="381000" cy="247650"/>
+            </a:xfrm>
+            <a:prstGeom prst="rect">
+              <a:avLst/>
+            </a:prstGeom>
+            <a:noFill/>
+          </p:spPr>
+          <p:txBody>
+            <a:bodyPr wrap="square" lIns="0" tIns="0" rIns="0" bIns="0" anchor="ctr">
+              <a:noAutofit/>
+            </a:bodyPr>
+            <a:lstStyle>
+              <a:lvl1pPr marL="0" indent="0" algn="l">
+                <a:lnSpc>
+                  <a:spcPts val="1960"/>
+                </a:lnSpc>
+                <a:spcBef>
+                  <a:spcPts val="0"/>
+                </a:spcBef>
+                <a:buNone/>
+                <a:defRPr sz="1400" b="0">
+                  <a:solidFill>
+                    <a:schemeClr val="accent1"/>
+                  </a:solidFill>
+                  <a:latin typeface="+mn-lt"/>
+                  <a:ea typeface="+mn-ea"/>
+                </a:defRPr>
+              </a:lvl1pPr>
+            </a:lstStyle>
+            <a:p>
+              <a:r>
+                <a:rPr lang="ja-JP"/>
+                <a:t>06</a:t>
+              </a:r>
+            </a:p>
+          </p:txBody>
+        </p:sp>
+        <p:sp>
+          <p:nvSpPr>
+            <p:cNvPr id="15" name="Title_01"/>
+            <p:cNvSpPr txBox="1"/>
+            <p:nvPr/>
+          </p:nvSpPr>
+          <p:spPr>
+            <a:xfrm>
+              <a:off x="914400" y="1079500"/>
+              <a:ext cx="2946400" cy="298450"/>
+            </a:xfrm>
+            <a:prstGeom prst="rect">
+              <a:avLst/>
+            </a:prstGeom>
+            <a:noFill/>
+          </p:spPr>
+          <p:txBody>
+            <a:bodyPr wrap="square" lIns="0" tIns="0" rIns="0" bIns="0" anchor="ctr">
+              <a:noAutofit/>
+            </a:bodyPr>
+            <a:lstStyle>
+              <a:lvl1pPr marL="0" indent="0" algn="l">
+                <a:lnSpc>
+                  <a:spcPts val="2340"/>
+                </a:lnSpc>
+                <a:spcBef>
+                  <a:spcPts val="0"/>
+                </a:spcBef>
+                <a:buNone/>
+                <a:defRPr sz="1800" b="1">
+                  <a:solidFill>
+                    <a:schemeClr val="tx1"/>
+                  </a:solidFill>
+                  <a:latin typeface="+mn-lt"/>
+                  <a:ea typeface="+mn-ea"/>
+                </a:defRPr>
+              </a:lvl1pPr>
+            </a:lstStyle>
+            <a:p>
+              <a:r>
+                <a:rPr lang="ja-JP"/>
+                <a:t>今月の読まれ方</a:t>
+              </a:r>
+            </a:p>
+          </p:txBody>
+        </p:sp>
+        <p:sp>
+          <p:nvSpPr>
+            <p:cNvPr id="16" name="Title_02"/>
+            <p:cNvSpPr txBox="1"/>
+            <p:nvPr/>
+          </p:nvSpPr>
+          <p:spPr>
+            <a:xfrm>
+              <a:off x="5181600" y="1079500"/>
+              <a:ext cx="2946400" cy="298450"/>
+            </a:xfrm>
+            <a:prstGeom prst="rect">
+              <a:avLst/>
+            </a:prstGeom>
+            <a:noFill/>
+          </p:spPr>
+          <p:txBody>
+            <a:bodyPr wrap="square" lIns="0" tIns="0" rIns="0" bIns="0" anchor="ctr">
+              <a:noAutofit/>
+            </a:bodyPr>
+            <a:lstStyle>
+              <a:lvl1pPr marL="0" indent="0" algn="l">
+                <a:lnSpc>
+                  <a:spcPts val="2340"/>
+                </a:lnSpc>
+                <a:spcBef>
+                  <a:spcPts val="0"/>
+                </a:spcBef>
+                <a:buNone/>
+                <a:defRPr sz="1800" b="1">
+                  <a:solidFill>
+                    <a:schemeClr val="tx1"/>
+                  </a:solidFill>
+                  <a:latin typeface="+mn-lt"/>
+                  <a:ea typeface="+mn-ea"/>
+                </a:defRPr>
+              </a:lvl1pPr>
+            </a:lstStyle>
+            <a:p>
+              <a:r>
+                <a:rPr lang="ja-JP"/>
+                <a:t>記事ごとの成績</a:t>
+              </a:r>
+            </a:p>
+          </p:txBody>
+        </p:sp>
+        <p:sp>
+          <p:nvSpPr>
+            <p:cNvPr id="17" name="Title_03"/>
+            <p:cNvSpPr txBox="1"/>
+            <p:nvPr/>
+          </p:nvSpPr>
+          <p:spPr>
+            <a:xfrm>
+              <a:off x="914400" y="2349500"/>
+              <a:ext cx="2946400" cy="298450"/>
+            </a:xfrm>
+            <a:prstGeom prst="rect">
+              <a:avLst/>
+            </a:prstGeom>
+            <a:noFill/>
+          </p:spPr>
+          <p:txBody>
+            <a:bodyPr wrap="square" lIns="0" tIns="0" rIns="0" bIns="0" anchor="ctr">
+              <a:noAutofit/>
+            </a:bodyPr>
+            <a:lstStyle>
+              <a:lvl1pPr marL="0" indent="0" algn="l">
+                <a:lnSpc>
+                  <a:spcPts val="2340"/>
+                </a:lnSpc>
+                <a:spcBef>
+                  <a:spcPts val="0"/>
+                </a:spcBef>
+                <a:buNone/>
+                <a:defRPr sz="1800" b="1">
+                  <a:solidFill>
+                    <a:schemeClr val="tx1"/>
+                  </a:solidFill>
+                  <a:latin typeface="+mn-lt"/>
+                  <a:ea typeface="+mn-ea"/>
+                </a:defRPr>
+              </a:lvl1pPr>
+            </a:lstStyle>
+            <a:p>
+              <a:r>
+                <a:rPr lang="ja-JP"/>
+                <a:t>流入元の変化</a:t>
+              </a:r>
+            </a:p>
+          </p:txBody>
+        </p:sp>
+        <p:sp>
+          <p:nvSpPr>
+            <p:cNvPr id="18" name="Title_04"/>
+            <p:cNvSpPr txBox="1"/>
+            <p:nvPr/>
+          </p:nvSpPr>
+          <p:spPr>
+            <a:xfrm>
+              <a:off x="5181600" y="2349500"/>
+              <a:ext cx="2946400" cy="298450"/>
+            </a:xfrm>
+            <a:prstGeom prst="rect">
+              <a:avLst/>
+            </a:prstGeom>
+            <a:noFill/>
+          </p:spPr>
+          <p:txBody>
+            <a:bodyPr wrap="square" lIns="0" tIns="0" rIns="0" bIns="0" anchor="ctr">
+              <a:noAutofit/>
+            </a:bodyPr>
+            <a:lstStyle>
+              <a:lvl1pPr marL="0" indent="0" algn="l">
+                <a:lnSpc>
+                  <a:spcPts val="2340"/>
+                </a:lnSpc>
+                <a:spcBef>
+                  <a:spcPts val="0"/>
+                </a:spcBef>
+                <a:buNone/>
+                <a:defRPr sz="1800" b="1">
+                  <a:solidFill>
+                    <a:schemeClr val="tx1"/>
+                  </a:solidFill>
+                  <a:latin typeface="+mn-lt"/>
+                  <a:ea typeface="+mn-ea"/>
+                </a:defRPr>
+              </a:lvl1pPr>
+            </a:lstStyle>
+            <a:p>
+              <a:r>
+                <a:rPr lang="ja-JP"/>
+                <a:t>うまくいった型</a:t>
+              </a:r>
+            </a:p>
+          </p:txBody>
+        </p:sp>
+        <p:sp>
+          <p:nvSpPr>
+            <p:cNvPr id="19" name="Title_05"/>
+            <p:cNvSpPr txBox="1"/>
+            <p:nvPr/>
+          </p:nvSpPr>
+          <p:spPr>
+            <a:xfrm>
+              <a:off x="914400" y="3619500"/>
+              <a:ext cx="2946400" cy="298450"/>
+            </a:xfrm>
+            <a:prstGeom prst="rect">
+              <a:avLst/>
+            </a:prstGeom>
+            <a:noFill/>
+          </p:spPr>
+          <p:txBody>
+            <a:bodyPr wrap="square" lIns="0" tIns="0" rIns="0" bIns="0" anchor="ctr">
+              <a:noAutofit/>
+            </a:bodyPr>
+            <a:lstStyle>
+              <a:lvl1pPr marL="0" indent="0" algn="l">
+                <a:lnSpc>
+                  <a:spcPts val="2340"/>
+                </a:lnSpc>
+                <a:spcBef>
+                  <a:spcPts val="0"/>
+                </a:spcBef>
+                <a:buNone/>
+                <a:defRPr sz="1800" b="1">
+                  <a:solidFill>
+                    <a:schemeClr val="tx1"/>
+                  </a:solidFill>
+                  <a:latin typeface="+mn-lt"/>
+                  <a:ea typeface="+mn-ea"/>
+                </a:defRPr>
+              </a:lvl1pPr>
+            </a:lstStyle>
+            <a:p>
+              <a:r>
+                <a:rPr lang="ja-JP"/>
+                <a:t>次の一手</a:t>
+              </a:r>
+            </a:p>
+          </p:txBody>
+        </p:sp>
+        <p:sp>
+          <p:nvSpPr>
+            <p:cNvPr id="20" name="Title_06"/>
+            <p:cNvSpPr txBox="1"/>
+            <p:nvPr/>
+          </p:nvSpPr>
+          <p:spPr>
+            <a:xfrm>
+              <a:off x="5181600" y="3619500"/>
+              <a:ext cx="2946400" cy="298450"/>
+            </a:xfrm>
+            <a:prstGeom prst="rect">
+              <a:avLst/>
+            </a:prstGeom>
+            <a:noFill/>
+          </p:spPr>
+          <p:txBody>
+            <a:bodyPr wrap="square" lIns="0" tIns="0" rIns="0" bIns="0" anchor="ctr">
+              <a:noAutofit/>
+            </a:bodyPr>
+            <a:lstStyle>
+              <a:lvl1pPr marL="0" indent="0" algn="l">
+                <a:lnSpc>
+                  <a:spcPts val="2340"/>
+                </a:lnSpc>
+                <a:spcBef>
+                  <a:spcPts val="0"/>
+                </a:spcBef>
+                <a:buNone/>
+                <a:defRPr sz="1800" b="1">
+                  <a:solidFill>
+                    <a:schemeClr val="tx1"/>
+                  </a:solidFill>
+                  <a:latin typeface="+mn-lt"/>
+                  <a:ea typeface="+mn-ea"/>
+                </a:defRPr>
+              </a:lvl1pPr>
+            </a:lstStyle>
+            <a:p>
+              <a:r>
+                <a:rPr lang="ja-JP"/>
+                <a:t>付録</a:t>
+              </a:r>
+            </a:p>
+          </p:txBody>
+        </p:sp>
+        <p:sp>
+          <p:nvSpPr>
+            <p:cNvPr id="21" name="Sub_01"/>
+            <p:cNvSpPr txBox="1"/>
+            <p:nvPr/>
+          </p:nvSpPr>
+          <p:spPr>
+            <a:xfrm>
+              <a:off x="914400" y="1409700"/>
+              <a:ext cx="2946400" cy="196850"/>
+            </a:xfrm>
+            <a:prstGeom prst="rect">
+              <a:avLst/>
+            </a:prstGeom>
+            <a:noFill/>
+          </p:spPr>
+          <p:txBody>
+            <a:bodyPr wrap="square" lIns="0" tIns="0" rIns="0" bIns="0" anchor="ctr">
+              <a:noAutofit/>
+            </a:bodyPr>
+            <a:lstStyle>
+              <a:lvl1pPr marL="0" indent="0" algn="l">
+                <a:lnSpc>
+                  <a:spcPts val="1540"/>
+                </a:lnSpc>
+                <a:spcBef>
+                  <a:spcPts val="0"/>
+                </a:spcBef>
+                <a:buNone/>
+                <a:defRPr sz="1100" b="0">
+                  <a:solidFill>
+                    <a:schemeClr val="tx2"/>
+                  </a:solidFill>
+                  <a:latin typeface="+mn-lt"/>
+                  <a:ea typeface="+mn-ea"/>
+                </a:defRPr>
+              </a:lvl1pPr>
+            </a:lstStyle>
+            <a:p>
+              <a:r>
+                <a:rPr lang="ja-JP"/>
+                <a:t>PV・スキ・フォロワー</a:t>
+              </a:r>
+            </a:p>
+          </p:txBody>
+        </p:sp>
+        <p:sp>
+          <p:nvSpPr>
+            <p:cNvPr id="22" name="Sub_02"/>
+            <p:cNvSpPr txBox="1"/>
+            <p:nvPr/>
+          </p:nvSpPr>
+          <p:spPr>
+            <a:xfrm>
+              <a:off x="5181600" y="1409700"/>
+              <a:ext cx="2946400" cy="196850"/>
+            </a:xfrm>
+            <a:prstGeom prst="rect">
+              <a:avLst/>
+            </a:prstGeom>
+            <a:noFill/>
+          </p:spPr>
+          <p:txBody>
+            <a:bodyPr wrap="square" lIns="0" tIns="0" rIns="0" bIns="0" anchor="ctr">
+              <a:noAutofit/>
+            </a:bodyPr>
+            <a:lstStyle>
+              <a:lvl1pPr marL="0" indent="0" algn="l">
+                <a:lnSpc>
+                  <a:spcPts val="1540"/>
+                </a:lnSpc>
+                <a:spcBef>
+                  <a:spcPts val="0"/>
+                </a:spcBef>
+                <a:buNone/>
+                <a:defRPr sz="1100" b="0">
+                  <a:solidFill>
+                    <a:schemeClr val="tx2"/>
+                  </a:solidFill>
+                  <a:latin typeface="+mn-lt"/>
+                  <a:ea typeface="+mn-ea"/>
+                </a:defRPr>
+              </a:lvl1pPr>
+            </a:lstStyle>
+            <a:p>
+              <a:r>
+                <a:rPr lang="ja-JP"/>
+                <a:t>連載 #1〜#4 の比較</a:t>
+              </a:r>
+            </a:p>
+          </p:txBody>
+        </p:sp>
+        <p:sp>
+          <p:nvSpPr>
+            <p:cNvPr id="23" name="Sub_03"/>
+            <p:cNvSpPr txBox="1"/>
+            <p:nvPr/>
+          </p:nvSpPr>
+          <p:spPr>
+            <a:xfrm>
+              <a:off x="914400" y="2679700"/>
+              <a:ext cx="2946400" cy="196850"/>
+            </a:xfrm>
+            <a:prstGeom prst="rect">
+              <a:avLst/>
+            </a:prstGeom>
+            <a:noFill/>
+          </p:spPr>
+          <p:txBody>
+            <a:bodyPr wrap="square" lIns="0" tIns="0" rIns="0" bIns="0" anchor="ctr">
+              <a:noAutofit/>
+            </a:bodyPr>
+            <a:lstStyle>
+              <a:lvl1pPr marL="0" indent="0" algn="l">
+                <a:lnSpc>
+                  <a:spcPts val="1540"/>
+                </a:lnSpc>
+                <a:spcBef>
+                  <a:spcPts val="0"/>
+                </a:spcBef>
+                <a:buNone/>
+                <a:defRPr sz="1100" b="0">
+                  <a:solidFill>
+                    <a:schemeClr val="tx2"/>
+                  </a:solidFill>
+                  <a:latin typeface="+mn-lt"/>
+                  <a:ea typeface="+mn-ea"/>
+                </a:defRPr>
+              </a:lvl1pPr>
+            </a:lstStyle>
+            <a:p>
+              <a:r>
+                <a:rPr lang="ja-JP"/>
+                <a:t>検索が全体の 58%</a:t>
+              </a:r>
+            </a:p>
+          </p:txBody>
+        </p:sp>
+        <p:sp>
+          <p:nvSpPr>
+            <p:cNvPr id="24" name="Sub_04"/>
+            <p:cNvSpPr txBox="1"/>
+            <p:nvPr/>
+          </p:nvSpPr>
+          <p:spPr>
+            <a:xfrm>
+              <a:off x="5181600" y="2679700"/>
+              <a:ext cx="2946400" cy="196850"/>
+            </a:xfrm>
+            <a:prstGeom prst="rect">
+              <a:avLst/>
+            </a:prstGeom>
+            <a:noFill/>
+          </p:spPr>
+          <p:txBody>
+            <a:bodyPr wrap="square" lIns="0" tIns="0" rIns="0" bIns="0" anchor="ctr">
+              <a:noAutofit/>
+            </a:bodyPr>
+            <a:lstStyle>
+              <a:lvl1pPr marL="0" indent="0" algn="l">
+                <a:lnSpc>
+                  <a:spcPts val="1540"/>
+                </a:lnSpc>
+                <a:spcBef>
+                  <a:spcPts val="0"/>
+                </a:spcBef>
+                <a:buNone/>
+                <a:defRPr sz="1100" b="0">
+                  <a:solidFill>
+                    <a:schemeClr val="tx2"/>
+                  </a:solidFill>
+                  <a:latin typeface="+mn-lt"/>
+                  <a:ea typeface="+mn-ea"/>
+                </a:defRPr>
+              </a:lvl1pPr>
+            </a:lstStyle>
+            <a:p>
+              <a:r>
+                <a:rPr lang="ja-JP"/>
+                <a:t>一次情報 × 図解</a:t>
+              </a:r>
+            </a:p>
+          </p:txBody>
+        </p:sp>
+        <p:sp>
+          <p:nvSpPr>
+            <p:cNvPr id="25" name="Sub_05"/>
+            <p:cNvSpPr txBox="1"/>
+            <p:nvPr/>
+          </p:nvSpPr>
+          <p:spPr>
+            <a:xfrm>
+              <a:off x="914400" y="3949700"/>
+              <a:ext cx="2946400" cy="196850"/>
+            </a:xfrm>
+            <a:prstGeom prst="rect">
+              <a:avLst/>
+            </a:prstGeom>
+            <a:noFill/>
+          </p:spPr>
+          <p:txBody>
+            <a:bodyPr wrap="square" lIns="0" tIns="0" rIns="0" bIns="0" anchor="ctr">
+              <a:noAutofit/>
+            </a:bodyPr>
+            <a:lstStyle>
+              <a:lvl1pPr marL="0" indent="0" algn="l">
+                <a:lnSpc>
+                  <a:spcPts val="1540"/>
+                </a:lnSpc>
+                <a:spcBef>
+                  <a:spcPts val="0"/>
+                </a:spcBef>
+                <a:buNone/>
+                <a:defRPr sz="1100" b="0">
+                  <a:solidFill>
+                    <a:schemeClr val="tx2"/>
+                  </a:solidFill>
+                  <a:latin typeface="+mn-lt"/>
+                  <a:ea typeface="+mn-ea"/>
+                </a:defRPr>
+              </a:lvl1pPr>
+            </a:lstStyle>
+            <a:p>
+              <a:r>
+                <a:rPr lang="ja-JP"/>
+                <a:t>連載 #5 のテーマ</a:t>
+              </a:r>
+            </a:p>
+          </p:txBody>
+        </p:sp>
+        <p:sp>
+          <p:nvSpPr>
+            <p:cNvPr id="26" name="Sub_06"/>
+            <p:cNvSpPr txBox="1"/>
+            <p:nvPr/>
+          </p:nvSpPr>
+          <p:spPr>
+            <a:xfrm>
+              <a:off x="5181600" y="3949700"/>
+              <a:ext cx="2946400" cy="196850"/>
+            </a:xfrm>
+            <a:prstGeom prst="rect">
+              <a:avLst/>
+            </a:prstGeom>
+            <a:noFill/>
+          </p:spPr>
+          <p:txBody>
+            <a:bodyPr wrap="square" lIns="0" tIns="0" rIns="0" bIns="0" anchor="ctr">
+              <a:noAutofit/>
+            </a:bodyPr>
+            <a:lstStyle>
+              <a:lvl1pPr marL="0" indent="0" algn="l">
+                <a:lnSpc>
+                  <a:spcPts val="1540"/>
+                </a:lnSpc>
+                <a:spcBef>
+                  <a:spcPts val="0"/>
+                </a:spcBef>
+                <a:buNone/>
+                <a:defRPr sz="1100" b="0">
+                  <a:solidFill>
+                    <a:schemeClr val="tx2"/>
+                  </a:solidFill>
+                  <a:latin typeface="+mn-lt"/>
+                  <a:ea typeface="+mn-ea"/>
+                </a:defRPr>
+              </a:lvl1pPr>
+            </a:lstStyle>
+            <a:p>
+              <a:r>
+                <a:rPr lang="ja-JP"/>
+                <a:t>数値の定義と出典</a:t>
+              </a:r>
+            </a:p>
+          </p:txBody>
+        </p:sp>
+        <p:sp>
+          <p:nvSpPr>
+            <p:cNvPr id="27" name="Page_01"/>
+            <p:cNvSpPr txBox="1"/>
+            <p:nvPr/>
+          </p:nvSpPr>
+          <p:spPr>
+            <a:xfrm>
+              <a:off x="4038600" y="1117600"/>
+              <a:ext cx="381000" cy="247650"/>
+            </a:xfrm>
+            <a:prstGeom prst="rect">
+              <a:avLst/>
+            </a:prstGeom>
+            <a:noFill/>
+          </p:spPr>
+          <p:txBody>
+            <a:bodyPr wrap="square" lIns="0" tIns="0" rIns="0" bIns="0" anchor="ctr">
+              <a:noAutofit/>
+            </a:bodyPr>
+            <a:lstStyle>
+              <a:lvl1pPr marL="0" indent="0" algn="r">
+                <a:lnSpc>
+                  <a:spcPts val="1960"/>
+                </a:lnSpc>
+                <a:spcBef>
+                  <a:spcPts val="0"/>
+                </a:spcBef>
+                <a:buNone/>
+                <a:defRPr sz="1400" b="0">
+                  <a:solidFill>
+                    <a:schemeClr val="tx2"/>
+                  </a:solidFill>
+                  <a:latin typeface="+mn-lt"/>
+                  <a:ea typeface="+mn-ea"/>
+                </a:defRPr>
+              </a:lvl1pPr>
+            </a:lstStyle>
+            <a:p>
+              <a:r>
+                <a:rPr lang="ja-JP"/>
+                <a:t>2</a:t>
+              </a:r>
+            </a:p>
+          </p:txBody>
+        </p:sp>
+        <p:sp>
+          <p:nvSpPr>
+            <p:cNvPr id="28" name="Page_02"/>
+            <p:cNvSpPr txBox="1"/>
+            <p:nvPr/>
+          </p:nvSpPr>
+          <p:spPr>
+            <a:xfrm>
+              <a:off x="8305800" y="1117600"/>
+              <a:ext cx="381000" cy="247650"/>
+            </a:xfrm>
+            <a:prstGeom prst="rect">
+              <a:avLst/>
+            </a:prstGeom>
+            <a:noFill/>
+          </p:spPr>
+          <p:txBody>
+            <a:bodyPr wrap="square" lIns="0" tIns="0" rIns="0" bIns="0" anchor="ctr">
+              <a:noAutofit/>
+            </a:bodyPr>
+            <a:lstStyle>
+              <a:lvl1pPr marL="0" indent="0" algn="r">
+                <a:lnSpc>
+                  <a:spcPts val="1960"/>
+                </a:lnSpc>
+                <a:spcBef>
+                  <a:spcPts val="0"/>
+                </a:spcBef>
+                <a:buNone/>
+                <a:defRPr sz="1400" b="0">
+                  <a:solidFill>
+                    <a:schemeClr val="tx2"/>
+                  </a:solidFill>
+                  <a:latin typeface="+mn-lt"/>
+                  <a:ea typeface="+mn-ea"/>
+                </a:defRPr>
+              </a:lvl1pPr>
+            </a:lstStyle>
+            <a:p>
+              <a:r>
+                <a:rPr lang="ja-JP"/>
+                <a:t>6</a:t>
+              </a:r>
+            </a:p>
+          </p:txBody>
+        </p:sp>
+        <p:sp>
+          <p:nvSpPr>
+            <p:cNvPr id="29" name="Page_03"/>
+            <p:cNvSpPr txBox="1"/>
+            <p:nvPr/>
+          </p:nvSpPr>
+          <p:spPr>
+            <a:xfrm>
+              <a:off x="4038600" y="2387600"/>
+              <a:ext cx="381000" cy="247650"/>
+            </a:xfrm>
+            <a:prstGeom prst="rect">
+              <a:avLst/>
+            </a:prstGeom>
+            <a:noFill/>
+          </p:spPr>
+          <p:txBody>
+            <a:bodyPr wrap="square" lIns="0" tIns="0" rIns="0" bIns="0" anchor="ctr">
+              <a:noAutofit/>
+            </a:bodyPr>
+            <a:lstStyle>
+              <a:lvl1pPr marL="0" indent="0" algn="r">
+                <a:lnSpc>
+                  <a:spcPts val="1960"/>
+                </a:lnSpc>
+                <a:spcBef>
+                  <a:spcPts val="0"/>
+                </a:spcBef>
+                <a:buNone/>
+                <a:defRPr sz="1400" b="0">
+                  <a:solidFill>
+                    <a:schemeClr val="tx2"/>
+                  </a:solidFill>
+                  <a:latin typeface="+mn-lt"/>
+                  <a:ea typeface="+mn-ea"/>
+                </a:defRPr>
+              </a:lvl1pPr>
+            </a:lstStyle>
+            <a:p>
+              <a:r>
+                <a:rPr lang="ja-JP"/>
+                <a:t>9</a:t>
+              </a:r>
+            </a:p>
+          </p:txBody>
+        </p:sp>
+        <p:sp>
+          <p:nvSpPr>
+            <p:cNvPr id="30" name="Page_04"/>
+            <p:cNvSpPr txBox="1"/>
+            <p:nvPr/>
+          </p:nvSpPr>
+          <p:spPr>
+            <a:xfrm>
+              <a:off x="8305800" y="2387600"/>
+              <a:ext cx="381000" cy="247650"/>
+            </a:xfrm>
+            <a:prstGeom prst="rect">
+              <a:avLst/>
+            </a:prstGeom>
+            <a:noFill/>
+          </p:spPr>
+          <p:txBody>
+            <a:bodyPr wrap="square" lIns="0" tIns="0" rIns="0" bIns="0" anchor="ctr">
+              <a:noAutofit/>
+            </a:bodyPr>
+            <a:lstStyle>
+              <a:lvl1pPr marL="0" indent="0" algn="r">
+                <a:lnSpc>
+                  <a:spcPts val="1960"/>
+                </a:lnSpc>
+                <a:spcBef>
+                  <a:spcPts val="0"/>
+                </a:spcBef>
+                <a:buNone/>
+                <a:defRPr sz="1400" b="0">
+                  <a:solidFill>
+                    <a:schemeClr val="tx2"/>
+                  </a:solidFill>
+                  <a:latin typeface="+mn-lt"/>
+                  <a:ea typeface="+mn-ea"/>
+                </a:defRPr>
+              </a:lvl1pPr>
+            </a:lstStyle>
+            <a:p>
+              <a:r>
+                <a:rPr lang="ja-JP"/>
+                <a:t>12</a:t>
+              </a:r>
+            </a:p>
+          </p:txBody>
+        </p:sp>
+        <p:sp>
+          <p:nvSpPr>
+            <p:cNvPr id="31" name="Page_05"/>
+            <p:cNvSpPr txBox="1"/>
+            <p:nvPr/>
+          </p:nvSpPr>
+          <p:spPr>
+            <a:xfrm>
+              <a:off x="4038600" y="3657600"/>
+              <a:ext cx="381000" cy="247650"/>
+            </a:xfrm>
+            <a:prstGeom prst="rect">
+              <a:avLst/>
+            </a:prstGeom>
+            <a:noFill/>
+          </p:spPr>
+          <p:txBody>
+            <a:bodyPr wrap="square" lIns="0" tIns="0" rIns="0" bIns="0" anchor="ctr">
+              <a:noAutofit/>
+            </a:bodyPr>
+            <a:lstStyle>
+              <a:lvl1pPr marL="0" indent="0" algn="r">
+                <a:lnSpc>
+                  <a:spcPts val="1960"/>
+                </a:lnSpc>
+                <a:spcBef>
+                  <a:spcPts val="0"/>
+                </a:spcBef>
+                <a:buNone/>
+                <a:defRPr sz="1400" b="0">
+                  <a:solidFill>
+                    <a:schemeClr val="tx2"/>
+                  </a:solidFill>
+                  <a:latin typeface="+mn-lt"/>
+                  <a:ea typeface="+mn-ea"/>
+                </a:defRPr>
+              </a:lvl1pPr>
+            </a:lstStyle>
+            <a:p>
+              <a:r>
+                <a:rPr lang="ja-JP"/>
+                <a:t>15</a:t>
+              </a:r>
+            </a:p>
+          </p:txBody>
+        </p:sp>
+        <p:sp>
+          <p:nvSpPr>
+            <p:cNvPr id="32" name="Page_06"/>
+            <p:cNvSpPr txBox="1"/>
+            <p:nvPr/>
+          </p:nvSpPr>
+          <p:spPr>
+            <a:xfrm>
+              <a:off x="8305800" y="3657600"/>
+              <a:ext cx="381000" cy="247650"/>
+            </a:xfrm>
+            <a:prstGeom prst="rect">
+              <a:avLst/>
+            </a:prstGeom>
+            <a:noFill/>
+          </p:spPr>
+          <p:txBody>
+            <a:bodyPr wrap="square" lIns="0" tIns="0" rIns="0" bIns="0" anchor="ctr">
+              <a:noAutofit/>
+            </a:bodyPr>
+            <a:lstStyle>
+              <a:lvl1pPr marL="0" indent="0" algn="r">
+                <a:lnSpc>
+                  <a:spcPts val="1960"/>
+                </a:lnSpc>
+                <a:spcBef>
+                  <a:spcPts val="0"/>
+                </a:spcBef>
+                <a:buNone/>
+                <a:defRPr sz="1400" b="0">
+                  <a:solidFill>
+                    <a:schemeClr val="tx2"/>
+                  </a:solidFill>
+                  <a:latin typeface="+mn-lt"/>
+                  <a:ea typeface="+mn-ea"/>
+                </a:defRPr>
+              </a:lvl1pPr>
+            </a:lstStyle>
+            <a:p>
+              <a:r>
+                <a:rPr lang="ja-JP"/>
+                <a:t>18</a:t>
+              </a:r>
+            </a:p>
+          </p:txBody>
+        </p:sp>
+      </p:grpSp>
+      <p:sp>
+        <p:nvSpPr>
+          <p:cNvPr id="34" name="SlideNumber"/>
+          <p:cNvSpPr>
+            <a:spLocks noGrp="1"/>
+          </p:cNvSpPr>
+          <p:nvPr>
+            <p:ph type="sldNum" idx="12" sz="quarter"/>
+          </p:nvPr>
+        </p:nvSpPr>
+        <p:spPr/>
+        <p:txBody>
+          <a:bodyPr/>
+          <a:lstStyle/>
+          <a:p>
+            <a:fld id="{B6F15528-21DE-4FAA-801E-634DDDAF4B2B}" type="slidenum">
+              <a:rPr lang="ja-JP"/>
+              <a:t>‹#›</a:t>
+            </a:fld>
+          </a:p>
+        </p:txBody>
+      </p:sp>
+    </p:spTree>
+  </p:cSld>
+  <p:clrMapOvr>
+    <a:masterClrMapping/>
+  </p:clrMapOvr>
+</p:sld>
+</file>
+
+<file path=ppt/slides/slide26.xml><?xml version="1.0" encoding="utf-8"?>
 <p:sld xmlns:a="http://schemas.openxmlformats.org/drawingml/2006/main" xmlns:r="http://schemas.openxmlformats.org/officeDocument/2006/relationships" xmlns:p="http://schemas.openxmlformats.org/presentationml/2006/main">
   <p:cSld>
     <p:spTree>
